--- a/public/portfolio/ppt-design/government-grant/deck.pptx
+++ b/public/portfolio/ppt-design/government-grant/deck.pptx
@@ -180,7 +180,7 @@
                     <a:solidFill>
                       <a:srgbClr val="0A0A0A"/>
                     </a:solidFill>
-                    <a:latin typeface="Arial"/>
+                    <a:latin typeface="Cambria"/>
                   </a:defRPr>
                 </a:pPr>
               </a:p>
@@ -248,7 +248,7 @@
                   <a:solidFill>
                     <a:srgbClr val="0A0A0A"/>
                   </a:solidFill>
-                  <a:latin typeface="Arial"/>
+                  <a:latin typeface="Cambria"/>
                 </a:defRPr>
               </a:pPr>
             </a:p>
@@ -296,7 +296,7 @@
                 <a:solidFill>
                   <a:srgbClr val="525252"/>
                 </a:solidFill>
-                <a:latin typeface="Arial"/>
+                <a:latin typeface="Pretendard"/>
               </a:defRPr>
             </a:pPr>
             <a:endParaRPr lang="en-US"/>
@@ -348,7 +348,7 @@
                 <a:solidFill>
                   <a:srgbClr val="525252"/>
                 </a:solidFill>
-                <a:latin typeface="Arial"/>
+                <a:latin typeface="Cambria"/>
               </a:defRPr>
             </a:pPr>
             <a:endParaRPr lang="en-US"/>
@@ -465,7 +465,7 @@
                       <a:solidFill>
                         <a:srgbClr val="FAFAF9"/>
                       </a:solidFill>
-                      <a:latin typeface="Arial"/>
+                      <a:latin typeface="Cambria"/>
                     </a:defRPr>
                   </a:pPr>
                 </a:p>
@@ -490,7 +490,7 @@
                       <a:solidFill>
                         <a:srgbClr val="FAFAF9"/>
                       </a:solidFill>
-                      <a:latin typeface="Arial"/>
+                      <a:latin typeface="Cambria"/>
                     </a:defRPr>
                   </a:pPr>
                 </a:p>
@@ -515,7 +515,7 @@
                       <a:solidFill>
                         <a:srgbClr val="FAFAF9"/>
                       </a:solidFill>
-                      <a:latin typeface="Arial"/>
+                      <a:latin typeface="Cambria"/>
                     </a:defRPr>
                   </a:pPr>
                 </a:p>
@@ -604,7 +604,10 @@
         <a:lstStyle/>
         <a:p>
           <a:pPr>
-            <a:defRPr sz="1100">      </a:defRPr>
+            <a:defRPr sz="1100">
+              <a:latin typeface="Pretendard"/>
+              <a:cs typeface="Pretendard"/>
+            </a:defRPr>
           </a:pPr>
           <a:endParaRPr lang="en-US"/>
         </a:p>
@@ -672,7 +675,7 @@
                     <a:solidFill>
                       <a:srgbClr val="0A0A0A"/>
                     </a:solidFill>
-                    <a:latin typeface="Arial"/>
+                    <a:latin typeface="Cambria"/>
                   </a:defRPr>
                 </a:pPr>
               </a:p>
@@ -734,7 +737,7 @@
                   <a:solidFill>
                     <a:srgbClr val="0A0A0A"/>
                   </a:solidFill>
-                  <a:latin typeface="Arial"/>
+                  <a:latin typeface="Cambria"/>
                 </a:defRPr>
               </a:pPr>
             </a:p>
@@ -782,7 +785,7 @@
                 <a:solidFill>
                   <a:srgbClr val="525252"/>
                 </a:solidFill>
-                <a:latin typeface="Arial"/>
+                <a:latin typeface="Pretendard"/>
               </a:defRPr>
             </a:pPr>
             <a:endParaRPr lang="en-US"/>
@@ -834,7 +837,7 @@
                 <a:solidFill>
                   <a:srgbClr val="525252"/>
                 </a:solidFill>
-                <a:latin typeface="Arial"/>
+                <a:latin typeface="Cambria"/>
               </a:defRPr>
             </a:pPr>
             <a:endParaRPr lang="en-US"/>
@@ -919,7 +922,7 @@
                     <a:solidFill>
                       <a:srgbClr val="0A0A0A"/>
                     </a:solidFill>
-                    <a:latin typeface="Arial"/>
+                    <a:latin typeface="Cambria"/>
                   </a:defRPr>
                 </a:pPr>
               </a:p>
@@ -999,7 +1002,7 @@
                   <a:solidFill>
                     <a:srgbClr val="0A0A0A"/>
                   </a:solidFill>
-                  <a:latin typeface="Arial"/>
+                  <a:latin typeface="Cambria"/>
                 </a:defRPr>
               </a:pPr>
             </a:p>
@@ -1046,7 +1049,7 @@
                 <a:solidFill>
                   <a:srgbClr val="525252"/>
                 </a:solidFill>
-                <a:latin typeface="Arial"/>
+                <a:latin typeface="Cambria"/>
               </a:defRPr>
             </a:pPr>
             <a:endParaRPr lang="en-US"/>
@@ -1098,7 +1101,7 @@
                 <a:solidFill>
                   <a:srgbClr val="525252"/>
                 </a:solidFill>
-                <a:latin typeface="Arial"/>
+                <a:latin typeface="Cambria"/>
               </a:defRPr>
             </a:pPr>
             <a:endParaRPr lang="en-US"/>
@@ -1183,7 +1186,7 @@
                     <a:solidFill>
                       <a:srgbClr val="0A0A0A"/>
                     </a:solidFill>
-                    <a:latin typeface="Arial"/>
+                    <a:latin typeface="Cambria"/>
                   </a:defRPr>
                 </a:pPr>
               </a:p>
@@ -1287,7 +1290,7 @@
                   <a:solidFill>
                     <a:srgbClr val="0A0A0A"/>
                   </a:solidFill>
-                  <a:latin typeface="Arial"/>
+                  <a:latin typeface="Cambria"/>
                 </a:defRPr>
               </a:pPr>
             </a:p>
@@ -1334,7 +1337,7 @@
                 <a:solidFill>
                   <a:srgbClr val="525252"/>
                 </a:solidFill>
-                <a:latin typeface="Arial"/>
+                <a:latin typeface="Cambria"/>
               </a:defRPr>
             </a:pPr>
             <a:endParaRPr lang="en-US"/>
@@ -1386,7 +1389,7 @@
                 <a:solidFill>
                   <a:srgbClr val="525252"/>
                 </a:solidFill>
-                <a:latin typeface="Arial"/>
+                <a:latin typeface="Cambria"/>
               </a:defRPr>
             </a:pPr>
             <a:endParaRPr lang="en-US"/>
@@ -4796,6 +4799,9 @@
                 <a:solidFill>
                   <a:srgbClr val="FAFAF9"/>
                 </a:solidFill>
+                <a:latin typeface="Cambria" pitchFamily="34" charset="0"/>
+                <a:ea typeface="Cambria" pitchFamily="34" charset="-122"/>
+                <a:cs typeface="Cambria" pitchFamily="34" charset="-120"/>
               </a:rPr>
               <a:t>예비창업패키지 2026 · CONFIDENTIAL · APRIL 2026</a:t>
             </a:r>
@@ -4832,6 +4838,9 @@
                 <a:solidFill>
                   <a:srgbClr val="044E29"/>
                 </a:solidFill>
+                <a:latin typeface="Cambria" pitchFamily="34" charset="0"/>
+                <a:ea typeface="Cambria" pitchFamily="34" charset="-122"/>
+                <a:cs typeface="Cambria" pitchFamily="34" charset="-120"/>
               </a:rPr>
               <a:t>01</a:t>
             </a:r>
@@ -4868,6 +4877,9 @@
                 <a:solidFill>
                   <a:srgbClr val="B85042"/>
                 </a:solidFill>
+                <a:latin typeface="Pretendard" pitchFamily="34" charset="0"/>
+                <a:ea typeface="Pretendard" pitchFamily="34" charset="-122"/>
+                <a:cs typeface="Pretendard" pitchFamily="34" charset="-120"/>
               </a:rPr>
               <a:t>2026 예비창업패키지 · 사업계획서 발표</a:t>
             </a:r>
@@ -4904,6 +4916,9 @@
                 <a:solidFill>
                   <a:srgbClr val="0A0A0A"/>
                 </a:solidFill>
+                <a:latin typeface="Cambria" pitchFamily="34" charset="0"/>
+                <a:ea typeface="Cambria" pitchFamily="34" charset="-122"/>
+                <a:cs typeface="Cambria" pitchFamily="34" charset="-120"/>
               </a:rPr>
               <a:t>SilverCareLab.</a:t>
             </a:r>
@@ -4963,6 +4978,9 @@
                 <a:solidFill>
                   <a:srgbClr val="B85042"/>
                 </a:solidFill>
+                <a:latin typeface="Pretendard" pitchFamily="34" charset="0"/>
+                <a:ea typeface="Pretendard" pitchFamily="34" charset="-122"/>
+                <a:cs typeface="Pretendard" pitchFamily="34" charset="-120"/>
               </a:rPr>
               <a:t>부모님의 안부를 기술이 챙기는 시대.</a:t>
             </a:r>
@@ -4999,6 +5017,9 @@
                 <a:solidFill>
                   <a:srgbClr val="525252"/>
                 </a:solidFill>
+                <a:latin typeface="Pretendard" pitchFamily="34" charset="0"/>
+                <a:ea typeface="Pretendard" pitchFamily="34" charset="-122"/>
+                <a:cs typeface="Pretendard" pitchFamily="34" charset="-120"/>
               </a:rPr>
               <a:t>AI 기반 시니어 일상·복약·낙상 케어 통합 앱</a:t>
             </a:r>
@@ -5058,6 +5079,9 @@
                 <a:solidFill>
                   <a:srgbClr val="B85042"/>
                 </a:solidFill>
+                <a:latin typeface="Pretendard" pitchFamily="34" charset="0"/>
+                <a:ea typeface="Pretendard" pitchFamily="34" charset="-122"/>
+                <a:cs typeface="Pretendard" pitchFamily="34" charset="-120"/>
               </a:rPr>
               <a:t>대표자</a:t>
             </a:r>
@@ -5094,6 +5118,9 @@
                 <a:solidFill>
                   <a:srgbClr val="0A0A0A"/>
                 </a:solidFill>
+                <a:latin typeface="Pretendard" pitchFamily="34" charset="0"/>
+                <a:ea typeface="Pretendard" pitchFamily="34" charset="-122"/>
+                <a:cs typeface="Pretendard" pitchFamily="34" charset="-120"/>
               </a:rPr>
               <a:t>이수진 / CEO &amp; Founder</a:t>
             </a:r>
@@ -5130,6 +5157,9 @@
                 <a:solidFill>
                   <a:srgbClr val="B85042"/>
                 </a:solidFill>
+                <a:latin typeface="Pretendard" pitchFamily="34" charset="0"/>
+                <a:ea typeface="Pretendard" pitchFamily="34" charset="-122"/>
+                <a:cs typeface="Pretendard" pitchFamily="34" charset="-120"/>
               </a:rPr>
               <a:t>회사명</a:t>
             </a:r>
@@ -5166,6 +5196,9 @@
                 <a:solidFill>
                   <a:srgbClr val="0A0A0A"/>
                 </a:solidFill>
+                <a:latin typeface="Pretendard" pitchFamily="34" charset="0"/>
+                <a:ea typeface="Pretendard" pitchFamily="34" charset="-122"/>
+                <a:cs typeface="Pretendard" pitchFamily="34" charset="-120"/>
               </a:rPr>
               <a:t>㈜실버케어랩</a:t>
             </a:r>
@@ -5202,6 +5235,9 @@
                 <a:solidFill>
                   <a:srgbClr val="B85042"/>
                 </a:solidFill>
+                <a:latin typeface="Pretendard" pitchFamily="34" charset="0"/>
+                <a:ea typeface="Pretendard" pitchFamily="34" charset="-122"/>
+                <a:cs typeface="Pretendard" pitchFamily="34" charset="-120"/>
               </a:rPr>
               <a:t>요청 지원금</a:t>
             </a:r>
@@ -5238,6 +5274,9 @@
                 <a:solidFill>
                   <a:srgbClr val="0A0A0A"/>
                 </a:solidFill>
+                <a:latin typeface="Pretendard" pitchFamily="34" charset="0"/>
+                <a:ea typeface="Pretendard" pitchFamily="34" charset="-122"/>
+                <a:cs typeface="Pretendard" pitchFamily="34" charset="-120"/>
               </a:rPr>
               <a:t>1억 원 (사업화 자금)</a:t>
             </a:r>
@@ -5274,6 +5313,9 @@
                 <a:solidFill>
                   <a:srgbClr val="B85042"/>
                 </a:solidFill>
+                <a:latin typeface="Pretendard" pitchFamily="34" charset="0"/>
+                <a:ea typeface="Pretendard" pitchFamily="34" charset="-122"/>
+                <a:cs typeface="Pretendard" pitchFamily="34" charset="-120"/>
               </a:rPr>
               <a:t>발표 일자</a:t>
             </a:r>
@@ -5310,6 +5352,9 @@
                 <a:solidFill>
                   <a:srgbClr val="0A0A0A"/>
                 </a:solidFill>
+                <a:latin typeface="Pretendard" pitchFamily="34" charset="0"/>
+                <a:ea typeface="Pretendard" pitchFamily="34" charset="-122"/>
+                <a:cs typeface="Pretendard" pitchFamily="34" charset="-120"/>
               </a:rPr>
               <a:t>2026.04</a:t>
             </a:r>
@@ -5403,6 +5448,9 @@
                 <a:solidFill>
                   <a:srgbClr val="FAFAF9"/>
                 </a:solidFill>
+                <a:latin typeface="Cambria" pitchFamily="34" charset="0"/>
+                <a:ea typeface="Cambria" pitchFamily="34" charset="-122"/>
+                <a:cs typeface="Cambria" pitchFamily="34" charset="-120"/>
               </a:rPr>
               <a:t>예비창업패키지 2026 · 신청서 · S · 실현 가능성 — 시스템 구성</a:t>
             </a:r>
@@ -5464,6 +5512,9 @@
                 <a:solidFill>
                   <a:srgbClr val="B85042"/>
                 </a:solidFill>
+                <a:latin typeface="Pretendard" pitchFamily="34" charset="0"/>
+                <a:ea typeface="Pretendard" pitchFamily="34" charset="-122"/>
+                <a:cs typeface="Pretendard" pitchFamily="34" charset="-120"/>
               </a:rPr>
               <a:t>S-03 / 시스템 구성도</a:t>
             </a:r>
@@ -5500,6 +5551,9 @@
                 <a:solidFill>
                   <a:srgbClr val="0A0A0A"/>
                 </a:solidFill>
+                <a:latin typeface="Pretendard" pitchFamily="34" charset="0"/>
+                <a:ea typeface="Pretendard" pitchFamily="34" charset="-122"/>
+                <a:cs typeface="Pretendard" pitchFamily="34" charset="-120"/>
               </a:rPr>
               <a:t>센서 → 클라우드 → 가족.</a:t>
             </a:r>
@@ -5559,6 +5613,9 @@
                 <a:solidFill>
                   <a:srgbClr val="525252"/>
                 </a:solidFill>
+                <a:latin typeface="Pretendard" pitchFamily="34" charset="0"/>
+                <a:ea typeface="Pretendard" pitchFamily="34" charset="-122"/>
+                <a:cs typeface="Pretendard" pitchFamily="34" charset="-120"/>
               </a:rPr>
               <a:t>4단계 통합 데이터 흐름. 30초 안에 자녀 알림.</a:t>
             </a:r>
@@ -5620,6 +5677,9 @@
                 <a:solidFill>
                   <a:srgbClr val="B85042"/>
                 </a:solidFill>
+                <a:latin typeface="Cambria" pitchFamily="34" charset="0"/>
+                <a:ea typeface="Cambria" pitchFamily="34" charset="-122"/>
+                <a:cs typeface="Cambria" pitchFamily="34" charset="-120"/>
               </a:rPr>
               <a:t>01</a:t>
             </a:r>
@@ -5656,6 +5716,9 @@
                 <a:solidFill>
                   <a:srgbClr val="0A0A0A"/>
                 </a:solidFill>
+                <a:latin typeface="Pretendard" pitchFamily="34" charset="0"/>
+                <a:ea typeface="Pretendard" pitchFamily="34" charset="-122"/>
+                <a:cs typeface="Pretendard" pitchFamily="34" charset="-120"/>
               </a:rPr>
               <a:t>센서</a:t>
             </a:r>
@@ -5718,6 +5781,9 @@
                 <a:solidFill>
                   <a:srgbClr val="525252"/>
                 </a:solidFill>
+                <a:latin typeface="Pretendard" pitchFamily="34" charset="0"/>
+                <a:ea typeface="Pretendard" pitchFamily="34" charset="-122"/>
+                <a:cs typeface="Pretendard" pitchFamily="34" charset="-120"/>
               </a:rPr>
               <a:t>스마트워치 (9축 가속도+심박)</a:t>
             </a:r>
@@ -5735,6 +5801,9 @@
                 <a:solidFill>
                   <a:srgbClr val="525252"/>
                 </a:solidFill>
+                <a:latin typeface="Pretendard" pitchFamily="34" charset="0"/>
+                <a:ea typeface="Pretendard" pitchFamily="34" charset="-122"/>
+                <a:cs typeface="Pretendard" pitchFamily="34" charset="-120"/>
               </a:rPr>
               <a:t>가정 패드 (압력)</a:t>
             </a:r>
@@ -5771,6 +5840,9 @@
                 <a:solidFill>
                   <a:srgbClr val="B85042"/>
                 </a:solidFill>
+                <a:latin typeface="Cambria" pitchFamily="34" charset="0"/>
+                <a:ea typeface="Cambria" pitchFamily="34" charset="-122"/>
+                <a:cs typeface="Cambria" pitchFamily="34" charset="-120"/>
               </a:rPr>
               <a:t>→</a:t>
             </a:r>
@@ -5832,6 +5904,9 @@
                 <a:solidFill>
                   <a:srgbClr val="B85042"/>
                 </a:solidFill>
+                <a:latin typeface="Cambria" pitchFamily="34" charset="0"/>
+                <a:ea typeface="Cambria" pitchFamily="34" charset="-122"/>
+                <a:cs typeface="Cambria" pitchFamily="34" charset="-120"/>
               </a:rPr>
               <a:t>02</a:t>
             </a:r>
@@ -5868,6 +5943,9 @@
                 <a:solidFill>
                   <a:srgbClr val="0A0A0A"/>
                 </a:solidFill>
+                <a:latin typeface="Pretendard" pitchFamily="34" charset="0"/>
+                <a:ea typeface="Pretendard" pitchFamily="34" charset="-122"/>
+                <a:cs typeface="Pretendard" pitchFamily="34" charset="-120"/>
               </a:rPr>
               <a:t>엣지 분석</a:t>
             </a:r>
@@ -5930,6 +6008,9 @@
                 <a:solidFill>
                   <a:srgbClr val="525252"/>
                 </a:solidFill>
+                <a:latin typeface="Pretendard" pitchFamily="34" charset="0"/>
+                <a:ea typeface="Pretendard" pitchFamily="34" charset="-122"/>
+                <a:cs typeface="Pretendard" pitchFamily="34" charset="-120"/>
               </a:rPr>
               <a:t>기기 자체 1차 판단</a:t>
             </a:r>
@@ -5947,6 +6028,9 @@
                 <a:solidFill>
                   <a:srgbClr val="525252"/>
                 </a:solidFill>
+                <a:latin typeface="Pretendard" pitchFamily="34" charset="0"/>
+                <a:ea typeface="Pretendard" pitchFamily="34" charset="-122"/>
+                <a:cs typeface="Pretendard" pitchFamily="34" charset="-120"/>
               </a:rPr>
               <a:t>프라이버시 보호</a:t>
             </a:r>
@@ -5983,6 +6067,9 @@
                 <a:solidFill>
                   <a:srgbClr val="B85042"/>
                 </a:solidFill>
+                <a:latin typeface="Cambria" pitchFamily="34" charset="0"/>
+                <a:ea typeface="Cambria" pitchFamily="34" charset="-122"/>
+                <a:cs typeface="Cambria" pitchFamily="34" charset="-120"/>
               </a:rPr>
               <a:t>→</a:t>
             </a:r>
@@ -6044,6 +6131,9 @@
                 <a:solidFill>
                   <a:srgbClr val="B85042"/>
                 </a:solidFill>
+                <a:latin typeface="Cambria" pitchFamily="34" charset="0"/>
+                <a:ea typeface="Cambria" pitchFamily="34" charset="-122"/>
+                <a:cs typeface="Cambria" pitchFamily="34" charset="-120"/>
               </a:rPr>
               <a:t>03</a:t>
             </a:r>
@@ -6080,6 +6170,9 @@
                 <a:solidFill>
                   <a:srgbClr val="0A0A0A"/>
                 </a:solidFill>
+                <a:latin typeface="Pretendard" pitchFamily="34" charset="0"/>
+                <a:ea typeface="Pretendard" pitchFamily="34" charset="-122"/>
+                <a:cs typeface="Pretendard" pitchFamily="34" charset="-120"/>
               </a:rPr>
               <a:t>클라우드 AI</a:t>
             </a:r>
@@ -6142,6 +6235,9 @@
                 <a:solidFill>
                   <a:srgbClr val="525252"/>
                 </a:solidFill>
+                <a:latin typeface="Pretendard" pitchFamily="34" charset="0"/>
+                <a:ea typeface="Pretendard" pitchFamily="34" charset="-122"/>
+                <a:cs typeface="Pretendard" pitchFamily="34" charset="-120"/>
               </a:rPr>
               <a:t>낙상·이상 96.4% 정확도</a:t>
             </a:r>
@@ -6159,6 +6255,9 @@
                 <a:solidFill>
                   <a:srgbClr val="525252"/>
                 </a:solidFill>
+                <a:latin typeface="Pretendard" pitchFamily="34" charset="0"/>
+                <a:ea typeface="Pretendard" pitchFamily="34" charset="-122"/>
+                <a:cs typeface="Pretendard" pitchFamily="34" charset="-120"/>
               </a:rPr>
               <a:t>자체 모델</a:t>
             </a:r>
@@ -6195,6 +6294,9 @@
                 <a:solidFill>
                   <a:srgbClr val="B85042"/>
                 </a:solidFill>
+                <a:latin typeface="Cambria" pitchFamily="34" charset="0"/>
+                <a:ea typeface="Cambria" pitchFamily="34" charset="-122"/>
+                <a:cs typeface="Cambria" pitchFamily="34" charset="-120"/>
               </a:rPr>
               <a:t>→</a:t>
             </a:r>
@@ -6256,6 +6358,9 @@
                 <a:solidFill>
                   <a:srgbClr val="B85042"/>
                 </a:solidFill>
+                <a:latin typeface="Cambria" pitchFamily="34" charset="0"/>
+                <a:ea typeface="Cambria" pitchFamily="34" charset="-122"/>
+                <a:cs typeface="Cambria" pitchFamily="34" charset="-120"/>
               </a:rPr>
               <a:t>04</a:t>
             </a:r>
@@ -6292,6 +6397,9 @@
                 <a:solidFill>
                   <a:srgbClr val="0A0A0A"/>
                 </a:solidFill>
+                <a:latin typeface="Pretendard" pitchFamily="34" charset="0"/>
+                <a:ea typeface="Pretendard" pitchFamily="34" charset="-122"/>
+                <a:cs typeface="Pretendard" pitchFamily="34" charset="-120"/>
               </a:rPr>
               <a:t>통지·연결</a:t>
             </a:r>
@@ -6354,6 +6462,9 @@
                 <a:solidFill>
                   <a:srgbClr val="525252"/>
                 </a:solidFill>
+                <a:latin typeface="Pretendard" pitchFamily="34" charset="0"/>
+                <a:ea typeface="Pretendard" pitchFamily="34" charset="-122"/>
+                <a:cs typeface="Pretendard" pitchFamily="34" charset="-120"/>
               </a:rPr>
               <a:t>30초 내 자녀 + 119</a:t>
             </a:r>
@@ -6371,6 +6482,9 @@
                 <a:solidFill>
                   <a:srgbClr val="525252"/>
                 </a:solidFill>
+                <a:latin typeface="Pretendard" pitchFamily="34" charset="0"/>
+                <a:ea typeface="Pretendard" pitchFamily="34" charset="-122"/>
+                <a:cs typeface="Pretendard" pitchFamily="34" charset="-120"/>
               </a:rPr>
               <a:t>의료·돌봄 매칭</a:t>
             </a:r>
@@ -6407,6 +6521,9 @@
                 <a:solidFill>
                   <a:srgbClr val="0A0A0A"/>
                 </a:solidFill>
+                <a:latin typeface="Cambria" pitchFamily="34" charset="0"/>
+                <a:ea typeface="Cambria" pitchFamily="34" charset="-122"/>
+                <a:cs typeface="Cambria" pitchFamily="34" charset="-120"/>
               </a:rPr>
               <a:t>p. 10 / 30</a:t>
             </a:r>
@@ -6500,6 +6617,9 @@
                 <a:solidFill>
                   <a:srgbClr val="FAFAF9"/>
                 </a:solidFill>
+                <a:latin typeface="Cambria" pitchFamily="34" charset="0"/>
+                <a:ea typeface="Cambria" pitchFamily="34" charset="-122"/>
+                <a:cs typeface="Cambria" pitchFamily="34" charset="-120"/>
               </a:rPr>
               <a:t>예비창업패키지 2026 · 신청서 · S · 실현 가능성 — 추진 일정</a:t>
             </a:r>
@@ -6561,6 +6681,9 @@
                 <a:solidFill>
                   <a:srgbClr val="B85042"/>
                 </a:solidFill>
+                <a:latin typeface="Pretendard" pitchFamily="34" charset="0"/>
+                <a:ea typeface="Pretendard" pitchFamily="34" charset="-122"/>
+                <a:cs typeface="Pretendard" pitchFamily="34" charset="-120"/>
               </a:rPr>
               <a:t>S-04 / 1년 12개월 추진 일정</a:t>
             </a:r>
@@ -6597,6 +6720,9 @@
                 <a:solidFill>
                   <a:srgbClr val="0A0A0A"/>
                 </a:solidFill>
+                <a:latin typeface="Pretendard" pitchFamily="34" charset="0"/>
+                <a:ea typeface="Pretendard" pitchFamily="34" charset="-122"/>
+                <a:cs typeface="Pretendard" pitchFamily="34" charset="-120"/>
               </a:rPr>
               <a:t>Gantt — 12개월 마일스톤.</a:t>
             </a:r>
@@ -6656,6 +6782,9 @@
                 <a:solidFill>
                   <a:srgbClr val="525252"/>
                 </a:solidFill>
+                <a:latin typeface="Cambria" pitchFamily="34" charset="0"/>
+                <a:ea typeface="Cambria" pitchFamily="34" charset="-122"/>
+                <a:cs typeface="Cambria" pitchFamily="34" charset="-120"/>
               </a:rPr>
               <a:t>1M</a:t>
             </a:r>
@@ -6692,6 +6821,9 @@
                 <a:solidFill>
                   <a:srgbClr val="525252"/>
                 </a:solidFill>
+                <a:latin typeface="Cambria" pitchFamily="34" charset="0"/>
+                <a:ea typeface="Cambria" pitchFamily="34" charset="-122"/>
+                <a:cs typeface="Cambria" pitchFamily="34" charset="-120"/>
               </a:rPr>
               <a:t>2M</a:t>
             </a:r>
@@ -6728,6 +6860,9 @@
                 <a:solidFill>
                   <a:srgbClr val="525252"/>
                 </a:solidFill>
+                <a:latin typeface="Cambria" pitchFamily="34" charset="0"/>
+                <a:ea typeface="Cambria" pitchFamily="34" charset="-122"/>
+                <a:cs typeface="Cambria" pitchFamily="34" charset="-120"/>
               </a:rPr>
               <a:t>3M</a:t>
             </a:r>
@@ -6764,6 +6899,9 @@
                 <a:solidFill>
                   <a:srgbClr val="525252"/>
                 </a:solidFill>
+                <a:latin typeface="Cambria" pitchFamily="34" charset="0"/>
+                <a:ea typeface="Cambria" pitchFamily="34" charset="-122"/>
+                <a:cs typeface="Cambria" pitchFamily="34" charset="-120"/>
               </a:rPr>
               <a:t>4M</a:t>
             </a:r>
@@ -6800,6 +6938,9 @@
                 <a:solidFill>
                   <a:srgbClr val="525252"/>
                 </a:solidFill>
+                <a:latin typeface="Cambria" pitchFamily="34" charset="0"/>
+                <a:ea typeface="Cambria" pitchFamily="34" charset="-122"/>
+                <a:cs typeface="Cambria" pitchFamily="34" charset="-120"/>
               </a:rPr>
               <a:t>5M</a:t>
             </a:r>
@@ -6836,6 +6977,9 @@
                 <a:solidFill>
                   <a:srgbClr val="525252"/>
                 </a:solidFill>
+                <a:latin typeface="Cambria" pitchFamily="34" charset="0"/>
+                <a:ea typeface="Cambria" pitchFamily="34" charset="-122"/>
+                <a:cs typeface="Cambria" pitchFamily="34" charset="-120"/>
               </a:rPr>
               <a:t>6M</a:t>
             </a:r>
@@ -6872,6 +7016,9 @@
                 <a:solidFill>
                   <a:srgbClr val="525252"/>
                 </a:solidFill>
+                <a:latin typeface="Cambria" pitchFamily="34" charset="0"/>
+                <a:ea typeface="Cambria" pitchFamily="34" charset="-122"/>
+                <a:cs typeface="Cambria" pitchFamily="34" charset="-120"/>
               </a:rPr>
               <a:t>7M</a:t>
             </a:r>
@@ -6908,6 +7055,9 @@
                 <a:solidFill>
                   <a:srgbClr val="525252"/>
                 </a:solidFill>
+                <a:latin typeface="Cambria" pitchFamily="34" charset="0"/>
+                <a:ea typeface="Cambria" pitchFamily="34" charset="-122"/>
+                <a:cs typeface="Cambria" pitchFamily="34" charset="-120"/>
               </a:rPr>
               <a:t>8M</a:t>
             </a:r>
@@ -6944,6 +7094,9 @@
                 <a:solidFill>
                   <a:srgbClr val="525252"/>
                 </a:solidFill>
+                <a:latin typeface="Cambria" pitchFamily="34" charset="0"/>
+                <a:ea typeface="Cambria" pitchFamily="34" charset="-122"/>
+                <a:cs typeface="Cambria" pitchFamily="34" charset="-120"/>
               </a:rPr>
               <a:t>9M</a:t>
             </a:r>
@@ -6980,6 +7133,9 @@
                 <a:solidFill>
                   <a:srgbClr val="525252"/>
                 </a:solidFill>
+                <a:latin typeface="Cambria" pitchFamily="34" charset="0"/>
+                <a:ea typeface="Cambria" pitchFamily="34" charset="-122"/>
+                <a:cs typeface="Cambria" pitchFamily="34" charset="-120"/>
               </a:rPr>
               <a:t>10M</a:t>
             </a:r>
@@ -7016,6 +7172,9 @@
                 <a:solidFill>
                   <a:srgbClr val="525252"/>
                 </a:solidFill>
+                <a:latin typeface="Cambria" pitchFamily="34" charset="0"/>
+                <a:ea typeface="Cambria" pitchFamily="34" charset="-122"/>
+                <a:cs typeface="Cambria" pitchFamily="34" charset="-120"/>
               </a:rPr>
               <a:t>11M</a:t>
             </a:r>
@@ -7052,6 +7211,9 @@
                 <a:solidFill>
                   <a:srgbClr val="525252"/>
                 </a:solidFill>
+                <a:latin typeface="Cambria" pitchFamily="34" charset="0"/>
+                <a:ea typeface="Cambria" pitchFamily="34" charset="-122"/>
+                <a:cs typeface="Cambria" pitchFamily="34" charset="-120"/>
               </a:rPr>
               <a:t>12M</a:t>
             </a:r>
@@ -7111,6 +7273,9 @@
                 <a:solidFill>
                   <a:srgbClr val="0A0A0A"/>
                 </a:solidFill>
+                <a:latin typeface="Pretendard" pitchFamily="34" charset="0"/>
+                <a:ea typeface="Pretendard" pitchFamily="34" charset="-122"/>
+                <a:cs typeface="Pretendard" pitchFamily="34" charset="-120"/>
               </a:rPr>
               <a:t>기획 · 사용자 인터뷰</a:t>
             </a:r>
@@ -7172,6 +7337,9 @@
                 <a:solidFill>
                   <a:srgbClr val="FAFAF9"/>
                 </a:solidFill>
+                <a:latin typeface="Cambria" pitchFamily="34" charset="0"/>
+                <a:ea typeface="Cambria" pitchFamily="34" charset="-122"/>
+                <a:cs typeface="Cambria" pitchFamily="34" charset="-120"/>
               </a:rPr>
               <a:t>2M</a:t>
             </a:r>
@@ -7208,6 +7376,9 @@
                 <a:solidFill>
                   <a:srgbClr val="0A0A0A"/>
                 </a:solidFill>
+                <a:latin typeface="Pretendard" pitchFamily="34" charset="0"/>
+                <a:ea typeface="Pretendard" pitchFamily="34" charset="-122"/>
+                <a:cs typeface="Pretendard" pitchFamily="34" charset="-120"/>
               </a:rPr>
               <a:t>AI 모델 학습 · 검증</a:t>
             </a:r>
@@ -7269,6 +7440,9 @@
                 <a:solidFill>
                   <a:srgbClr val="FAFAF9"/>
                 </a:solidFill>
+                <a:latin typeface="Cambria" pitchFamily="34" charset="0"/>
+                <a:ea typeface="Cambria" pitchFamily="34" charset="-122"/>
+                <a:cs typeface="Cambria" pitchFamily="34" charset="-120"/>
               </a:rPr>
               <a:t>4M</a:t>
             </a:r>
@@ -7305,6 +7479,9 @@
                 <a:solidFill>
                   <a:srgbClr val="0A0A0A"/>
                 </a:solidFill>
+                <a:latin typeface="Pretendard" pitchFamily="34" charset="0"/>
+                <a:ea typeface="Pretendard" pitchFamily="34" charset="-122"/>
+                <a:cs typeface="Pretendard" pitchFamily="34" charset="-120"/>
               </a:rPr>
               <a:t>앱 UI/UX 외주</a:t>
             </a:r>
@@ -7366,6 +7543,9 @@
                 <a:solidFill>
                   <a:srgbClr val="FAFAF9"/>
                 </a:solidFill>
+                <a:latin typeface="Cambria" pitchFamily="34" charset="0"/>
+                <a:ea typeface="Cambria" pitchFamily="34" charset="-122"/>
+                <a:cs typeface="Cambria" pitchFamily="34" charset="-120"/>
               </a:rPr>
               <a:t>3M</a:t>
             </a:r>
@@ -7402,6 +7582,9 @@
                 <a:solidFill>
                   <a:srgbClr val="0A0A0A"/>
                 </a:solidFill>
+                <a:latin typeface="Pretendard" pitchFamily="34" charset="0"/>
+                <a:ea typeface="Pretendard" pitchFamily="34" charset="-122"/>
+                <a:cs typeface="Pretendard" pitchFamily="34" charset="-120"/>
               </a:rPr>
               <a:t>베타 출시 · 사용자 1만 모집</a:t>
             </a:r>
@@ -7463,6 +7646,9 @@
                 <a:solidFill>
                   <a:srgbClr val="FAFAF9"/>
                 </a:solidFill>
+                <a:latin typeface="Cambria" pitchFamily="34" charset="0"/>
+                <a:ea typeface="Cambria" pitchFamily="34" charset="-122"/>
+                <a:cs typeface="Cambria" pitchFamily="34" charset="-120"/>
               </a:rPr>
               <a:t>3M</a:t>
             </a:r>
@@ -7499,6 +7685,9 @@
                 <a:solidFill>
                   <a:srgbClr val="0A0A0A"/>
                 </a:solidFill>
+                <a:latin typeface="Pretendard" pitchFamily="34" charset="0"/>
+                <a:ea typeface="Pretendard" pitchFamily="34" charset="-122"/>
+                <a:cs typeface="Pretendard" pitchFamily="34" charset="-120"/>
               </a:rPr>
               <a:t>시범 시설 5곳 도입</a:t>
             </a:r>
@@ -7560,6 +7749,9 @@
                 <a:solidFill>
                   <a:srgbClr val="FAFAF9"/>
                 </a:solidFill>
+                <a:latin typeface="Cambria" pitchFamily="34" charset="0"/>
+                <a:ea typeface="Cambria" pitchFamily="34" charset="-122"/>
+                <a:cs typeface="Cambria" pitchFamily="34" charset="-120"/>
               </a:rPr>
               <a:t>4M</a:t>
             </a:r>
@@ -7596,6 +7788,9 @@
                 <a:solidFill>
                   <a:srgbClr val="0A0A0A"/>
                 </a:solidFill>
+                <a:latin typeface="Pretendard" pitchFamily="34" charset="0"/>
+                <a:ea typeface="Pretendard" pitchFamily="34" charset="-122"/>
+                <a:cs typeface="Pretendard" pitchFamily="34" charset="-120"/>
               </a:rPr>
               <a:t>MVP 정식 출시</a:t>
             </a:r>
@@ -7657,6 +7852,9 @@
                 <a:solidFill>
                   <a:srgbClr val="FAFAF9"/>
                 </a:solidFill>
+                <a:latin typeface="Cambria" pitchFamily="34" charset="0"/>
+                <a:ea typeface="Cambria" pitchFamily="34" charset="-122"/>
+                <a:cs typeface="Cambria" pitchFamily="34" charset="-120"/>
               </a:rPr>
               <a:t>2M</a:t>
             </a:r>
@@ -7693,6 +7891,9 @@
                 <a:solidFill>
                   <a:srgbClr val="0A0A0A"/>
                 </a:solidFill>
+                <a:latin typeface="Pretendard" pitchFamily="34" charset="0"/>
+                <a:ea typeface="Pretendard" pitchFamily="34" charset="-122"/>
+                <a:cs typeface="Pretendard" pitchFamily="34" charset="-120"/>
               </a:rPr>
               <a:t>시리즈 시드 IR 준비</a:t>
             </a:r>
@@ -7754,6 +7955,9 @@
                 <a:solidFill>
                   <a:srgbClr val="FAFAF9"/>
                 </a:solidFill>
+                <a:latin typeface="Cambria" pitchFamily="34" charset="0"/>
+                <a:ea typeface="Cambria" pitchFamily="34" charset="-122"/>
+                <a:cs typeface="Cambria" pitchFamily="34" charset="-120"/>
               </a:rPr>
               <a:t>2M</a:t>
             </a:r>
@@ -7790,6 +7994,9 @@
                 <a:solidFill>
                   <a:srgbClr val="0A0A0A"/>
                 </a:solidFill>
+                <a:latin typeface="Cambria" pitchFamily="34" charset="0"/>
+                <a:ea typeface="Cambria" pitchFamily="34" charset="-122"/>
+                <a:cs typeface="Cambria" pitchFamily="34" charset="-120"/>
               </a:rPr>
               <a:t>p. 11 / 30</a:t>
             </a:r>
@@ -7883,6 +8090,9 @@
                 <a:solidFill>
                   <a:srgbClr val="FAFAF9"/>
                 </a:solidFill>
+                <a:latin typeface="Cambria" pitchFamily="34" charset="0"/>
+                <a:ea typeface="Cambria" pitchFamily="34" charset="-122"/>
+                <a:cs typeface="Cambria" pitchFamily="34" charset="-120"/>
               </a:rPr>
               <a:t>예비창업패키지 2026 · 신청서 · S · 실현 가능성 — 자금 운용 계획</a:t>
             </a:r>
@@ -7944,6 +8154,9 @@
                 <a:solidFill>
                   <a:srgbClr val="B85042"/>
                 </a:solidFill>
+                <a:latin typeface="Pretendard" pitchFamily="34" charset="0"/>
+                <a:ea typeface="Pretendard" pitchFamily="34" charset="-122"/>
+                <a:cs typeface="Pretendard" pitchFamily="34" charset="-120"/>
               </a:rPr>
               <a:t>S-05 / 1억 원 비목별 사용 계획</a:t>
             </a:r>
@@ -7980,6 +8193,9 @@
                 <a:solidFill>
                   <a:srgbClr val="0A0A0A"/>
                 </a:solidFill>
+                <a:latin typeface="Pretendard" pitchFamily="34" charset="0"/>
+                <a:ea typeface="Pretendard" pitchFamily="34" charset="-122"/>
+                <a:cs typeface="Pretendard" pitchFamily="34" charset="-120"/>
               </a:rPr>
               <a:t>1억 원 — 비목별 표.</a:t>
             </a:r>
@@ -8064,6 +8280,9 @@
                 <a:solidFill>
                   <a:srgbClr val="FAFAF9"/>
                 </a:solidFill>
+                <a:latin typeface="Pretendard" pitchFamily="34" charset="0"/>
+                <a:ea typeface="Pretendard" pitchFamily="34" charset="-122"/>
+                <a:cs typeface="Pretendard" pitchFamily="34" charset="-120"/>
               </a:rPr>
               <a:t>비목</a:t>
             </a:r>
@@ -8125,6 +8344,9 @@
                 <a:solidFill>
                   <a:srgbClr val="FAFAF9"/>
                 </a:solidFill>
+                <a:latin typeface="Pretendard" pitchFamily="34" charset="0"/>
+                <a:ea typeface="Pretendard" pitchFamily="34" charset="-122"/>
+                <a:cs typeface="Pretendard" pitchFamily="34" charset="-120"/>
               </a:rPr>
               <a:t>금액</a:t>
             </a:r>
@@ -8186,6 +8408,9 @@
                 <a:solidFill>
                   <a:srgbClr val="FAFAF9"/>
                 </a:solidFill>
+                <a:latin typeface="Pretendard" pitchFamily="34" charset="0"/>
+                <a:ea typeface="Pretendard" pitchFamily="34" charset="-122"/>
+                <a:cs typeface="Pretendard" pitchFamily="34" charset="-120"/>
               </a:rPr>
               <a:t>비중</a:t>
             </a:r>
@@ -8247,6 +8472,9 @@
                 <a:solidFill>
                   <a:srgbClr val="FAFAF9"/>
                 </a:solidFill>
+                <a:latin typeface="Pretendard" pitchFamily="34" charset="0"/>
+                <a:ea typeface="Pretendard" pitchFamily="34" charset="-122"/>
+                <a:cs typeface="Pretendard" pitchFamily="34" charset="-120"/>
               </a:rPr>
               <a:t>주요 용도</a:t>
             </a:r>
@@ -8308,6 +8536,9 @@
                 <a:solidFill>
                   <a:srgbClr val="0A0A0A"/>
                 </a:solidFill>
+                <a:latin typeface="Pretendard" pitchFamily="34" charset="0"/>
+                <a:ea typeface="Pretendard" pitchFamily="34" charset="-122"/>
+                <a:cs typeface="Pretendard" pitchFamily="34" charset="-120"/>
               </a:rPr>
               <a:t>인건비</a:t>
             </a:r>
@@ -8369,6 +8600,9 @@
                 <a:solidFill>
                   <a:srgbClr val="B85042"/>
                 </a:solidFill>
+                <a:latin typeface="Cambria" pitchFamily="34" charset="0"/>
+                <a:ea typeface="Cambria" pitchFamily="34" charset="-122"/>
+                <a:cs typeface="Cambria" pitchFamily="34" charset="-120"/>
               </a:rPr>
               <a:t>₩50,000,000</a:t>
             </a:r>
@@ -8430,6 +8664,9 @@
                 <a:solidFill>
                   <a:srgbClr val="0A0A0A"/>
                 </a:solidFill>
+                <a:latin typeface="Pretendard" pitchFamily="34" charset="0"/>
+                <a:ea typeface="Pretendard" pitchFamily="34" charset="-122"/>
+                <a:cs typeface="Pretendard" pitchFamily="34" charset="-120"/>
               </a:rPr>
               <a:t>50%</a:t>
             </a:r>
@@ -8491,6 +8728,9 @@
                 <a:solidFill>
                   <a:srgbClr val="0A0A0A"/>
                 </a:solidFill>
+                <a:latin typeface="Pretendard" pitchFamily="34" charset="0"/>
+                <a:ea typeface="Pretendard" pitchFamily="34" charset="-122"/>
+                <a:cs typeface="Pretendard" pitchFamily="34" charset="-120"/>
               </a:rPr>
               <a:t>대표·CTO·운영 인건비 (6개월 분)</a:t>
             </a:r>
@@ -8552,6 +8792,9 @@
                 <a:solidFill>
                   <a:srgbClr val="0A0A0A"/>
                 </a:solidFill>
+                <a:latin typeface="Pretendard" pitchFamily="34" charset="0"/>
+                <a:ea typeface="Pretendard" pitchFamily="34" charset="-122"/>
+                <a:cs typeface="Pretendard" pitchFamily="34" charset="-120"/>
               </a:rPr>
               <a:t>외주 용역비</a:t>
             </a:r>
@@ -8613,6 +8856,9 @@
                 <a:solidFill>
                   <a:srgbClr val="B85042"/>
                 </a:solidFill>
+                <a:latin typeface="Cambria" pitchFamily="34" charset="0"/>
+                <a:ea typeface="Cambria" pitchFamily="34" charset="-122"/>
+                <a:cs typeface="Cambria" pitchFamily="34" charset="-120"/>
               </a:rPr>
               <a:t>₩25,000,000</a:t>
             </a:r>
@@ -8674,6 +8920,9 @@
                 <a:solidFill>
                   <a:srgbClr val="0A0A0A"/>
                 </a:solidFill>
+                <a:latin typeface="Pretendard" pitchFamily="34" charset="0"/>
+                <a:ea typeface="Pretendard" pitchFamily="34" charset="-122"/>
+                <a:cs typeface="Pretendard" pitchFamily="34" charset="-120"/>
               </a:rPr>
               <a:t>25%</a:t>
             </a:r>
@@ -8735,6 +8984,9 @@
                 <a:solidFill>
                   <a:srgbClr val="0A0A0A"/>
                 </a:solidFill>
+                <a:latin typeface="Pretendard" pitchFamily="34" charset="0"/>
+                <a:ea typeface="Pretendard" pitchFamily="34" charset="-122"/>
+                <a:cs typeface="Pretendard" pitchFamily="34" charset="-120"/>
               </a:rPr>
               <a:t>앱 UI 외주 + 디자인</a:t>
             </a:r>
@@ -8796,6 +9048,9 @@
                 <a:solidFill>
                   <a:srgbClr val="0A0A0A"/>
                 </a:solidFill>
+                <a:latin typeface="Pretendard" pitchFamily="34" charset="0"/>
+                <a:ea typeface="Pretendard" pitchFamily="34" charset="-122"/>
+                <a:cs typeface="Pretendard" pitchFamily="34" charset="-120"/>
               </a:rPr>
               <a:t>재료비</a:t>
             </a:r>
@@ -8857,6 +9112,9 @@
                 <a:solidFill>
                   <a:srgbClr val="B85042"/>
                 </a:solidFill>
+                <a:latin typeface="Cambria" pitchFamily="34" charset="0"/>
+                <a:ea typeface="Cambria" pitchFamily="34" charset="-122"/>
+                <a:cs typeface="Cambria" pitchFamily="34" charset="-120"/>
               </a:rPr>
               <a:t>₩15,000,000</a:t>
             </a:r>
@@ -8918,6 +9176,9 @@
                 <a:solidFill>
                   <a:srgbClr val="0A0A0A"/>
                 </a:solidFill>
+                <a:latin typeface="Pretendard" pitchFamily="34" charset="0"/>
+                <a:ea typeface="Pretendard" pitchFamily="34" charset="-122"/>
+                <a:cs typeface="Pretendard" pitchFamily="34" charset="-120"/>
               </a:rPr>
               <a:t>15%</a:t>
             </a:r>
@@ -8979,6 +9240,9 @@
                 <a:solidFill>
                   <a:srgbClr val="0A0A0A"/>
                 </a:solidFill>
+                <a:latin typeface="Pretendard" pitchFamily="34" charset="0"/>
+                <a:ea typeface="Pretendard" pitchFamily="34" charset="-122"/>
+                <a:cs typeface="Pretendard" pitchFamily="34" charset="-120"/>
               </a:rPr>
               <a:t>스마트워치·가정 패드 시범 50대</a:t>
             </a:r>
@@ -9040,6 +9304,9 @@
                 <a:solidFill>
                   <a:srgbClr val="0A0A0A"/>
                 </a:solidFill>
+                <a:latin typeface="Pretendard" pitchFamily="34" charset="0"/>
+                <a:ea typeface="Pretendard" pitchFamily="34" charset="-122"/>
+                <a:cs typeface="Pretendard" pitchFamily="34" charset="-120"/>
               </a:rPr>
               <a:t>사업화 일반관리비</a:t>
             </a:r>
@@ -9101,6 +9368,9 @@
                 <a:solidFill>
                   <a:srgbClr val="B85042"/>
                 </a:solidFill>
+                <a:latin typeface="Cambria" pitchFamily="34" charset="0"/>
+                <a:ea typeface="Cambria" pitchFamily="34" charset="-122"/>
+                <a:cs typeface="Cambria" pitchFamily="34" charset="-120"/>
               </a:rPr>
               <a:t>₩8,000,000</a:t>
             </a:r>
@@ -9162,6 +9432,9 @@
                 <a:solidFill>
                   <a:srgbClr val="0A0A0A"/>
                 </a:solidFill>
+                <a:latin typeface="Pretendard" pitchFamily="34" charset="0"/>
+                <a:ea typeface="Pretendard" pitchFamily="34" charset="-122"/>
+                <a:cs typeface="Pretendard" pitchFamily="34" charset="-120"/>
               </a:rPr>
               <a:t>8%</a:t>
             </a:r>
@@ -9223,6 +9496,9 @@
                 <a:solidFill>
                   <a:srgbClr val="0A0A0A"/>
                 </a:solidFill>
+                <a:latin typeface="Pretendard" pitchFamily="34" charset="0"/>
+                <a:ea typeface="Pretendard" pitchFamily="34" charset="-122"/>
+                <a:cs typeface="Pretendard" pitchFamily="34" charset="-120"/>
               </a:rPr>
               <a:t>마케팅·교육·홍보</a:t>
             </a:r>
@@ -9284,6 +9560,9 @@
                 <a:solidFill>
                   <a:srgbClr val="0A0A0A"/>
                 </a:solidFill>
+                <a:latin typeface="Pretendard" pitchFamily="34" charset="0"/>
+                <a:ea typeface="Pretendard" pitchFamily="34" charset="-122"/>
+                <a:cs typeface="Pretendard" pitchFamily="34" charset="-120"/>
               </a:rPr>
               <a:t>기타</a:t>
             </a:r>
@@ -9345,6 +9624,9 @@
                 <a:solidFill>
                   <a:srgbClr val="B85042"/>
                 </a:solidFill>
+                <a:latin typeface="Cambria" pitchFamily="34" charset="0"/>
+                <a:ea typeface="Cambria" pitchFamily="34" charset="-122"/>
+                <a:cs typeface="Cambria" pitchFamily="34" charset="-120"/>
               </a:rPr>
               <a:t>₩2,000,000</a:t>
             </a:r>
@@ -9406,6 +9688,9 @@
                 <a:solidFill>
                   <a:srgbClr val="0A0A0A"/>
                 </a:solidFill>
+                <a:latin typeface="Pretendard" pitchFamily="34" charset="0"/>
+                <a:ea typeface="Pretendard" pitchFamily="34" charset="-122"/>
+                <a:cs typeface="Pretendard" pitchFamily="34" charset="-120"/>
               </a:rPr>
               <a:t>2%</a:t>
             </a:r>
@@ -9467,6 +9752,9 @@
                 <a:solidFill>
                   <a:srgbClr val="0A0A0A"/>
                 </a:solidFill>
+                <a:latin typeface="Pretendard" pitchFamily="34" charset="0"/>
+                <a:ea typeface="Pretendard" pitchFamily="34" charset="-122"/>
+                <a:cs typeface="Pretendard" pitchFamily="34" charset="-120"/>
               </a:rPr>
               <a:t>회의·출장·소모품</a:t>
             </a:r>
@@ -9528,6 +9816,9 @@
                 <a:solidFill>
                   <a:srgbClr val="FAFAF9"/>
                 </a:solidFill>
+                <a:latin typeface="Pretendard" pitchFamily="34" charset="0"/>
+                <a:ea typeface="Pretendard" pitchFamily="34" charset="-122"/>
+                <a:cs typeface="Pretendard" pitchFamily="34" charset="-120"/>
               </a:rPr>
               <a:t>합계</a:t>
             </a:r>
@@ -9564,6 +9855,9 @@
                 <a:solidFill>
                   <a:srgbClr val="E7B5A8"/>
                 </a:solidFill>
+                <a:latin typeface="Cambria" pitchFamily="34" charset="0"/>
+                <a:ea typeface="Cambria" pitchFamily="34" charset="-122"/>
+                <a:cs typeface="Cambria" pitchFamily="34" charset="-120"/>
               </a:rPr>
               <a:t>₩100,000,000</a:t>
             </a:r>
@@ -9600,6 +9894,9 @@
                 <a:solidFill>
                   <a:srgbClr val="FAFAF9"/>
                 </a:solidFill>
+                <a:latin typeface="Cambria" pitchFamily="34" charset="0"/>
+                <a:ea typeface="Cambria" pitchFamily="34" charset="-122"/>
+                <a:cs typeface="Cambria" pitchFamily="34" charset="-120"/>
               </a:rPr>
               <a:t>100%</a:t>
             </a:r>
@@ -9636,6 +9933,9 @@
                 <a:solidFill>
                   <a:srgbClr val="525252"/>
                 </a:solidFill>
+                <a:latin typeface="Pretendard" pitchFamily="34" charset="0"/>
+                <a:ea typeface="Pretendard" pitchFamily="34" charset="-122"/>
+                <a:cs typeface="Pretendard" pitchFamily="34" charset="-120"/>
               </a:rPr>
               <a:t>출처: K-Startup 사업화 자금 비목 분류</a:t>
             </a:r>
@@ -9672,6 +9972,9 @@
                 <a:solidFill>
                   <a:srgbClr val="0A0A0A"/>
                 </a:solidFill>
+                <a:latin typeface="Cambria" pitchFamily="34" charset="0"/>
+                <a:ea typeface="Cambria" pitchFamily="34" charset="-122"/>
+                <a:cs typeface="Cambria" pitchFamily="34" charset="-120"/>
               </a:rPr>
               <a:t>p. 12 / 30</a:t>
             </a:r>
@@ -9765,6 +10068,9 @@
                 <a:solidFill>
                   <a:srgbClr val="FAFAF9"/>
                 </a:solidFill>
+                <a:latin typeface="Cambria" pitchFamily="34" charset="0"/>
+                <a:ea typeface="Cambria" pitchFamily="34" charset="-122"/>
+                <a:cs typeface="Cambria" pitchFamily="34" charset="-120"/>
               </a:rPr>
               <a:t>예비창업패키지 2026 · 신청서 · S · 실현 가능성 — 1년 후 산출물</a:t>
             </a:r>
@@ -9826,6 +10132,9 @@
                 <a:solidFill>
                   <a:srgbClr val="B85042"/>
                 </a:solidFill>
+                <a:latin typeface="Pretendard" pitchFamily="34" charset="0"/>
+                <a:ea typeface="Pretendard" pitchFamily="34" charset="-122"/>
+                <a:cs typeface="Pretendard" pitchFamily="34" charset="-120"/>
               </a:rPr>
               <a:t>S-06 / 1년 후 산출물 KPI</a:t>
             </a:r>
@@ -9862,6 +10171,9 @@
                 <a:solidFill>
                   <a:srgbClr val="0A0A0A"/>
                 </a:solidFill>
+                <a:latin typeface="Pretendard" pitchFamily="34" charset="0"/>
+                <a:ea typeface="Pretendard" pitchFamily="34" charset="-122"/>
+                <a:cs typeface="Pretendard" pitchFamily="34" charset="-120"/>
               </a:rPr>
               <a:t>1년 후, 측정 가능한 성과.</a:t>
             </a:r>
@@ -9969,6 +10281,9 @@
                 <a:solidFill>
                   <a:srgbClr val="0A0A0A"/>
                 </a:solidFill>
+                <a:latin typeface="Cambria" pitchFamily="34" charset="0"/>
+                <a:ea typeface="Cambria" pitchFamily="34" charset="-122"/>
+                <a:cs typeface="Cambria" pitchFamily="34" charset="-120"/>
               </a:rPr>
               <a:t>10,000명</a:t>
             </a:r>
@@ -10005,6 +10320,9 @@
                 <a:solidFill>
                   <a:srgbClr val="044E29"/>
                 </a:solidFill>
+                <a:latin typeface="Pretendard" pitchFamily="34" charset="0"/>
+                <a:ea typeface="Pretendard" pitchFamily="34" charset="-122"/>
+                <a:cs typeface="Pretendard" pitchFamily="34" charset="-120"/>
               </a:rPr>
               <a:t>베타 사용자</a:t>
             </a:r>
@@ -10041,6 +10359,9 @@
                 <a:solidFill>
                   <a:srgbClr val="525252"/>
                 </a:solidFill>
+                <a:latin typeface="Pretendard" pitchFamily="34" charset="0"/>
+                <a:ea typeface="Pretendard" pitchFamily="34" charset="-122"/>
+                <a:cs typeface="Pretendard" pitchFamily="34" charset="-120"/>
               </a:rPr>
               <a:t>2026.10 기준 누적</a:t>
             </a:r>
@@ -10125,6 +10446,9 @@
                 <a:solidFill>
                   <a:srgbClr val="0A0A0A"/>
                 </a:solidFill>
+                <a:latin typeface="Cambria" pitchFamily="34" charset="0"/>
+                <a:ea typeface="Cambria" pitchFamily="34" charset="-122"/>
+                <a:cs typeface="Cambria" pitchFamily="34" charset="-120"/>
               </a:rPr>
               <a:t>5곳</a:t>
             </a:r>
@@ -10161,6 +10485,9 @@
                 <a:solidFill>
                   <a:srgbClr val="044E29"/>
                 </a:solidFill>
+                <a:latin typeface="Pretendard" pitchFamily="34" charset="0"/>
+                <a:ea typeface="Pretendard" pitchFamily="34" charset="-122"/>
+                <a:cs typeface="Pretendard" pitchFamily="34" charset="-120"/>
               </a:rPr>
               <a:t>시범 요양시설</a:t>
             </a:r>
@@ -10197,6 +10524,9 @@
                 <a:solidFill>
                   <a:srgbClr val="525252"/>
                 </a:solidFill>
+                <a:latin typeface="Pretendard" pitchFamily="34" charset="0"/>
+                <a:ea typeface="Pretendard" pitchFamily="34" charset="-122"/>
+                <a:cs typeface="Pretendard" pitchFamily="34" charset="-120"/>
               </a:rPr>
               <a:t>수도권 + 광역시 1곳</a:t>
             </a:r>
@@ -10281,6 +10611,9 @@
                 <a:solidFill>
                   <a:srgbClr val="0A0A0A"/>
                 </a:solidFill>
+                <a:latin typeface="Cambria" pitchFamily="34" charset="0"/>
+                <a:ea typeface="Cambria" pitchFamily="34" charset="-122"/>
+                <a:cs typeface="Cambria" pitchFamily="34" charset="-120"/>
               </a:rPr>
               <a:t>5명</a:t>
             </a:r>
@@ -10317,6 +10650,9 @@
                 <a:solidFill>
                   <a:srgbClr val="044E29"/>
                 </a:solidFill>
+                <a:latin typeface="Pretendard" pitchFamily="34" charset="0"/>
+                <a:ea typeface="Pretendard" pitchFamily="34" charset="-122"/>
+                <a:cs typeface="Pretendard" pitchFamily="34" charset="-120"/>
               </a:rPr>
               <a:t>신규 일자리</a:t>
             </a:r>
@@ -10353,6 +10689,9 @@
                 <a:solidFill>
                   <a:srgbClr val="525252"/>
                 </a:solidFill>
+                <a:latin typeface="Pretendard" pitchFamily="34" charset="0"/>
+                <a:ea typeface="Pretendard" pitchFamily="34" charset="-122"/>
+                <a:cs typeface="Pretendard" pitchFamily="34" charset="-120"/>
               </a:rPr>
               <a:t>개발 2 + 운영 2 + 콜센터 1</a:t>
             </a:r>
@@ -10437,6 +10776,9 @@
                 <a:solidFill>
                   <a:srgbClr val="0A0A0A"/>
                 </a:solidFill>
+                <a:latin typeface="Cambria" pitchFamily="34" charset="0"/>
+                <a:ea typeface="Cambria" pitchFamily="34" charset="-122"/>
+                <a:cs typeface="Cambria" pitchFamily="34" charset="-120"/>
               </a:rPr>
               <a:t>₩1.5억</a:t>
             </a:r>
@@ -10473,6 +10815,9 @@
                 <a:solidFill>
                   <a:srgbClr val="044E29"/>
                 </a:solidFill>
+                <a:latin typeface="Pretendard" pitchFamily="34" charset="0"/>
+                <a:ea typeface="Pretendard" pitchFamily="34" charset="-122"/>
+                <a:cs typeface="Pretendard" pitchFamily="34" charset="-120"/>
               </a:rPr>
               <a:t>1년 매출</a:t>
             </a:r>
@@ -10509,6 +10854,9 @@
                 <a:solidFill>
                   <a:srgbClr val="525252"/>
                 </a:solidFill>
+                <a:latin typeface="Pretendard" pitchFamily="34" charset="0"/>
+                <a:ea typeface="Pretendard" pitchFamily="34" charset="-122"/>
+                <a:cs typeface="Pretendard" pitchFamily="34" charset="-120"/>
               </a:rPr>
               <a:t>정기구독 + B2B 시범</a:t>
             </a:r>
@@ -10593,6 +10941,9 @@
                 <a:solidFill>
                   <a:srgbClr val="0A0A0A"/>
                 </a:solidFill>
+                <a:latin typeface="Cambria" pitchFamily="34" charset="0"/>
+                <a:ea typeface="Cambria" pitchFamily="34" charset="-122"/>
+                <a:cs typeface="Cambria" pitchFamily="34" charset="-120"/>
               </a:rPr>
               <a:t>96%</a:t>
             </a:r>
@@ -10629,6 +10980,9 @@
                 <a:solidFill>
                   <a:srgbClr val="044E29"/>
                 </a:solidFill>
+                <a:latin typeface="Pretendard" pitchFamily="34" charset="0"/>
+                <a:ea typeface="Pretendard" pitchFamily="34" charset="-122"/>
+                <a:cs typeface="Pretendard" pitchFamily="34" charset="-120"/>
               </a:rPr>
               <a:t>AI 정확도 유지</a:t>
             </a:r>
@@ -10665,6 +11019,9 @@
                 <a:solidFill>
                   <a:srgbClr val="525252"/>
                 </a:solidFill>
+                <a:latin typeface="Pretendard" pitchFamily="34" charset="0"/>
+                <a:ea typeface="Pretendard" pitchFamily="34" charset="-122"/>
+                <a:cs typeface="Pretendard" pitchFamily="34" charset="-120"/>
               </a:rPr>
               <a:t>월간 검증</a:t>
             </a:r>
@@ -10749,6 +11106,9 @@
                 <a:solidFill>
                   <a:srgbClr val="0A0A0A"/>
                 </a:solidFill>
+                <a:latin typeface="Cambria" pitchFamily="34" charset="0"/>
+                <a:ea typeface="Cambria" pitchFamily="34" charset="-122"/>
+                <a:cs typeface="Cambria" pitchFamily="34" charset="-120"/>
               </a:rPr>
               <a:t>30초</a:t>
             </a:r>
@@ -10785,6 +11145,9 @@
                 <a:solidFill>
                   <a:srgbClr val="044E29"/>
                 </a:solidFill>
+                <a:latin typeface="Pretendard" pitchFamily="34" charset="0"/>
+                <a:ea typeface="Pretendard" pitchFamily="34" charset="-122"/>
+                <a:cs typeface="Pretendard" pitchFamily="34" charset="-120"/>
               </a:rPr>
               <a:t>응급 신고 SLA</a:t>
             </a:r>
@@ -10821,6 +11184,9 @@
                 <a:solidFill>
                   <a:srgbClr val="525252"/>
                 </a:solidFill>
+                <a:latin typeface="Pretendard" pitchFamily="34" charset="0"/>
+                <a:ea typeface="Pretendard" pitchFamily="34" charset="-122"/>
+                <a:cs typeface="Pretendard" pitchFamily="34" charset="-120"/>
               </a:rPr>
               <a:t>낙상 → 119 자동 신고</a:t>
             </a:r>
@@ -10857,6 +11223,9 @@
                 <a:solidFill>
                   <a:srgbClr val="0A0A0A"/>
                 </a:solidFill>
+                <a:latin typeface="Cambria" pitchFamily="34" charset="0"/>
+                <a:ea typeface="Cambria" pitchFamily="34" charset="-122"/>
+                <a:cs typeface="Cambria" pitchFamily="34" charset="-120"/>
               </a:rPr>
               <a:t>p. 13 / 30</a:t>
             </a:r>
@@ -10950,6 +11319,9 @@
                 <a:solidFill>
                   <a:srgbClr val="FAFAF9"/>
                 </a:solidFill>
+                <a:latin typeface="Cambria" pitchFamily="34" charset="0"/>
+                <a:ea typeface="Cambria" pitchFamily="34" charset="-122"/>
+                <a:cs typeface="Cambria" pitchFamily="34" charset="-120"/>
               </a:rPr>
               <a:t>예비창업패키지 2026 · 신청서 · SS · 성장 전략 — 시장 진입 전략</a:t>
             </a:r>
@@ -11011,6 +11383,9 @@
                 <a:solidFill>
                   <a:srgbClr val="B85042"/>
                 </a:solidFill>
+                <a:latin typeface="Pretendard" pitchFamily="34" charset="0"/>
+                <a:ea typeface="Pretendard" pitchFamily="34" charset="-122"/>
+                <a:cs typeface="Pretendard" pitchFamily="34" charset="-120"/>
               </a:rPr>
               <a:t>SS-01 / 3-Phase 시장 진입</a:t>
             </a:r>
@@ -11047,6 +11422,9 @@
                 <a:solidFill>
                   <a:srgbClr val="0A0A0A"/>
                 </a:solidFill>
+                <a:latin typeface="Pretendard" pitchFamily="34" charset="0"/>
+                <a:ea typeface="Pretendard" pitchFamily="34" charset="-122"/>
+                <a:cs typeface="Pretendard" pitchFamily="34" charset="-120"/>
               </a:rPr>
               <a:t>시범 → 전국 → 글로벌.</a:t>
             </a:r>
@@ -11131,6 +11509,9 @@
                 <a:solidFill>
                   <a:srgbClr val="E7B5A8"/>
                 </a:solidFill>
+                <a:latin typeface="Cambria" pitchFamily="34" charset="0"/>
+                <a:ea typeface="Cambria" pitchFamily="34" charset="-122"/>
+                <a:cs typeface="Cambria" pitchFamily="34" charset="-120"/>
               </a:rPr>
               <a:t>Phase 1</a:t>
             </a:r>
@@ -11167,6 +11548,9 @@
                 <a:solidFill>
                   <a:srgbClr val="FAFAF9"/>
                 </a:solidFill>
+                <a:latin typeface="Cambria" pitchFamily="34" charset="0"/>
+                <a:ea typeface="Cambria" pitchFamily="34" charset="-122"/>
+                <a:cs typeface="Cambria" pitchFamily="34" charset="-120"/>
               </a:rPr>
               <a:t>2026</a:t>
             </a:r>
@@ -11203,6 +11587,9 @@
                 <a:solidFill>
                   <a:srgbClr val="FAFAF9"/>
                 </a:solidFill>
+                <a:latin typeface="Pretendard" pitchFamily="34" charset="0"/>
+                <a:ea typeface="Pretendard" pitchFamily="34" charset="-122"/>
+                <a:cs typeface="Pretendard" pitchFamily="34" charset="-120"/>
               </a:rPr>
               <a:t>수도권 시범</a:t>
             </a:r>
@@ -11265,6 +11652,9 @@
                 <a:solidFill>
                   <a:srgbClr val="F5EFE0"/>
                 </a:solidFill>
+                <a:latin typeface="Pretendard" pitchFamily="34" charset="0"/>
+                <a:ea typeface="Pretendard" pitchFamily="34" charset="-122"/>
+                <a:cs typeface="Pretendard" pitchFamily="34" charset="-120"/>
               </a:rPr>
               <a:t>강북·일산 보건소 5곳 협력. 자녀 타겟 카톡 광고. 인플루언서 협업.</a:t>
             </a:r>
@@ -11326,6 +11716,9 @@
                 <a:solidFill>
                   <a:srgbClr val="B85042"/>
                 </a:solidFill>
+                <a:latin typeface="Cambria" pitchFamily="34" charset="0"/>
+                <a:ea typeface="Cambria" pitchFamily="34" charset="-122"/>
+                <a:cs typeface="Cambria" pitchFamily="34" charset="-120"/>
               </a:rPr>
               <a:t>Phase 2</a:t>
             </a:r>
@@ -11362,6 +11755,9 @@
                 <a:solidFill>
                   <a:srgbClr val="044E29"/>
                 </a:solidFill>
+                <a:latin typeface="Cambria" pitchFamily="34" charset="0"/>
+                <a:ea typeface="Cambria" pitchFamily="34" charset="-122"/>
+                <a:cs typeface="Cambria" pitchFamily="34" charset="-120"/>
               </a:rPr>
               <a:t>2027</a:t>
             </a:r>
@@ -11398,6 +11794,9 @@
                 <a:solidFill>
                   <a:srgbClr val="0A0A0A"/>
                 </a:solidFill>
+                <a:latin typeface="Pretendard" pitchFamily="34" charset="0"/>
+                <a:ea typeface="Pretendard" pitchFamily="34" charset="-122"/>
+                <a:cs typeface="Pretendard" pitchFamily="34" charset="-120"/>
               </a:rPr>
               <a:t>전국 + B2B 시설</a:t>
             </a:r>
@@ -11460,6 +11859,9 @@
                 <a:solidFill>
                   <a:srgbClr val="525252"/>
                 </a:solidFill>
+                <a:latin typeface="Pretendard" pitchFamily="34" charset="0"/>
+                <a:ea typeface="Pretendard" pitchFamily="34" charset="-122"/>
+                <a:cs typeface="Pretendard" pitchFamily="34" charset="-120"/>
               </a:rPr>
               <a:t>전국 보건소·요양시설 100곳 입점. 보험사 제휴 1호. MAU 50만 도달.</a:t>
             </a:r>
@@ -11521,6 +11923,9 @@
                 <a:solidFill>
                   <a:srgbClr val="B85042"/>
                 </a:solidFill>
+                <a:latin typeface="Cambria" pitchFamily="34" charset="0"/>
+                <a:ea typeface="Cambria" pitchFamily="34" charset="-122"/>
+                <a:cs typeface="Cambria" pitchFamily="34" charset="-120"/>
               </a:rPr>
               <a:t>Phase 3</a:t>
             </a:r>
@@ -11557,6 +11962,9 @@
                 <a:solidFill>
                   <a:srgbClr val="044E29"/>
                 </a:solidFill>
+                <a:latin typeface="Cambria" pitchFamily="34" charset="0"/>
+                <a:ea typeface="Cambria" pitchFamily="34" charset="-122"/>
+                <a:cs typeface="Cambria" pitchFamily="34" charset="-120"/>
               </a:rPr>
               <a:t>2028</a:t>
             </a:r>
@@ -11593,6 +12001,9 @@
                 <a:solidFill>
                   <a:srgbClr val="0A0A0A"/>
                 </a:solidFill>
+                <a:latin typeface="Pretendard" pitchFamily="34" charset="0"/>
+                <a:ea typeface="Pretendard" pitchFamily="34" charset="-122"/>
+                <a:cs typeface="Pretendard" pitchFamily="34" charset="-120"/>
               </a:rPr>
               <a:t>일본 진출</a:t>
             </a:r>
@@ -11655,6 +12066,9 @@
                 <a:solidFill>
                   <a:srgbClr val="525252"/>
                 </a:solidFill>
+                <a:latin typeface="Pretendard" pitchFamily="34" charset="0"/>
+                <a:ea typeface="Pretendard" pitchFamily="34" charset="-122"/>
+                <a:cs typeface="Pretendard" pitchFamily="34" charset="-120"/>
               </a:rPr>
               <a:t>동일 고령화 트렌드 일본 진출. 도쿄 거점 + 500개 시설.</a:t>
             </a:r>
@@ -11691,6 +12105,9 @@
                 <a:solidFill>
                   <a:srgbClr val="0A0A0A"/>
                 </a:solidFill>
+                <a:latin typeface="Cambria" pitchFamily="34" charset="0"/>
+                <a:ea typeface="Cambria" pitchFamily="34" charset="-122"/>
+                <a:cs typeface="Cambria" pitchFamily="34" charset="-120"/>
               </a:rPr>
               <a:t>p. 14 / 30</a:t>
             </a:r>
@@ -11784,6 +12201,9 @@
                 <a:solidFill>
                   <a:srgbClr val="FAFAF9"/>
                 </a:solidFill>
+                <a:latin typeface="Cambria" pitchFamily="34" charset="0"/>
+                <a:ea typeface="Cambria" pitchFamily="34" charset="-122"/>
+                <a:cs typeface="Cambria" pitchFamily="34" charset="-120"/>
               </a:rPr>
               <a:t>예비창업패키지 2026 · 신청서 · SS · 성장 전략 — 비즈니스 모델</a:t>
             </a:r>
@@ -11845,6 +12265,9 @@
                 <a:solidFill>
                   <a:srgbClr val="B85042"/>
                 </a:solidFill>
+                <a:latin typeface="Pretendard" pitchFamily="34" charset="0"/>
+                <a:ea typeface="Pretendard" pitchFamily="34" charset="-122"/>
+                <a:cs typeface="Pretendard" pitchFamily="34" charset="-120"/>
               </a:rPr>
               <a:t>SS-02 / 3가지 수익 모델</a:t>
             </a:r>
@@ -11881,6 +12304,9 @@
                 <a:solidFill>
                   <a:srgbClr val="0A0A0A"/>
                 </a:solidFill>
+                <a:latin typeface="Pretendard" pitchFamily="34" charset="0"/>
+                <a:ea typeface="Pretendard" pitchFamily="34" charset="-122"/>
+                <a:cs typeface="Pretendard" pitchFamily="34" charset="-120"/>
               </a:rPr>
               <a:t>3-Stream 수익 모델.</a:t>
             </a:r>
@@ -11956,6 +12382,9 @@
                 <a:solidFill>
                   <a:srgbClr val="B85042"/>
                 </a:solidFill>
+                <a:latin typeface="Cambria" pitchFamily="34" charset="0"/>
+                <a:ea typeface="Cambria" pitchFamily="34" charset="-122"/>
+                <a:cs typeface="Cambria" pitchFamily="34" charset="-120"/>
               </a:rPr>
               <a:t>55%</a:t>
             </a:r>
@@ -11992,6 +12421,9 @@
                 <a:solidFill>
                   <a:srgbClr val="0A0A0A"/>
                 </a:solidFill>
+                <a:latin typeface="Pretendard" pitchFamily="34" charset="0"/>
+                <a:ea typeface="Pretendard" pitchFamily="34" charset="-122"/>
+                <a:cs typeface="Pretendard" pitchFamily="34" charset="-120"/>
               </a:rPr>
               <a:t>B2C 정기구독</a:t>
             </a:r>
@@ -12031,6 +12463,9 @@
                 <a:solidFill>
                   <a:srgbClr val="525252"/>
                 </a:solidFill>
+                <a:latin typeface="Pretendard" pitchFamily="34" charset="0"/>
+                <a:ea typeface="Pretendard" pitchFamily="34" charset="-122"/>
+                <a:cs typeface="Pretendard" pitchFamily="34" charset="-120"/>
               </a:rPr>
               <a:t>₩29,000/월 · 약·낙상·가족 안부</a:t>
             </a:r>
@@ -12048,6 +12483,9 @@
                 <a:solidFill>
                   <a:srgbClr val="525252"/>
                 </a:solidFill>
+                <a:latin typeface="Pretendard" pitchFamily="34" charset="0"/>
+                <a:ea typeface="Pretendard" pitchFamily="34" charset="-122"/>
+                <a:cs typeface="Pretendard" pitchFamily="34" charset="-120"/>
               </a:rPr>
               <a:t>예상 회원 1만 도달 시 월 매출 2.9억</a:t>
             </a:r>
@@ -12084,6 +12522,9 @@
                 <a:solidFill>
                   <a:srgbClr val="B85042"/>
                 </a:solidFill>
+                <a:latin typeface="Cambria" pitchFamily="34" charset="0"/>
+                <a:ea typeface="Cambria" pitchFamily="34" charset="-122"/>
+                <a:cs typeface="Cambria" pitchFamily="34" charset="-120"/>
               </a:rPr>
               <a:t>30%</a:t>
             </a:r>
@@ -12120,6 +12561,9 @@
                 <a:solidFill>
                   <a:srgbClr val="0A0A0A"/>
                 </a:solidFill>
+                <a:latin typeface="Pretendard" pitchFamily="34" charset="0"/>
+                <a:ea typeface="Pretendard" pitchFamily="34" charset="-122"/>
+                <a:cs typeface="Pretendard" pitchFamily="34" charset="-120"/>
               </a:rPr>
               <a:t>B2B 요양시설</a:t>
             </a:r>
@@ -12159,6 +12603,9 @@
                 <a:solidFill>
                   <a:srgbClr val="525252"/>
                 </a:solidFill>
+                <a:latin typeface="Pretendard" pitchFamily="34" charset="0"/>
+                <a:ea typeface="Pretendard" pitchFamily="34" charset="-122"/>
+                <a:cs typeface="Pretendard" pitchFamily="34" charset="-120"/>
               </a:rPr>
               <a:t>₩150,000/월/입소자 · 운영 자동화</a:t>
             </a:r>
@@ -12176,6 +12623,9 @@
                 <a:solidFill>
                   <a:srgbClr val="525252"/>
                 </a:solidFill>
+                <a:latin typeface="Pretendard" pitchFamily="34" charset="0"/>
+                <a:ea typeface="Pretendard" pitchFamily="34" charset="-122"/>
+                <a:cs typeface="Pretendard" pitchFamily="34" charset="-120"/>
               </a:rPr>
               <a:t>시범 5곳 연간 매출 1.5억</a:t>
             </a:r>
@@ -12212,6 +12662,9 @@
                 <a:solidFill>
                   <a:srgbClr val="B85042"/>
                 </a:solidFill>
+                <a:latin typeface="Cambria" pitchFamily="34" charset="0"/>
+                <a:ea typeface="Cambria" pitchFamily="34" charset="-122"/>
+                <a:cs typeface="Cambria" pitchFamily="34" charset="-120"/>
               </a:rPr>
               <a:t>15%</a:t>
             </a:r>
@@ -12248,6 +12701,9 @@
                 <a:solidFill>
                   <a:srgbClr val="0A0A0A"/>
                 </a:solidFill>
+                <a:latin typeface="Pretendard" pitchFamily="34" charset="0"/>
+                <a:ea typeface="Pretendard" pitchFamily="34" charset="-122"/>
+                <a:cs typeface="Pretendard" pitchFamily="34" charset="-120"/>
               </a:rPr>
               <a:t>보험사 제휴</a:t>
             </a:r>
@@ -12287,6 +12743,9 @@
                 <a:solidFill>
                   <a:srgbClr val="525252"/>
                 </a:solidFill>
+                <a:latin typeface="Pretendard" pitchFamily="34" charset="0"/>
+                <a:ea typeface="Pretendard" pitchFamily="34" charset="-122"/>
+                <a:cs typeface="Pretendard" pitchFamily="34" charset="-120"/>
               </a:rPr>
               <a:t>10-15% 수수료 · 장기요양·실비</a:t>
             </a:r>
@@ -12304,6 +12763,9 @@
                 <a:solidFill>
                   <a:srgbClr val="525252"/>
                 </a:solidFill>
+                <a:latin typeface="Pretendard" pitchFamily="34" charset="0"/>
+                <a:ea typeface="Pretendard" pitchFamily="34" charset="-122"/>
+                <a:cs typeface="Pretendard" pitchFamily="34" charset="-120"/>
               </a:rPr>
               <a:t>의료비 절감 데이터 활용</a:t>
             </a:r>
@@ -12340,6 +12802,9 @@
                 <a:solidFill>
                   <a:srgbClr val="0A0A0A"/>
                 </a:solidFill>
+                <a:latin typeface="Cambria" pitchFamily="34" charset="0"/>
+                <a:ea typeface="Cambria" pitchFamily="34" charset="-122"/>
+                <a:cs typeface="Cambria" pitchFamily="34" charset="-120"/>
               </a:rPr>
               <a:t>p. 15 / 30</a:t>
             </a:r>
@@ -12433,6 +12898,9 @@
                 <a:solidFill>
                   <a:srgbClr val="FAFAF9"/>
                 </a:solidFill>
+                <a:latin typeface="Cambria" pitchFamily="34" charset="0"/>
+                <a:ea typeface="Cambria" pitchFamily="34" charset="-122"/>
+                <a:cs typeface="Cambria" pitchFamily="34" charset="-120"/>
               </a:rPr>
               <a:t>예비창업패키지 2026 · 신청서 · SS · 성장 전략 — 3년 매출 추정</a:t>
             </a:r>
@@ -12494,6 +12962,9 @@
                 <a:solidFill>
                   <a:srgbClr val="B85042"/>
                 </a:solidFill>
+                <a:latin typeface="Pretendard" pitchFamily="34" charset="0"/>
+                <a:ea typeface="Pretendard" pitchFamily="34" charset="-122"/>
+                <a:cs typeface="Pretendard" pitchFamily="34" charset="-120"/>
               </a:rPr>
               <a:t>SS-03 / 3년 매출 추정</a:t>
             </a:r>
@@ -12530,6 +13001,9 @@
                 <a:solidFill>
                   <a:srgbClr val="0A0A0A"/>
                 </a:solidFill>
+                <a:latin typeface="Pretendard" pitchFamily="34" charset="0"/>
+                <a:ea typeface="Pretendard" pitchFamily="34" charset="-122"/>
+                <a:cs typeface="Pretendard" pitchFamily="34" charset="-120"/>
               </a:rPr>
               <a:t>3년 안에 ₩35억.</a:t>
             </a:r>
@@ -12589,6 +13063,9 @@
                 <a:solidFill>
                   <a:srgbClr val="525252"/>
                 </a:solidFill>
+                <a:latin typeface="Pretendard" pitchFamily="34" charset="0"/>
+                <a:ea typeface="Pretendard" pitchFamily="34" charset="-122"/>
+                <a:cs typeface="Pretendard" pitchFamily="34" charset="-120"/>
               </a:rPr>
               <a:t>보수적 추정. 1만 회원 → 5만 회원 → 15만 회원 시나리오.</a:t>
             </a:r>
@@ -12641,6 +13118,9 @@
                 <a:solidFill>
                   <a:srgbClr val="525252"/>
                 </a:solidFill>
+                <a:latin typeface="Pretendard" pitchFamily="34" charset="0"/>
+                <a:ea typeface="Pretendard" pitchFamily="34" charset="-122"/>
+                <a:cs typeface="Pretendard" pitchFamily="34" charset="-120"/>
               </a:rPr>
               <a:t>(단위: 백만원) · 출처: 자체 보수적 시나리오 (회원 가정 기반)</a:t>
             </a:r>
@@ -12677,6 +13157,9 @@
                 <a:solidFill>
                   <a:srgbClr val="0A0A0A"/>
                 </a:solidFill>
+                <a:latin typeface="Cambria" pitchFamily="34" charset="0"/>
+                <a:ea typeface="Cambria" pitchFamily="34" charset="-122"/>
+                <a:cs typeface="Cambria" pitchFamily="34" charset="-120"/>
               </a:rPr>
               <a:t>p. 16 / 30</a:t>
             </a:r>
@@ -12770,6 +13253,9 @@
                 <a:solidFill>
                   <a:srgbClr val="FAFAF9"/>
                 </a:solidFill>
+                <a:latin typeface="Cambria" pitchFamily="34" charset="0"/>
+                <a:ea typeface="Cambria" pitchFamily="34" charset="-122"/>
+                <a:cs typeface="Cambria" pitchFamily="34" charset="-120"/>
               </a:rPr>
               <a:t>예비창업패키지 2026 · 신청서 · SS · 성장 전략 — 일자리 창출</a:t>
             </a:r>
@@ -12831,6 +13317,9 @@
                 <a:solidFill>
                   <a:srgbClr val="B85042"/>
                 </a:solidFill>
+                <a:latin typeface="Pretendard" pitchFamily="34" charset="0"/>
+                <a:ea typeface="Pretendard" pitchFamily="34" charset="-122"/>
+                <a:cs typeface="Pretendard" pitchFamily="34" charset="-120"/>
               </a:rPr>
               <a:t>SS-04 / 신규 일자리 누적</a:t>
             </a:r>
@@ -12867,6 +13356,9 @@
                 <a:solidFill>
                   <a:srgbClr val="0A0A0A"/>
                 </a:solidFill>
+                <a:latin typeface="Pretendard" pitchFamily="34" charset="0"/>
+                <a:ea typeface="Pretendard" pitchFamily="34" charset="-122"/>
+                <a:cs typeface="Pretendard" pitchFamily="34" charset="-120"/>
               </a:rPr>
               <a:t>3년 누적 20명 일자리.</a:t>
             </a:r>
@@ -12903,6 +13395,9 @@
                 <a:solidFill>
                   <a:srgbClr val="B85042"/>
                 </a:solidFill>
+                <a:latin typeface="Pretendard" pitchFamily="34" charset="0"/>
+                <a:ea typeface="Pretendard" pitchFamily="34" charset="-122"/>
+                <a:cs typeface="Pretendard" pitchFamily="34" charset="-120"/>
               </a:rPr>
               <a:t>정부 일자리 KPI 매칭. 정량 측정 가능.</a:t>
             </a:r>
@@ -12978,6 +13473,9 @@
                 <a:solidFill>
                   <a:srgbClr val="B85042"/>
                 </a:solidFill>
+                <a:latin typeface="Cambria" pitchFamily="34" charset="0"/>
+                <a:ea typeface="Cambria" pitchFamily="34" charset="-122"/>
+                <a:cs typeface="Cambria" pitchFamily="34" charset="-120"/>
               </a:rPr>
               <a:t>1년</a:t>
             </a:r>
@@ -13014,6 +13512,9 @@
                 <a:solidFill>
                   <a:srgbClr val="0A0A0A"/>
                 </a:solidFill>
+                <a:latin typeface="Cambria" pitchFamily="34" charset="0"/>
+                <a:ea typeface="Cambria" pitchFamily="34" charset="-122"/>
+                <a:cs typeface="Cambria" pitchFamily="34" charset="-120"/>
               </a:rPr>
               <a:t>5명</a:t>
             </a:r>
@@ -13050,6 +13551,9 @@
                 <a:solidFill>
                   <a:srgbClr val="525252"/>
                 </a:solidFill>
+                <a:latin typeface="Pretendard" pitchFamily="34" charset="0"/>
+                <a:ea typeface="Pretendard" pitchFamily="34" charset="-122"/>
+                <a:cs typeface="Pretendard" pitchFamily="34" charset="-120"/>
               </a:rPr>
               <a:t>개발 2 / 운영 2 / 콜센터 1</a:t>
             </a:r>
@@ -13109,6 +13613,9 @@
                 <a:solidFill>
                   <a:srgbClr val="B85042"/>
                 </a:solidFill>
+                <a:latin typeface="Cambria" pitchFamily="34" charset="0"/>
+                <a:ea typeface="Cambria" pitchFamily="34" charset="-122"/>
+                <a:cs typeface="Cambria" pitchFamily="34" charset="-120"/>
               </a:rPr>
               <a:t>2년</a:t>
             </a:r>
@@ -13145,6 +13652,9 @@
                 <a:solidFill>
                   <a:srgbClr val="0A0A0A"/>
                 </a:solidFill>
+                <a:latin typeface="Cambria" pitchFamily="34" charset="0"/>
+                <a:ea typeface="Cambria" pitchFamily="34" charset="-122"/>
+                <a:cs typeface="Cambria" pitchFamily="34" charset="-120"/>
               </a:rPr>
               <a:t>+7명</a:t>
             </a:r>
@@ -13181,6 +13691,9 @@
                 <a:solidFill>
                   <a:srgbClr val="525252"/>
                 </a:solidFill>
+                <a:latin typeface="Pretendard" pitchFamily="34" charset="0"/>
+                <a:ea typeface="Pretendard" pitchFamily="34" charset="-122"/>
+                <a:cs typeface="Pretendard" pitchFamily="34" charset="-120"/>
               </a:rPr>
               <a:t>PM 2 / 의료팀 2 / 영업 2 / 디자이너 1</a:t>
             </a:r>
@@ -13240,6 +13753,9 @@
                 <a:solidFill>
                   <a:srgbClr val="B85042"/>
                 </a:solidFill>
+                <a:latin typeface="Cambria" pitchFamily="34" charset="0"/>
+                <a:ea typeface="Cambria" pitchFamily="34" charset="-122"/>
+                <a:cs typeface="Cambria" pitchFamily="34" charset="-120"/>
               </a:rPr>
               <a:t>3년</a:t>
             </a:r>
@@ -13276,6 +13792,9 @@
                 <a:solidFill>
                   <a:srgbClr val="0A0A0A"/>
                 </a:solidFill>
+                <a:latin typeface="Cambria" pitchFamily="34" charset="0"/>
+                <a:ea typeface="Cambria" pitchFamily="34" charset="-122"/>
+                <a:cs typeface="Cambria" pitchFamily="34" charset="-120"/>
               </a:rPr>
               <a:t>+8명</a:t>
             </a:r>
@@ -13312,6 +13831,9 @@
                 <a:solidFill>
                   <a:srgbClr val="525252"/>
                 </a:solidFill>
+                <a:latin typeface="Pretendard" pitchFamily="34" charset="0"/>
+                <a:ea typeface="Pretendard" pitchFamily="34" charset="-122"/>
+                <a:cs typeface="Pretendard" pitchFamily="34" charset="-120"/>
               </a:rPr>
               <a:t>글로벌 2 / 보험 협력 2 / 기타 4</a:t>
             </a:r>
@@ -13371,6 +13893,9 @@
                 <a:solidFill>
                   <a:srgbClr val="0A0A0A"/>
                 </a:solidFill>
+                <a:latin typeface="Cambria" pitchFamily="34" charset="0"/>
+                <a:ea typeface="Cambria" pitchFamily="34" charset="-122"/>
+                <a:cs typeface="Cambria" pitchFamily="34" charset="-120"/>
               </a:rPr>
               <a:t>p. 17 / 30</a:t>
             </a:r>
@@ -13464,6 +13989,9 @@
                 <a:solidFill>
                   <a:srgbClr val="FAFAF9"/>
                 </a:solidFill>
+                <a:latin typeface="Cambria" pitchFamily="34" charset="0"/>
+                <a:ea typeface="Cambria" pitchFamily="34" charset="-122"/>
+                <a:cs typeface="Cambria" pitchFamily="34" charset="-120"/>
               </a:rPr>
               <a:t>예비창업패키지 2026 · 신청서 · SS · 성장 전략 — 사회적 가치</a:t>
             </a:r>
@@ -13525,6 +14053,9 @@
                 <a:solidFill>
                   <a:srgbClr val="B85042"/>
                 </a:solidFill>
+                <a:latin typeface="Pretendard" pitchFamily="34" charset="0"/>
+                <a:ea typeface="Pretendard" pitchFamily="34" charset="-122"/>
+                <a:cs typeface="Pretendard" pitchFamily="34" charset="-120"/>
               </a:rPr>
               <a:t>SS-05 / 사회적 가치 KPI</a:t>
             </a:r>
@@ -13561,6 +14092,9 @@
                 <a:solidFill>
                   <a:srgbClr val="0A0A0A"/>
                 </a:solidFill>
+                <a:latin typeface="Pretendard" pitchFamily="34" charset="0"/>
+                <a:ea typeface="Pretendard" pitchFamily="34" charset="-122"/>
+                <a:cs typeface="Pretendard" pitchFamily="34" charset="-120"/>
               </a:rPr>
               <a:t>세금이 환원되는 가치.</a:t>
             </a:r>
@@ -13597,6 +14131,9 @@
                 <a:solidFill>
                   <a:srgbClr val="B85042"/>
                 </a:solidFill>
+                <a:latin typeface="Pretendard" pitchFamily="34" charset="0"/>
+                <a:ea typeface="Pretendard" pitchFamily="34" charset="-122"/>
+                <a:cs typeface="Pretendard" pitchFamily="34" charset="-120"/>
               </a:rPr>
               <a:t>정량 KPI 3가지. 시범 효과 시뮬레이션 기반.</a:t>
             </a:r>
@@ -13681,6 +14218,9 @@
                 <a:solidFill>
                   <a:srgbClr val="B85042"/>
                 </a:solidFill>
+                <a:latin typeface="Cambria" pitchFamily="34" charset="0"/>
+                <a:ea typeface="Cambria" pitchFamily="34" charset="-122"/>
+                <a:cs typeface="Cambria" pitchFamily="34" charset="-120"/>
               </a:rPr>
               <a:t>−38%</a:t>
             </a:r>
@@ -13740,6 +14280,9 @@
                 <a:solidFill>
                   <a:srgbClr val="0A0A0A"/>
                 </a:solidFill>
+                <a:latin typeface="Pretendard" pitchFamily="34" charset="0"/>
+                <a:ea typeface="Pretendard" pitchFamily="34" charset="-122"/>
+                <a:cs typeface="Pretendard" pitchFamily="34" charset="-120"/>
               </a:rPr>
               <a:t>119 출동 감소</a:t>
             </a:r>
@@ -13779,6 +14322,9 @@
                 <a:solidFill>
                   <a:srgbClr val="525252"/>
                 </a:solidFill>
+                <a:latin typeface="Pretendard" pitchFamily="34" charset="0"/>
+                <a:ea typeface="Pretendard" pitchFamily="34" charset="-122"/>
+                <a:cs typeface="Pretendard" pitchFamily="34" charset="-120"/>
               </a:rPr>
               <a:t>낙상 자동 분석으로 거짓 출동 감소</a:t>
             </a:r>
@@ -13815,6 +14361,9 @@
                 <a:solidFill>
                   <a:srgbClr val="044E29"/>
                 </a:solidFill>
+                <a:latin typeface="Pretendard" pitchFamily="34" charset="0"/>
+                <a:ea typeface="Pretendard" pitchFamily="34" charset="-122"/>
+                <a:cs typeface="Pretendard" pitchFamily="34" charset="-120"/>
               </a:rPr>
               <a:t>WHO Digital Health 2024 차용</a:t>
             </a:r>
@@ -13876,6 +14425,9 @@
                 <a:solidFill>
                   <a:srgbClr val="E7B5A8"/>
                 </a:solidFill>
+                <a:latin typeface="Cambria" pitchFamily="34" charset="0"/>
+                <a:ea typeface="Cambria" pitchFamily="34" charset="-122"/>
+                <a:cs typeface="Cambria" pitchFamily="34" charset="-120"/>
               </a:rPr>
               <a:t>−15%</a:t>
             </a:r>
@@ -13935,6 +14487,9 @@
                 <a:solidFill>
                   <a:srgbClr val="FAFAF9"/>
                 </a:solidFill>
+                <a:latin typeface="Pretendard" pitchFamily="34" charset="0"/>
+                <a:ea typeface="Pretendard" pitchFamily="34" charset="-122"/>
+                <a:cs typeface="Pretendard" pitchFamily="34" charset="-120"/>
               </a:rPr>
               <a:t>의료비 절감</a:t>
             </a:r>
@@ -13974,6 +14529,9 @@
                 <a:solidFill>
                   <a:srgbClr val="F5EFE0"/>
                 </a:solidFill>
+                <a:latin typeface="Pretendard" pitchFamily="34" charset="0"/>
+                <a:ea typeface="Pretendard" pitchFamily="34" charset="-122"/>
+                <a:cs typeface="Pretendard" pitchFamily="34" charset="-120"/>
               </a:rPr>
               <a:t>조기 발견·예방으로 입원 비용 감소</a:t>
             </a:r>
@@ -14010,6 +14568,9 @@
                 <a:solidFill>
                   <a:srgbClr val="E7B5A8"/>
                 </a:solidFill>
+                <a:latin typeface="Pretendard" pitchFamily="34" charset="0"/>
+                <a:ea typeface="Pretendard" pitchFamily="34" charset="-122"/>
+                <a:cs typeface="Pretendard" pitchFamily="34" charset="-120"/>
               </a:rPr>
               <a:t>WHO Digital Health 2024</a:t>
             </a:r>
@@ -14071,6 +14632,9 @@
                 <a:solidFill>
                   <a:srgbClr val="B85042"/>
                 </a:solidFill>
+                <a:latin typeface="Cambria" pitchFamily="34" charset="0"/>
+                <a:ea typeface="Cambria" pitchFamily="34" charset="-122"/>
+                <a:cs typeface="Cambria" pitchFamily="34" charset="-120"/>
               </a:rPr>
               <a:t>−22%</a:t>
             </a:r>
@@ -14130,6 +14694,9 @@
                 <a:solidFill>
                   <a:srgbClr val="0A0A0A"/>
                 </a:solidFill>
+                <a:latin typeface="Pretendard" pitchFamily="34" charset="0"/>
+                <a:ea typeface="Pretendard" pitchFamily="34" charset="-122"/>
+                <a:cs typeface="Pretendard" pitchFamily="34" charset="-120"/>
               </a:rPr>
               <a:t>응급실 방문 감소</a:t>
             </a:r>
@@ -14169,6 +14736,9 @@
                 <a:solidFill>
                   <a:srgbClr val="525252"/>
                 </a:solidFill>
+                <a:latin typeface="Pretendard" pitchFamily="34" charset="0"/>
+                <a:ea typeface="Pretendard" pitchFamily="34" charset="-122"/>
+                <a:cs typeface="Pretendard" pitchFamily="34" charset="-120"/>
               </a:rPr>
               <a:t>복약 누락 → 응급 입원 감소</a:t>
             </a:r>
@@ -14205,6 +14775,9 @@
                 <a:solidFill>
                   <a:srgbClr val="044E29"/>
                 </a:solidFill>
+                <a:latin typeface="Pretendard" pitchFamily="34" charset="0"/>
+                <a:ea typeface="Pretendard" pitchFamily="34" charset="-122"/>
+                <a:cs typeface="Pretendard" pitchFamily="34" charset="-120"/>
               </a:rPr>
               <a:t>보건복지부 통계 시뮬레이션</a:t>
             </a:r>
@@ -14241,6 +14814,9 @@
                 <a:solidFill>
                   <a:srgbClr val="0A0A0A"/>
                 </a:solidFill>
+                <a:latin typeface="Cambria" pitchFamily="34" charset="0"/>
+                <a:ea typeface="Cambria" pitchFamily="34" charset="-122"/>
+                <a:cs typeface="Cambria" pitchFamily="34" charset="-120"/>
               </a:rPr>
               <a:t>p. 18 / 30</a:t>
             </a:r>
@@ -14334,6 +14910,9 @@
                 <a:solidFill>
                   <a:srgbClr val="FAFAF9"/>
                 </a:solidFill>
+                <a:latin typeface="Cambria" pitchFamily="34" charset="0"/>
+                <a:ea typeface="Cambria" pitchFamily="34" charset="-122"/>
+                <a:cs typeface="Cambria" pitchFamily="34" charset="-120"/>
               </a:rPr>
               <a:t>예비창업패키지 2026 · 신청서 · SS · 성장 전략 — 글로벌 확장</a:t>
             </a:r>
@@ -14395,6 +14974,9 @@
                 <a:solidFill>
                   <a:srgbClr val="B85042"/>
                 </a:solidFill>
+                <a:latin typeface="Pretendard" pitchFamily="34" charset="0"/>
+                <a:ea typeface="Pretendard" pitchFamily="34" charset="-122"/>
+                <a:cs typeface="Pretendard" pitchFamily="34" charset="-120"/>
               </a:rPr>
               <a:t>SS-06 / 일본·동남아 확장</a:t>
             </a:r>
@@ -14431,6 +15013,9 @@
                 <a:solidFill>
                   <a:srgbClr val="0A0A0A"/>
                 </a:solidFill>
+                <a:latin typeface="Pretendard" pitchFamily="34" charset="0"/>
+                <a:ea typeface="Pretendard" pitchFamily="34" charset="-122"/>
+                <a:cs typeface="Pretendard" pitchFamily="34" charset="-120"/>
               </a:rPr>
               <a:t>동일 트렌드, 동일 솔루션.</a:t>
             </a:r>
@@ -14538,6 +15123,9 @@
                 <a:solidFill>
                   <a:srgbClr val="B85042"/>
                 </a:solidFill>
+                <a:latin typeface="Cambria" pitchFamily="34" charset="0"/>
+                <a:ea typeface="Cambria" pitchFamily="34" charset="-122"/>
+                <a:cs typeface="Cambria" pitchFamily="34" charset="-120"/>
               </a:rPr>
               <a:t>JP</a:t>
             </a:r>
@@ -14574,6 +15162,9 @@
                 <a:solidFill>
                   <a:srgbClr val="0A0A0A"/>
                 </a:solidFill>
+                <a:latin typeface="Pretendard" pitchFamily="34" charset="0"/>
+                <a:ea typeface="Pretendard" pitchFamily="34" charset="-122"/>
+                <a:cs typeface="Pretendard" pitchFamily="34" charset="-120"/>
               </a:rPr>
               <a:t>일본</a:t>
             </a:r>
@@ -14610,6 +15201,9 @@
                 <a:solidFill>
                   <a:srgbClr val="044E29"/>
                 </a:solidFill>
+                <a:latin typeface="Cambria" pitchFamily="34" charset="0"/>
+                <a:ea typeface="Cambria" pitchFamily="34" charset="-122"/>
+                <a:cs typeface="Cambria" pitchFamily="34" charset="-120"/>
               </a:rPr>
               <a:t>29.1%</a:t>
             </a:r>
@@ -14646,6 +15240,9 @@
                 <a:solidFill>
                   <a:srgbClr val="B85042"/>
                 </a:solidFill>
+                <a:latin typeface="Pretendard" pitchFamily="34" charset="0"/>
+                <a:ea typeface="Pretendard" pitchFamily="34" charset="-122"/>
+                <a:cs typeface="Pretendard" pitchFamily="34" charset="-120"/>
               </a:rPr>
               <a:t>65세+ 인구 비중</a:t>
             </a:r>
@@ -14685,6 +15282,9 @@
                 <a:solidFill>
                   <a:srgbClr val="525252"/>
                 </a:solidFill>
+                <a:latin typeface="Pretendard" pitchFamily="34" charset="0"/>
+                <a:ea typeface="Pretendard" pitchFamily="34" charset="-122"/>
+                <a:cs typeface="Pretendard" pitchFamily="34" charset="-120"/>
               </a:rPr>
               <a:t>한국과 동일 트렌드. 도쿄 5만개 요양시설.</a:t>
             </a:r>
@@ -14721,6 +15321,9 @@
                 <a:solidFill>
                   <a:srgbClr val="B85042"/>
                 </a:solidFill>
+                <a:latin typeface="Cambria" pitchFamily="34" charset="0"/>
+                <a:ea typeface="Cambria" pitchFamily="34" charset="-122"/>
+                <a:cs typeface="Cambria" pitchFamily="34" charset="-120"/>
               </a:rPr>
               <a:t>2028 진출</a:t>
             </a:r>
@@ -14805,6 +15408,9 @@
                 <a:solidFill>
                   <a:srgbClr val="B85042"/>
                 </a:solidFill>
+                <a:latin typeface="Cambria" pitchFamily="34" charset="0"/>
+                <a:ea typeface="Cambria" pitchFamily="34" charset="-122"/>
+                <a:cs typeface="Cambria" pitchFamily="34" charset="-120"/>
               </a:rPr>
               <a:t>TW</a:t>
             </a:r>
@@ -14841,6 +15447,9 @@
                 <a:solidFill>
                   <a:srgbClr val="0A0A0A"/>
                 </a:solidFill>
+                <a:latin typeface="Pretendard" pitchFamily="34" charset="0"/>
+                <a:ea typeface="Pretendard" pitchFamily="34" charset="-122"/>
+                <a:cs typeface="Pretendard" pitchFamily="34" charset="-120"/>
               </a:rPr>
               <a:t>대만</a:t>
             </a:r>
@@ -14877,6 +15486,9 @@
                 <a:solidFill>
                   <a:srgbClr val="044E29"/>
                 </a:solidFill>
+                <a:latin typeface="Cambria" pitchFamily="34" charset="0"/>
+                <a:ea typeface="Cambria" pitchFamily="34" charset="-122"/>
+                <a:cs typeface="Cambria" pitchFamily="34" charset="-120"/>
               </a:rPr>
               <a:t>16.2%</a:t>
             </a:r>
@@ -14913,6 +15525,9 @@
                 <a:solidFill>
                   <a:srgbClr val="B85042"/>
                 </a:solidFill>
+                <a:latin typeface="Pretendard" pitchFamily="34" charset="0"/>
+                <a:ea typeface="Pretendard" pitchFamily="34" charset="-122"/>
+                <a:cs typeface="Pretendard" pitchFamily="34" charset="-120"/>
               </a:rPr>
               <a:t>65세+ 인구 비중</a:t>
             </a:r>
@@ -14952,6 +15567,9 @@
                 <a:solidFill>
                   <a:srgbClr val="525252"/>
                 </a:solidFill>
+                <a:latin typeface="Pretendard" pitchFamily="34" charset="0"/>
+                <a:ea typeface="Pretendard" pitchFamily="34" charset="-122"/>
+                <a:cs typeface="Pretendard" pitchFamily="34" charset="-120"/>
               </a:rPr>
               <a:t>급속 고령화 진행 중. 한류 우호적.</a:t>
             </a:r>
@@ -14988,6 +15606,9 @@
                 <a:solidFill>
                   <a:srgbClr val="B85042"/>
                 </a:solidFill>
+                <a:latin typeface="Cambria" pitchFamily="34" charset="0"/>
+                <a:ea typeface="Cambria" pitchFamily="34" charset="-122"/>
+                <a:cs typeface="Cambria" pitchFamily="34" charset="-120"/>
               </a:rPr>
               <a:t>2029 진출</a:t>
             </a:r>
@@ -15072,6 +15693,9 @@
                 <a:solidFill>
                   <a:srgbClr val="B85042"/>
                 </a:solidFill>
+                <a:latin typeface="Cambria" pitchFamily="34" charset="0"/>
+                <a:ea typeface="Cambria" pitchFamily="34" charset="-122"/>
+                <a:cs typeface="Cambria" pitchFamily="34" charset="-120"/>
               </a:rPr>
               <a:t>SG</a:t>
             </a:r>
@@ -15108,6 +15732,9 @@
                 <a:solidFill>
                   <a:srgbClr val="0A0A0A"/>
                 </a:solidFill>
+                <a:latin typeface="Pretendard" pitchFamily="34" charset="0"/>
+                <a:ea typeface="Pretendard" pitchFamily="34" charset="-122"/>
+                <a:cs typeface="Pretendard" pitchFamily="34" charset="-120"/>
               </a:rPr>
               <a:t>싱가포르·말레이시아</a:t>
             </a:r>
@@ -15144,6 +15771,9 @@
                 <a:solidFill>
                   <a:srgbClr val="044E29"/>
                 </a:solidFill>
+                <a:latin typeface="Cambria" pitchFamily="34" charset="0"/>
+                <a:ea typeface="Cambria" pitchFamily="34" charset="-122"/>
+                <a:cs typeface="Cambria" pitchFamily="34" charset="-120"/>
               </a:rPr>
               <a:t>16.0%</a:t>
             </a:r>
@@ -15180,6 +15810,9 @@
                 <a:solidFill>
                   <a:srgbClr val="B85042"/>
                 </a:solidFill>
+                <a:latin typeface="Pretendard" pitchFamily="34" charset="0"/>
+                <a:ea typeface="Pretendard" pitchFamily="34" charset="-122"/>
+                <a:cs typeface="Pretendard" pitchFamily="34" charset="-120"/>
               </a:rPr>
               <a:t>65세+ 인구 비중</a:t>
             </a:r>
@@ -15219,6 +15852,9 @@
                 <a:solidFill>
                   <a:srgbClr val="525252"/>
                 </a:solidFill>
+                <a:latin typeface="Pretendard" pitchFamily="34" charset="0"/>
+                <a:ea typeface="Pretendard" pitchFamily="34" charset="-122"/>
+                <a:cs typeface="Pretendard" pitchFamily="34" charset="-120"/>
               </a:rPr>
               <a:t>동남아 디지털 헬스 허브.</a:t>
             </a:r>
@@ -15255,6 +15891,9 @@
                 <a:solidFill>
                   <a:srgbClr val="B85042"/>
                 </a:solidFill>
+                <a:latin typeface="Cambria" pitchFamily="34" charset="0"/>
+                <a:ea typeface="Cambria" pitchFamily="34" charset="-122"/>
+                <a:cs typeface="Cambria" pitchFamily="34" charset="-120"/>
               </a:rPr>
               <a:t>2030 진출</a:t>
             </a:r>
@@ -15291,6 +15930,9 @@
                 <a:solidFill>
                   <a:srgbClr val="525252"/>
                 </a:solidFill>
+                <a:latin typeface="Pretendard" pitchFamily="34" charset="0"/>
+                <a:ea typeface="Pretendard" pitchFamily="34" charset="-122"/>
+                <a:cs typeface="Pretendard" pitchFamily="34" charset="-120"/>
               </a:rPr>
               <a:t>출처: OECD Health Data 2025 · 통계청 국제비교</a:t>
             </a:r>
@@ -15327,6 +15969,9 @@
                 <a:solidFill>
                   <a:srgbClr val="0A0A0A"/>
                 </a:solidFill>
+                <a:latin typeface="Cambria" pitchFamily="34" charset="0"/>
+                <a:ea typeface="Cambria" pitchFamily="34" charset="-122"/>
+                <a:cs typeface="Cambria" pitchFamily="34" charset="-120"/>
               </a:rPr>
               <a:t>p. 19 / 30</a:t>
             </a:r>
@@ -15420,6 +16065,9 @@
                 <a:solidFill>
                   <a:srgbClr val="FAFAF9"/>
                 </a:solidFill>
+                <a:latin typeface="Cambria" pitchFamily="34" charset="0"/>
+                <a:ea typeface="Cambria" pitchFamily="34" charset="-122"/>
+                <a:cs typeface="Cambria" pitchFamily="34" charset="-120"/>
               </a:rPr>
               <a:t>예비창업패키지 2026 · 신청서 · 1-PAGE SUMMARY</a:t>
             </a:r>
@@ -15456,6 +16104,9 @@
                 <a:solidFill>
                   <a:srgbClr val="0A0A0A"/>
                 </a:solidFill>
+                <a:latin typeface="Pretendard" pitchFamily="34" charset="0"/>
+                <a:ea typeface="Pretendard" pitchFamily="34" charset="-122"/>
+                <a:cs typeface="Pretendard" pitchFamily="34" charset="-120"/>
               </a:rPr>
               <a:t>"엄마 오늘 약 드셨어?"</a:t>
             </a:r>
@@ -15492,6 +16143,9 @@
                 <a:solidFill>
                   <a:srgbClr val="B85042"/>
                 </a:solidFill>
+                <a:latin typeface="Pretendard" pitchFamily="34" charset="0"/>
+                <a:ea typeface="Pretendard" pitchFamily="34" charset="-122"/>
+                <a:cs typeface="Pretendard" pitchFamily="34" charset="-120"/>
               </a:rPr>
               <a:t>그 질문을 하루 7번 하는 자녀들에게.</a:t>
             </a:r>
@@ -15599,6 +16253,9 @@
                 <a:solidFill>
                   <a:srgbClr val="0A0A0A"/>
                 </a:solidFill>
+                <a:latin typeface="Cambria" pitchFamily="34" charset="0"/>
+                <a:ea typeface="Cambria" pitchFamily="34" charset="-122"/>
+                <a:cs typeface="Cambria" pitchFamily="34" charset="-120"/>
               </a:rPr>
               <a:t>250만</a:t>
             </a:r>
@@ -15635,6 +16292,9 @@
                 <a:solidFill>
                   <a:srgbClr val="044E29"/>
                 </a:solidFill>
+                <a:latin typeface="Pretendard" pitchFamily="34" charset="0"/>
+                <a:ea typeface="Pretendard" pitchFamily="34" charset="-122"/>
+                <a:cs typeface="Pretendard" pitchFamily="34" charset="-120"/>
               </a:rPr>
               <a:t>독거 노인 1인 가구</a:t>
             </a:r>
@@ -15671,6 +16331,9 @@
                 <a:solidFill>
                   <a:srgbClr val="525252"/>
                 </a:solidFill>
+                <a:latin typeface="Pretendard" pitchFamily="34" charset="0"/>
+                <a:ea typeface="Pretendard" pitchFamily="34" charset="-122"/>
+                <a:cs typeface="Pretendard" pitchFamily="34" charset="-120"/>
               </a:rPr>
               <a:t>통계청 2025</a:t>
             </a:r>
@@ -15755,6 +16418,9 @@
                 <a:solidFill>
                   <a:srgbClr val="0A0A0A"/>
                 </a:solidFill>
+                <a:latin typeface="Cambria" pitchFamily="34" charset="0"/>
+                <a:ea typeface="Cambria" pitchFamily="34" charset="-122"/>
+                <a:cs typeface="Cambria" pitchFamily="34" charset="-120"/>
               </a:rPr>
               <a:t>₩1억</a:t>
             </a:r>
@@ -15791,6 +16457,9 @@
                 <a:solidFill>
                   <a:srgbClr val="044E29"/>
                 </a:solidFill>
+                <a:latin typeface="Pretendard" pitchFamily="34" charset="0"/>
+                <a:ea typeface="Pretendard" pitchFamily="34" charset="-122"/>
+                <a:cs typeface="Pretendard" pitchFamily="34" charset="-120"/>
               </a:rPr>
               <a:t>요청 지원금</a:t>
             </a:r>
@@ -15827,6 +16496,9 @@
                 <a:solidFill>
                   <a:srgbClr val="525252"/>
                 </a:solidFill>
+                <a:latin typeface="Pretendard" pitchFamily="34" charset="0"/>
+                <a:ea typeface="Pretendard" pitchFamily="34" charset="-122"/>
+                <a:cs typeface="Pretendard" pitchFamily="34" charset="-120"/>
               </a:rPr>
               <a:t>1년 사업화</a:t>
             </a:r>
@@ -15911,6 +16583,9 @@
                 <a:solidFill>
                   <a:srgbClr val="0A0A0A"/>
                 </a:solidFill>
+                <a:latin typeface="Cambria" pitchFamily="34" charset="0"/>
+                <a:ea typeface="Cambria" pitchFamily="34" charset="-122"/>
+                <a:cs typeface="Cambria" pitchFamily="34" charset="-120"/>
               </a:rPr>
               <a:t>10,000명</a:t>
             </a:r>
@@ -15947,6 +16622,9 @@
                 <a:solidFill>
                   <a:srgbClr val="044E29"/>
                 </a:solidFill>
+                <a:latin typeface="Pretendard" pitchFamily="34" charset="0"/>
+                <a:ea typeface="Pretendard" pitchFamily="34" charset="-122"/>
+                <a:cs typeface="Pretendard" pitchFamily="34" charset="-120"/>
               </a:rPr>
               <a:t>1년 후 베타 사용자</a:t>
             </a:r>
@@ -15983,6 +16661,9 @@
                 <a:solidFill>
                   <a:srgbClr val="525252"/>
                 </a:solidFill>
+                <a:latin typeface="Pretendard" pitchFamily="34" charset="0"/>
+                <a:ea typeface="Pretendard" pitchFamily="34" charset="-122"/>
+                <a:cs typeface="Pretendard" pitchFamily="34" charset="-120"/>
               </a:rPr>
               <a:t>산출물 KPI</a:t>
             </a:r>
@@ -16067,6 +16748,9 @@
                 <a:solidFill>
                   <a:srgbClr val="0A0A0A"/>
                 </a:solidFill>
+                <a:latin typeface="Cambria" pitchFamily="34" charset="0"/>
+                <a:ea typeface="Cambria" pitchFamily="34" charset="-122"/>
+                <a:cs typeface="Cambria" pitchFamily="34" charset="-120"/>
               </a:rPr>
               <a:t>5명</a:t>
             </a:r>
@@ -16103,6 +16787,9 @@
                 <a:solidFill>
                   <a:srgbClr val="044E29"/>
                 </a:solidFill>
+                <a:latin typeface="Pretendard" pitchFamily="34" charset="0"/>
+                <a:ea typeface="Pretendard" pitchFamily="34" charset="-122"/>
+                <a:cs typeface="Pretendard" pitchFamily="34" charset="-120"/>
               </a:rPr>
               <a:t>1년 신규 일자리</a:t>
             </a:r>
@@ -16139,6 +16826,9 @@
                 <a:solidFill>
                   <a:srgbClr val="525252"/>
                 </a:solidFill>
+                <a:latin typeface="Pretendard" pitchFamily="34" charset="0"/>
+                <a:ea typeface="Pretendard" pitchFamily="34" charset="-122"/>
+                <a:cs typeface="Pretendard" pitchFamily="34" charset="-120"/>
               </a:rPr>
               <a:t>정부 KPI 매칭</a:t>
             </a:r>
@@ -16200,6 +16890,9 @@
                 <a:solidFill>
                   <a:srgbClr val="E7B5A8"/>
                 </a:solidFill>
+                <a:latin typeface="Cambria" pitchFamily="34" charset="0"/>
+                <a:ea typeface="Cambria" pitchFamily="34" charset="-122"/>
+                <a:cs typeface="Cambria" pitchFamily="34" charset="-120"/>
               </a:rPr>
               <a:t>THE ASK</a:t>
             </a:r>
@@ -16236,6 +16929,9 @@
                 <a:solidFill>
                   <a:srgbClr val="FAFAF9"/>
                 </a:solidFill>
+                <a:latin typeface="Pretendard" pitchFamily="34" charset="0"/>
+                <a:ea typeface="Pretendard" pitchFamily="34" charset="-122"/>
+                <a:cs typeface="Pretendard" pitchFamily="34" charset="-120"/>
               </a:rPr>
               <a:t>1억 원 · 12개월 · 베타 1만 사용자 + 시범 시설 5곳 + 신규 일자리 5명</a:t>
             </a:r>
@@ -16272,6 +16968,9 @@
                 <a:solidFill>
                   <a:srgbClr val="0A0A0A"/>
                 </a:solidFill>
+                <a:latin typeface="Cambria" pitchFamily="34" charset="0"/>
+                <a:ea typeface="Cambria" pitchFamily="34" charset="-122"/>
+                <a:cs typeface="Cambria" pitchFamily="34" charset="-120"/>
               </a:rPr>
               <a:t>p. 02 / 30</a:t>
             </a:r>
@@ -16365,6 +17064,9 @@
                 <a:solidFill>
                   <a:srgbClr val="FAFAF9"/>
                 </a:solidFill>
+                <a:latin typeface="Cambria" pitchFamily="34" charset="0"/>
+                <a:ea typeface="Cambria" pitchFamily="34" charset="-122"/>
+                <a:cs typeface="Cambria" pitchFamily="34" charset="-120"/>
               </a:rPr>
               <a:t>예비창업패키지 2026 · 신청서 · T · 팀 구성 — 대표자 역량</a:t>
             </a:r>
@@ -16426,6 +17128,9 @@
                 <a:solidFill>
                   <a:srgbClr val="B85042"/>
                 </a:solidFill>
+                <a:latin typeface="Pretendard" pitchFamily="34" charset="0"/>
+                <a:ea typeface="Pretendard" pitchFamily="34" charset="-122"/>
+                <a:cs typeface="Pretendard" pitchFamily="34" charset="-120"/>
               </a:rPr>
               <a:t>T-01 / 대표자 도메인 전문성</a:t>
             </a:r>
@@ -16462,6 +17167,9 @@
                 <a:solidFill>
                   <a:srgbClr val="0A0A0A"/>
                 </a:solidFill>
+                <a:latin typeface="Pretendard" pitchFamily="34" charset="0"/>
+                <a:ea typeface="Pretendard" pitchFamily="34" charset="-122"/>
+                <a:cs typeface="Pretendard" pitchFamily="34" charset="-120"/>
               </a:rPr>
               <a:t>의사 7년 + 노인의학 전문.</a:t>
             </a:r>
@@ -16546,6 +17254,9 @@
                 <a:solidFill>
                   <a:srgbClr val="E7B5A8"/>
                 </a:solidFill>
+                <a:latin typeface="Pretendard" pitchFamily="34" charset="0"/>
+                <a:ea typeface="Pretendard" pitchFamily="34" charset="-122"/>
+                <a:cs typeface="Pretendard" pitchFamily="34" charset="-120"/>
               </a:rPr>
               <a:t>이</a:t>
             </a:r>
@@ -16582,6 +17293,9 @@
                 <a:solidFill>
                   <a:srgbClr val="0A0A0A"/>
                 </a:solidFill>
+                <a:latin typeface="Pretendard" pitchFamily="34" charset="0"/>
+                <a:ea typeface="Pretendard" pitchFamily="34" charset="-122"/>
+                <a:cs typeface="Pretendard" pitchFamily="34" charset="-120"/>
               </a:rPr>
               <a:t>이수진</a:t>
             </a:r>
@@ -16618,6 +17332,9 @@
                 <a:solidFill>
                   <a:srgbClr val="B85042"/>
                 </a:solidFill>
+                <a:latin typeface="Pretendard" pitchFamily="34" charset="0"/>
+                <a:ea typeface="Pretendard" pitchFamily="34" charset="-122"/>
+                <a:cs typeface="Pretendard" pitchFamily="34" charset="-120"/>
               </a:rPr>
               <a:t>CEO &amp; Founder · ㈜실버케어랩</a:t>
             </a:r>
@@ -16677,6 +17394,9 @@
                 <a:solidFill>
                   <a:srgbClr val="525252"/>
                 </a:solidFill>
+                <a:latin typeface="Pretendard" pitchFamily="34" charset="0"/>
+                <a:ea typeface="Pretendard" pitchFamily="34" charset="-122"/>
+                <a:cs typeface="Pretendard" pitchFamily="34" charset="-120"/>
               </a:rPr>
               <a:t>· 강남세브란스 내과 의사 7년 · 노인의학 전문</a:t>
             </a:r>
@@ -16713,6 +17433,9 @@
                 <a:solidFill>
                   <a:srgbClr val="525252"/>
                 </a:solidFill>
+                <a:latin typeface="Pretendard" pitchFamily="34" charset="0"/>
+                <a:ea typeface="Pretendard" pitchFamily="34" charset="-122"/>
+                <a:cs typeface="Pretendard" pitchFamily="34" charset="-120"/>
               </a:rPr>
               <a:t>· 서울대 의학박사 (노인의학)</a:t>
             </a:r>
@@ -16749,6 +17472,9 @@
                 <a:solidFill>
                   <a:srgbClr val="525252"/>
                 </a:solidFill>
+                <a:latin typeface="Pretendard" pitchFamily="34" charset="0"/>
+                <a:ea typeface="Pretendard" pitchFamily="34" charset="-122"/>
+                <a:cs typeface="Pretendard" pitchFamily="34" charset="-120"/>
               </a:rPr>
               <a:t>· 대한노인의학회 정회원</a:t>
             </a:r>
@@ -16785,6 +17511,9 @@
                 <a:solidFill>
                   <a:srgbClr val="525252"/>
                 </a:solidFill>
+                <a:latin typeface="Pretendard" pitchFamily="34" charset="0"/>
+                <a:ea typeface="Pretendard" pitchFamily="34" charset="-122"/>
+                <a:cs typeface="Pretendard" pitchFamily="34" charset="-120"/>
               </a:rPr>
               <a:t>· 의료 IT 스타트업 자문 3년 (前)</a:t>
             </a:r>
@@ -16821,6 +17550,9 @@
                 <a:solidFill>
                   <a:srgbClr val="525252"/>
                 </a:solidFill>
+                <a:latin typeface="Pretendard" pitchFamily="34" charset="0"/>
+                <a:ea typeface="Pretendard" pitchFamily="34" charset="-122"/>
+                <a:cs typeface="Pretendard" pitchFamily="34" charset="-120"/>
               </a:rPr>
               <a:t>· 본인 모친 케어 경험 → 창업 동기</a:t>
             </a:r>
@@ -16857,6 +17589,9 @@
                 <a:solidFill>
                   <a:srgbClr val="0A0A0A"/>
                 </a:solidFill>
+                <a:latin typeface="Cambria" pitchFamily="34" charset="0"/>
+                <a:ea typeface="Cambria" pitchFamily="34" charset="-122"/>
+                <a:cs typeface="Cambria" pitchFamily="34" charset="-120"/>
               </a:rPr>
               <a:t>p. 20 / 30</a:t>
             </a:r>
@@ -16950,6 +17685,9 @@
                 <a:solidFill>
                   <a:srgbClr val="FAFAF9"/>
                 </a:solidFill>
+                <a:latin typeface="Cambria" pitchFamily="34" charset="0"/>
+                <a:ea typeface="Cambria" pitchFamily="34" charset="-122"/>
+                <a:cs typeface="Cambria" pitchFamily="34" charset="-120"/>
               </a:rPr>
               <a:t>예비창업패키지 2026 · 신청서 · T · 팀 구성 — 핵심 팀</a:t>
             </a:r>
@@ -17011,6 +17749,9 @@
                 <a:solidFill>
                   <a:srgbClr val="B85042"/>
                 </a:solidFill>
+                <a:latin typeface="Pretendard" pitchFamily="34" charset="0"/>
+                <a:ea typeface="Pretendard" pitchFamily="34" charset="-122"/>
+                <a:cs typeface="Pretendard" pitchFamily="34" charset="-120"/>
               </a:rPr>
               <a:t>T-02 / 핵심 팀 4인 (도메인 융합)</a:t>
             </a:r>
@@ -17047,6 +17788,9 @@
                 <a:solidFill>
                   <a:srgbClr val="0A0A0A"/>
                 </a:solidFill>
+                <a:latin typeface="Pretendard" pitchFamily="34" charset="0"/>
+                <a:ea typeface="Pretendard" pitchFamily="34" charset="-122"/>
+                <a:cs typeface="Pretendard" pitchFamily="34" charset="-120"/>
               </a:rPr>
               <a:t>의사·기술·요양·재무 4인.</a:t>
             </a:r>
@@ -17154,6 +17898,9 @@
                 <a:solidFill>
                   <a:srgbClr val="044E29"/>
                 </a:solidFill>
+                <a:latin typeface="Pretendard" pitchFamily="34" charset="0"/>
+                <a:ea typeface="Pretendard" pitchFamily="34" charset="-122"/>
+                <a:cs typeface="Pretendard" pitchFamily="34" charset="-120"/>
               </a:rPr>
               <a:t>이</a:t>
             </a:r>
@@ -17190,6 +17937,9 @@
                 <a:solidFill>
                   <a:srgbClr val="0A0A0A"/>
                 </a:solidFill>
+                <a:latin typeface="Pretendard" pitchFamily="34" charset="0"/>
+                <a:ea typeface="Pretendard" pitchFamily="34" charset="-122"/>
+                <a:cs typeface="Pretendard" pitchFamily="34" charset="-120"/>
               </a:rPr>
               <a:t>이수진</a:t>
             </a:r>
@@ -17226,6 +17976,9 @@
                 <a:solidFill>
                   <a:srgbClr val="B85042"/>
                 </a:solidFill>
+                <a:latin typeface="Cambria" pitchFamily="34" charset="0"/>
+                <a:ea typeface="Cambria" pitchFamily="34" charset="-122"/>
+                <a:cs typeface="Cambria" pitchFamily="34" charset="-120"/>
               </a:rPr>
               <a:t>CEO &amp; Founder</a:t>
             </a:r>
@@ -17265,6 +18018,9 @@
                 <a:solidFill>
                   <a:srgbClr val="525252"/>
                 </a:solidFill>
+                <a:latin typeface="Pretendard" pitchFamily="34" charset="0"/>
+                <a:ea typeface="Pretendard" pitchFamily="34" charset="-122"/>
+                <a:cs typeface="Pretendard" pitchFamily="34" charset="-120"/>
               </a:rPr>
               <a:t>강남세브란스 의사 7년</a:t>
             </a:r>
@@ -17282,6 +18038,9 @@
                 <a:solidFill>
                   <a:srgbClr val="525252"/>
                 </a:solidFill>
+                <a:latin typeface="Pretendard" pitchFamily="34" charset="0"/>
+                <a:ea typeface="Pretendard" pitchFamily="34" charset="-122"/>
+                <a:cs typeface="Pretendard" pitchFamily="34" charset="-120"/>
               </a:rPr>
               <a:t>노인의학 전문</a:t>
             </a:r>
@@ -17366,6 +18125,9 @@
                 <a:solidFill>
                   <a:srgbClr val="044E29"/>
                 </a:solidFill>
+                <a:latin typeface="Pretendard" pitchFamily="34" charset="0"/>
+                <a:ea typeface="Pretendard" pitchFamily="34" charset="-122"/>
+                <a:cs typeface="Pretendard" pitchFamily="34" charset="-120"/>
               </a:rPr>
               <a:t>박</a:t>
             </a:r>
@@ -17402,6 +18164,9 @@
                 <a:solidFill>
                   <a:srgbClr val="0A0A0A"/>
                 </a:solidFill>
+                <a:latin typeface="Pretendard" pitchFamily="34" charset="0"/>
+                <a:ea typeface="Pretendard" pitchFamily="34" charset="-122"/>
+                <a:cs typeface="Pretendard" pitchFamily="34" charset="-120"/>
               </a:rPr>
               <a:t>박정환</a:t>
             </a:r>
@@ -17438,6 +18203,9 @@
                 <a:solidFill>
                   <a:srgbClr val="B85042"/>
                 </a:solidFill>
+                <a:latin typeface="Cambria" pitchFamily="34" charset="0"/>
+                <a:ea typeface="Cambria" pitchFamily="34" charset="-122"/>
+                <a:cs typeface="Cambria" pitchFamily="34" charset="-120"/>
               </a:rPr>
               <a:t>CTO</a:t>
             </a:r>
@@ -17477,6 +18245,9 @@
                 <a:solidFill>
                   <a:srgbClr val="525252"/>
                 </a:solidFill>
+                <a:latin typeface="Pretendard" pitchFamily="34" charset="0"/>
+                <a:ea typeface="Pretendard" pitchFamily="34" charset="-122"/>
+                <a:cs typeface="Pretendard" pitchFamily="34" charset="-120"/>
               </a:rPr>
               <a:t>前 카카오 헬스케어 5년</a:t>
             </a:r>
@@ -17494,6 +18265,9 @@
                 <a:solidFill>
                   <a:srgbClr val="525252"/>
                 </a:solidFill>
+                <a:latin typeface="Pretendard" pitchFamily="34" charset="0"/>
+                <a:ea typeface="Pretendard" pitchFamily="34" charset="-122"/>
+                <a:cs typeface="Pretendard" pitchFamily="34" charset="-120"/>
               </a:rPr>
               <a:t>의료 AI 연구 박사</a:t>
             </a:r>
@@ -17578,6 +18352,9 @@
                 <a:solidFill>
                   <a:srgbClr val="044E29"/>
                 </a:solidFill>
+                <a:latin typeface="Pretendard" pitchFamily="34" charset="0"/>
+                <a:ea typeface="Pretendard" pitchFamily="34" charset="-122"/>
+                <a:cs typeface="Pretendard" pitchFamily="34" charset="-120"/>
               </a:rPr>
               <a:t>최</a:t>
             </a:r>
@@ -17614,6 +18391,9 @@
                 <a:solidFill>
                   <a:srgbClr val="0A0A0A"/>
                 </a:solidFill>
+                <a:latin typeface="Pretendard" pitchFamily="34" charset="0"/>
+                <a:ea typeface="Pretendard" pitchFamily="34" charset="-122"/>
+                <a:cs typeface="Pretendard" pitchFamily="34" charset="-120"/>
               </a:rPr>
               <a:t>최민영</a:t>
             </a:r>
@@ -17650,6 +18430,9 @@
                 <a:solidFill>
                   <a:srgbClr val="B85042"/>
                 </a:solidFill>
+                <a:latin typeface="Cambria" pitchFamily="34" charset="0"/>
+                <a:ea typeface="Cambria" pitchFamily="34" charset="-122"/>
+                <a:cs typeface="Cambria" pitchFamily="34" charset="-120"/>
               </a:rPr>
               <a:t>Head of Care</a:t>
             </a:r>
@@ -17689,6 +18472,9 @@
                 <a:solidFill>
                   <a:srgbClr val="525252"/>
                 </a:solidFill>
+                <a:latin typeface="Pretendard" pitchFamily="34" charset="0"/>
+                <a:ea typeface="Pretendard" pitchFamily="34" charset="-122"/>
+                <a:cs typeface="Pretendard" pitchFamily="34" charset="-120"/>
               </a:rPr>
               <a:t>전직 요양보호사 12년</a:t>
             </a:r>
@@ -17706,6 +18492,9 @@
                 <a:solidFill>
                   <a:srgbClr val="525252"/>
                 </a:solidFill>
+                <a:latin typeface="Pretendard" pitchFamily="34" charset="0"/>
+                <a:ea typeface="Pretendard" pitchFamily="34" charset="-122"/>
+                <a:cs typeface="Pretendard" pitchFamily="34" charset="-120"/>
               </a:rPr>
               <a:t>현장 운영 전문</a:t>
             </a:r>
@@ -17790,6 +18579,9 @@
                 <a:solidFill>
                   <a:srgbClr val="044E29"/>
                 </a:solidFill>
+                <a:latin typeface="Pretendard" pitchFamily="34" charset="0"/>
+                <a:ea typeface="Pretendard" pitchFamily="34" charset="-122"/>
+                <a:cs typeface="Pretendard" pitchFamily="34" charset="-120"/>
               </a:rPr>
               <a:t>김</a:t>
             </a:r>
@@ -17826,6 +18618,9 @@
                 <a:solidFill>
                   <a:srgbClr val="0A0A0A"/>
                 </a:solidFill>
+                <a:latin typeface="Pretendard" pitchFamily="34" charset="0"/>
+                <a:ea typeface="Pretendard" pitchFamily="34" charset="-122"/>
+                <a:cs typeface="Pretendard" pitchFamily="34" charset="-120"/>
               </a:rPr>
               <a:t>김도윤</a:t>
             </a:r>
@@ -17862,6 +18657,9 @@
                 <a:solidFill>
                   <a:srgbClr val="B85042"/>
                 </a:solidFill>
+                <a:latin typeface="Cambria" pitchFamily="34" charset="0"/>
+                <a:ea typeface="Cambria" pitchFamily="34" charset="-122"/>
+                <a:cs typeface="Cambria" pitchFamily="34" charset="-120"/>
               </a:rPr>
               <a:t>CFO</a:t>
             </a:r>
@@ -17901,6 +18699,9 @@
                 <a:solidFill>
                   <a:srgbClr val="525252"/>
                 </a:solidFill>
+                <a:latin typeface="Pretendard" pitchFamily="34" charset="0"/>
+                <a:ea typeface="Pretendard" pitchFamily="34" charset="-122"/>
+                <a:cs typeface="Pretendard" pitchFamily="34" charset="-120"/>
               </a:rPr>
               <a:t>前 PwC 5년</a:t>
             </a:r>
@@ -17918,6 +18719,9 @@
                 <a:solidFill>
                   <a:srgbClr val="525252"/>
                 </a:solidFill>
+                <a:latin typeface="Pretendard" pitchFamily="34" charset="0"/>
+                <a:ea typeface="Pretendard" pitchFamily="34" charset="-122"/>
+                <a:cs typeface="Pretendard" pitchFamily="34" charset="-120"/>
               </a:rPr>
               <a:t>시리즈 투자 IR 경험</a:t>
             </a:r>
@@ -17954,6 +18758,9 @@
                 <a:solidFill>
                   <a:srgbClr val="0A0A0A"/>
                 </a:solidFill>
+                <a:latin typeface="Cambria" pitchFamily="34" charset="0"/>
+                <a:ea typeface="Cambria" pitchFamily="34" charset="-122"/>
+                <a:cs typeface="Cambria" pitchFamily="34" charset="-120"/>
               </a:rPr>
               <a:t>p. 21 / 30</a:t>
             </a:r>
@@ -18047,6 +18854,9 @@
                 <a:solidFill>
                   <a:srgbClr val="FAFAF9"/>
                 </a:solidFill>
+                <a:latin typeface="Cambria" pitchFamily="34" charset="0"/>
+                <a:ea typeface="Cambria" pitchFamily="34" charset="-122"/>
+                <a:cs typeface="Cambria" pitchFamily="34" charset="-120"/>
               </a:rPr>
               <a:t>예비창업패키지 2026 · 신청서 · T · 팀 구성 — 자문단</a:t>
             </a:r>
@@ -18108,6 +18918,9 @@
                 <a:solidFill>
                   <a:srgbClr val="B85042"/>
                 </a:solidFill>
+                <a:latin typeface="Pretendard" pitchFamily="34" charset="0"/>
+                <a:ea typeface="Pretendard" pitchFamily="34" charset="-122"/>
+                <a:cs typeface="Pretendard" pitchFamily="34" charset="-120"/>
               </a:rPr>
               <a:t>T-03 / 자문단 4인</a:t>
             </a:r>
@@ -18144,6 +18957,9 @@
                 <a:solidFill>
                   <a:srgbClr val="0A0A0A"/>
                 </a:solidFill>
+                <a:latin typeface="Pretendard" pitchFamily="34" charset="0"/>
+                <a:ea typeface="Pretendard" pitchFamily="34" charset="-122"/>
+                <a:cs typeface="Pretendard" pitchFamily="34" charset="-120"/>
               </a:rPr>
               <a:t>정책·의료·산업·기술 자문.</a:t>
             </a:r>
@@ -18203,6 +19019,9 @@
                 <a:solidFill>
                   <a:srgbClr val="0A0A0A"/>
                 </a:solidFill>
+                <a:latin typeface="Pretendard" pitchFamily="34" charset="0"/>
+                <a:ea typeface="Pretendard" pitchFamily="34" charset="-122"/>
+                <a:cs typeface="Pretendard" pitchFamily="34" charset="-120"/>
               </a:rPr>
               <a:t>김○○</a:t>
             </a:r>
@@ -18239,6 +19058,9 @@
                 <a:solidFill>
                   <a:srgbClr val="044E29"/>
                 </a:solidFill>
+                <a:latin typeface="Pretendard" pitchFamily="34" charset="0"/>
+                <a:ea typeface="Pretendard" pitchFamily="34" charset="-122"/>
+                <a:cs typeface="Pretendard" pitchFamily="34" charset="-120"/>
               </a:rPr>
               <a:t>前 보건복지부 차관</a:t>
             </a:r>
@@ -18275,6 +19097,9 @@
                 <a:solidFill>
                   <a:srgbClr val="525252"/>
                 </a:solidFill>
+                <a:latin typeface="Pretendard" pitchFamily="34" charset="0"/>
+                <a:ea typeface="Pretendard" pitchFamily="34" charset="-122"/>
+                <a:cs typeface="Pretendard" pitchFamily="34" charset="-120"/>
               </a:rPr>
               <a:t>노인복지 정책·의료법 자문</a:t>
             </a:r>
@@ -18334,6 +19159,9 @@
                 <a:solidFill>
                   <a:srgbClr val="0A0A0A"/>
                 </a:solidFill>
+                <a:latin typeface="Pretendard" pitchFamily="34" charset="0"/>
+                <a:ea typeface="Pretendard" pitchFamily="34" charset="-122"/>
+                <a:cs typeface="Pretendard" pitchFamily="34" charset="-120"/>
               </a:rPr>
               <a:t>박○○</a:t>
             </a:r>
@@ -18370,6 +19198,9 @@
                 <a:solidFill>
                   <a:srgbClr val="044E29"/>
                 </a:solidFill>
+                <a:latin typeface="Pretendard" pitchFamily="34" charset="0"/>
+                <a:ea typeface="Pretendard" pitchFamily="34" charset="-122"/>
+                <a:cs typeface="Pretendard" pitchFamily="34" charset="-120"/>
               </a:rPr>
               <a:t>서울아산병원 노인의학 교수</a:t>
             </a:r>
@@ -18406,6 +19237,9 @@
                 <a:solidFill>
                   <a:srgbClr val="525252"/>
                 </a:solidFill>
+                <a:latin typeface="Pretendard" pitchFamily="34" charset="0"/>
+                <a:ea typeface="Pretendard" pitchFamily="34" charset="-122"/>
+                <a:cs typeface="Pretendard" pitchFamily="34" charset="-120"/>
               </a:rPr>
               <a:t>임상·의료기기 자문</a:t>
             </a:r>
@@ -18465,6 +19299,9 @@
                 <a:solidFill>
                   <a:srgbClr val="0A0A0A"/>
                 </a:solidFill>
+                <a:latin typeface="Pretendard" pitchFamily="34" charset="0"/>
+                <a:ea typeface="Pretendard" pitchFamily="34" charset="-122"/>
+                <a:cs typeface="Pretendard" pitchFamily="34" charset="-120"/>
               </a:rPr>
               <a:t>정○○</a:t>
             </a:r>
@@ -18501,6 +19338,9 @@
                 <a:solidFill>
                   <a:srgbClr val="044E29"/>
                 </a:solidFill>
+                <a:latin typeface="Pretendard" pitchFamily="34" charset="0"/>
+                <a:ea typeface="Pretendard" pitchFamily="34" charset="-122"/>
+                <a:cs typeface="Pretendard" pitchFamily="34" charset="-120"/>
               </a:rPr>
               <a:t>前 SK텔레콤 헬스케어 본부장</a:t>
             </a:r>
@@ -18537,6 +19377,9 @@
                 <a:solidFill>
                   <a:srgbClr val="525252"/>
                 </a:solidFill>
+                <a:latin typeface="Pretendard" pitchFamily="34" charset="0"/>
+                <a:ea typeface="Pretendard" pitchFamily="34" charset="-122"/>
+                <a:cs typeface="Pretendard" pitchFamily="34" charset="-120"/>
               </a:rPr>
               <a:t>B2B 영업·산업 자문</a:t>
             </a:r>
@@ -18596,6 +19439,9 @@
                 <a:solidFill>
                   <a:srgbClr val="0A0A0A"/>
                 </a:solidFill>
+                <a:latin typeface="Pretendard" pitchFamily="34" charset="0"/>
+                <a:ea typeface="Pretendard" pitchFamily="34" charset="-122"/>
+                <a:cs typeface="Pretendard" pitchFamily="34" charset="-120"/>
               </a:rPr>
               <a:t>최○○</a:t>
             </a:r>
@@ -18632,6 +19478,9 @@
                 <a:solidFill>
                   <a:srgbClr val="044E29"/>
                 </a:solidFill>
+                <a:latin typeface="Pretendard" pitchFamily="34" charset="0"/>
+                <a:ea typeface="Pretendard" pitchFamily="34" charset="-122"/>
+                <a:cs typeface="Pretendard" pitchFamily="34" charset="-120"/>
               </a:rPr>
               <a:t>前 카카오엔터프라이즈 PM Lead</a:t>
             </a:r>
@@ -18668,6 +19517,9 @@
                 <a:solidFill>
                   <a:srgbClr val="525252"/>
                 </a:solidFill>
+                <a:latin typeface="Pretendard" pitchFamily="34" charset="0"/>
+                <a:ea typeface="Pretendard" pitchFamily="34" charset="-122"/>
+                <a:cs typeface="Pretendard" pitchFamily="34" charset="-120"/>
               </a:rPr>
               <a:t>프로덕트·UX 자문</a:t>
             </a:r>
@@ -18727,6 +19579,9 @@
                 <a:solidFill>
                   <a:srgbClr val="0A0A0A"/>
                 </a:solidFill>
+                <a:latin typeface="Cambria" pitchFamily="34" charset="0"/>
+                <a:ea typeface="Cambria" pitchFamily="34" charset="-122"/>
+                <a:cs typeface="Cambria" pitchFamily="34" charset="-120"/>
               </a:rPr>
               <a:t>p. 22 / 30</a:t>
             </a:r>
@@ -18820,6 +19675,9 @@
                 <a:solidFill>
                   <a:srgbClr val="FAFAF9"/>
                 </a:solidFill>
+                <a:latin typeface="Cambria" pitchFamily="34" charset="0"/>
+                <a:ea typeface="Cambria" pitchFamily="34" charset="-122"/>
+                <a:cs typeface="Cambria" pitchFamily="34" charset="-120"/>
               </a:rPr>
               <a:t>예비창업패키지 2026 · 신청서 · T · 팀 구성 — 협력 네트워크</a:t>
             </a:r>
@@ -18881,6 +19739,9 @@
                 <a:solidFill>
                   <a:srgbClr val="B85042"/>
                 </a:solidFill>
+                <a:latin typeface="Pretendard" pitchFamily="34" charset="0"/>
+                <a:ea typeface="Pretendard" pitchFamily="34" charset="-122"/>
+                <a:cs typeface="Pretendard" pitchFamily="34" charset="-120"/>
               </a:rPr>
               <a:t>T-04 / MOU 협력 네트워크</a:t>
             </a:r>
@@ -18917,6 +19778,9 @@
                 <a:solidFill>
                   <a:srgbClr val="0A0A0A"/>
                 </a:solidFill>
+                <a:latin typeface="Pretendard" pitchFamily="34" charset="0"/>
+                <a:ea typeface="Pretendard" pitchFamily="34" charset="-122"/>
+                <a:cs typeface="Pretendard" pitchFamily="34" charset="-120"/>
               </a:rPr>
               <a:t>MOU 7곳, 시범 도입 확정.</a:t>
             </a:r>
@@ -18976,6 +19840,9 @@
                 <a:solidFill>
                   <a:srgbClr val="B85042"/>
                 </a:solidFill>
+                <a:latin typeface="Cambria" pitchFamily="34" charset="0"/>
+                <a:ea typeface="Cambria" pitchFamily="34" charset="-122"/>
+                <a:cs typeface="Cambria" pitchFamily="34" charset="-120"/>
               </a:rPr>
               <a:t>MEDICAL</a:t>
             </a:r>
@@ -19060,6 +19927,9 @@
                 <a:solidFill>
                   <a:srgbClr val="044E29"/>
                 </a:solidFill>
+                <a:latin typeface="Pretendard" pitchFamily="34" charset="0"/>
+                <a:ea typeface="Pretendard" pitchFamily="34" charset="-122"/>
+                <a:cs typeface="Pretendard" pitchFamily="34" charset="-120"/>
               </a:rPr>
               <a:t>✓</a:t>
             </a:r>
@@ -19096,6 +19966,9 @@
                 <a:solidFill>
                   <a:srgbClr val="0A0A0A"/>
                 </a:solidFill>
+                <a:latin typeface="Pretendard" pitchFamily="34" charset="0"/>
+                <a:ea typeface="Pretendard" pitchFamily="34" charset="-122"/>
+                <a:cs typeface="Pretendard" pitchFamily="34" charset="-120"/>
               </a:rPr>
               <a:t>서울대학교병원</a:t>
             </a:r>
@@ -19157,6 +20030,9 @@
                 <a:solidFill>
                   <a:srgbClr val="044E29"/>
                 </a:solidFill>
+                <a:latin typeface="Pretendard" pitchFamily="34" charset="0"/>
+                <a:ea typeface="Pretendard" pitchFamily="34" charset="-122"/>
+                <a:cs typeface="Pretendard" pitchFamily="34" charset="-120"/>
               </a:rPr>
               <a:t>✓</a:t>
             </a:r>
@@ -19193,6 +20069,9 @@
                 <a:solidFill>
                   <a:srgbClr val="0A0A0A"/>
                 </a:solidFill>
+                <a:latin typeface="Pretendard" pitchFamily="34" charset="0"/>
+                <a:ea typeface="Pretendard" pitchFamily="34" charset="-122"/>
+                <a:cs typeface="Pretendard" pitchFamily="34" charset="-120"/>
               </a:rPr>
               <a:t>강남세브란스병원</a:t>
             </a:r>
@@ -19229,6 +20108,9 @@
                 <a:solidFill>
                   <a:srgbClr val="B85042"/>
                 </a:solidFill>
+                <a:latin typeface="Cambria" pitchFamily="34" charset="0"/>
+                <a:ea typeface="Cambria" pitchFamily="34" charset="-122"/>
+                <a:cs typeface="Cambria" pitchFamily="34" charset="-120"/>
               </a:rPr>
               <a:t>PUBLIC</a:t>
             </a:r>
@@ -19313,6 +20195,9 @@
                 <a:solidFill>
                   <a:srgbClr val="044E29"/>
                 </a:solidFill>
+                <a:latin typeface="Pretendard" pitchFamily="34" charset="0"/>
+                <a:ea typeface="Pretendard" pitchFamily="34" charset="-122"/>
+                <a:cs typeface="Pretendard" pitchFamily="34" charset="-120"/>
               </a:rPr>
               <a:t>✓</a:t>
             </a:r>
@@ -19349,6 +20234,9 @@
                 <a:solidFill>
                   <a:srgbClr val="0A0A0A"/>
                 </a:solidFill>
+                <a:latin typeface="Pretendard" pitchFamily="34" charset="0"/>
+                <a:ea typeface="Pretendard" pitchFamily="34" charset="-122"/>
+                <a:cs typeface="Pretendard" pitchFamily="34" charset="-120"/>
               </a:rPr>
               <a:t>서울 강북구 보건소</a:t>
             </a:r>
@@ -19410,6 +20298,9 @@
                 <a:solidFill>
                   <a:srgbClr val="044E29"/>
                 </a:solidFill>
+                <a:latin typeface="Pretendard" pitchFamily="34" charset="0"/>
+                <a:ea typeface="Pretendard" pitchFamily="34" charset="-122"/>
+                <a:cs typeface="Pretendard" pitchFamily="34" charset="-120"/>
               </a:rPr>
               <a:t>✓</a:t>
             </a:r>
@@ -19446,6 +20337,9 @@
                 <a:solidFill>
                   <a:srgbClr val="0A0A0A"/>
                 </a:solidFill>
+                <a:latin typeface="Pretendard" pitchFamily="34" charset="0"/>
+                <a:ea typeface="Pretendard" pitchFamily="34" charset="-122"/>
+                <a:cs typeface="Pretendard" pitchFamily="34" charset="-120"/>
               </a:rPr>
               <a:t>고양 일산 보건소</a:t>
             </a:r>
@@ -19507,6 +20401,9 @@
                 <a:solidFill>
                   <a:srgbClr val="044E29"/>
                 </a:solidFill>
+                <a:latin typeface="Pretendard" pitchFamily="34" charset="0"/>
+                <a:ea typeface="Pretendard" pitchFamily="34" charset="-122"/>
+                <a:cs typeface="Pretendard" pitchFamily="34" charset="-120"/>
               </a:rPr>
               <a:t>✓</a:t>
             </a:r>
@@ -19543,6 +20440,9 @@
                 <a:solidFill>
                   <a:srgbClr val="0A0A0A"/>
                 </a:solidFill>
+                <a:latin typeface="Pretendard" pitchFamily="34" charset="0"/>
+                <a:ea typeface="Pretendard" pitchFamily="34" charset="-122"/>
+                <a:cs typeface="Pretendard" pitchFamily="34" charset="-120"/>
               </a:rPr>
               <a:t>용산구 노인복지관</a:t>
             </a:r>
@@ -19579,6 +20479,9 @@
                 <a:solidFill>
                   <a:srgbClr val="B85042"/>
                 </a:solidFill>
+                <a:latin typeface="Cambria" pitchFamily="34" charset="0"/>
+                <a:ea typeface="Cambria" pitchFamily="34" charset="-122"/>
+                <a:cs typeface="Cambria" pitchFamily="34" charset="-120"/>
               </a:rPr>
               <a:t>INDUSTRY</a:t>
             </a:r>
@@ -19663,6 +20566,9 @@
                 <a:solidFill>
                   <a:srgbClr val="044E29"/>
                 </a:solidFill>
+                <a:latin typeface="Pretendard" pitchFamily="34" charset="0"/>
+                <a:ea typeface="Pretendard" pitchFamily="34" charset="-122"/>
+                <a:cs typeface="Pretendard" pitchFamily="34" charset="-120"/>
               </a:rPr>
               <a:t>✓</a:t>
             </a:r>
@@ -19699,6 +20605,9 @@
                 <a:solidFill>
                   <a:srgbClr val="0A0A0A"/>
                 </a:solidFill>
+                <a:latin typeface="Pretendard" pitchFamily="34" charset="0"/>
+                <a:ea typeface="Pretendard" pitchFamily="34" charset="-122"/>
+                <a:cs typeface="Pretendard" pitchFamily="34" charset="-120"/>
               </a:rPr>
               <a:t>대한노인의학회</a:t>
             </a:r>
@@ -19760,6 +20669,9 @@
                 <a:solidFill>
                   <a:srgbClr val="044E29"/>
                 </a:solidFill>
+                <a:latin typeface="Pretendard" pitchFamily="34" charset="0"/>
+                <a:ea typeface="Pretendard" pitchFamily="34" charset="-122"/>
+                <a:cs typeface="Pretendard" pitchFamily="34" charset="-120"/>
               </a:rPr>
               <a:t>✓</a:t>
             </a:r>
@@ -19796,6 +20708,9 @@
                 <a:solidFill>
                   <a:srgbClr val="0A0A0A"/>
                 </a:solidFill>
+                <a:latin typeface="Pretendard" pitchFamily="34" charset="0"/>
+                <a:ea typeface="Pretendard" pitchFamily="34" charset="-122"/>
+                <a:cs typeface="Pretendard" pitchFamily="34" charset="-120"/>
               </a:rPr>
               <a:t>한국요양보호사협회</a:t>
             </a:r>
@@ -19832,6 +20747,9 @@
                 <a:solidFill>
                   <a:srgbClr val="525252"/>
                 </a:solidFill>
+                <a:latin typeface="Pretendard" pitchFamily="34" charset="0"/>
+                <a:ea typeface="Pretendard" pitchFamily="34" charset="-122"/>
+                <a:cs typeface="Pretendard" pitchFamily="34" charset="-120"/>
               </a:rPr>
               <a:t>MOU 증빙: 부록 첨부</a:t>
             </a:r>
@@ -19868,6 +20786,9 @@
                 <a:solidFill>
                   <a:srgbClr val="0A0A0A"/>
                 </a:solidFill>
+                <a:latin typeface="Cambria" pitchFamily="34" charset="0"/>
+                <a:ea typeface="Cambria" pitchFamily="34" charset="-122"/>
+                <a:cs typeface="Cambria" pitchFamily="34" charset="-120"/>
               </a:rPr>
               <a:t>p. 23 / 30</a:t>
             </a:r>
@@ -19961,6 +20882,9 @@
                 <a:solidFill>
                   <a:srgbClr val="FAFAF9"/>
                 </a:solidFill>
+                <a:latin typeface="Cambria" pitchFamily="34" charset="0"/>
+                <a:ea typeface="Cambria" pitchFamily="34" charset="-122"/>
+                <a:cs typeface="Cambria" pitchFamily="34" charset="-120"/>
               </a:rPr>
               <a:t>예비창업패키지 2026 · 신청서 · T · 팀 구성 — 멘토링 활용 계획</a:t>
             </a:r>
@@ -20022,6 +20946,9 @@
                 <a:solidFill>
                   <a:srgbClr val="B85042"/>
                 </a:solidFill>
+                <a:latin typeface="Pretendard" pitchFamily="34" charset="0"/>
+                <a:ea typeface="Pretendard" pitchFamily="34" charset="-122"/>
+                <a:cs typeface="Pretendard" pitchFamily="34" charset="-120"/>
               </a:rPr>
               <a:t>T-05 / K-Startup 멘토링 활용</a:t>
             </a:r>
@@ -20058,6 +20985,9 @@
                 <a:solidFill>
                   <a:srgbClr val="0A0A0A"/>
                 </a:solidFill>
+                <a:latin typeface="Pretendard" pitchFamily="34" charset="0"/>
+                <a:ea typeface="Pretendard" pitchFamily="34" charset="-122"/>
+                <a:cs typeface="Pretendard" pitchFamily="34" charset="-120"/>
               </a:rPr>
               <a:t>3-Phase 멘토링 활용.</a:t>
             </a:r>
@@ -20142,6 +21072,9 @@
                 <a:solidFill>
                   <a:srgbClr val="E7B5A8"/>
                 </a:solidFill>
+                <a:latin typeface="Cambria" pitchFamily="34" charset="0"/>
+                <a:ea typeface="Cambria" pitchFamily="34" charset="-122"/>
+                <a:cs typeface="Cambria" pitchFamily="34" charset="-120"/>
               </a:rPr>
               <a:t>Phase 1</a:t>
             </a:r>
@@ -20181,6 +21114,9 @@
                 <a:solidFill>
                   <a:srgbClr val="FAFAF9"/>
                 </a:solidFill>
+                <a:latin typeface="Pretendard" pitchFamily="34" charset="0"/>
+                <a:ea typeface="Pretendard" pitchFamily="34" charset="-122"/>
+                <a:cs typeface="Pretendard" pitchFamily="34" charset="-120"/>
               </a:rPr>
               <a:t>K-Startup 공식 멘토링</a:t>
             </a:r>
@@ -20243,6 +21179,9 @@
                 <a:solidFill>
                   <a:srgbClr val="F5EFE0"/>
                 </a:solidFill>
+                <a:latin typeface="Pretendard" pitchFamily="34" charset="0"/>
+                <a:ea typeface="Pretendard" pitchFamily="34" charset="-122"/>
+                <a:cs typeface="Pretendard" pitchFamily="34" charset="-120"/>
               </a:rPr>
               <a:t>1년 12회 정기 멘토링</a:t>
             </a:r>
@@ -20260,6 +21199,9 @@
                 <a:solidFill>
                   <a:srgbClr val="F5EFE0"/>
                 </a:solidFill>
+                <a:latin typeface="Pretendard" pitchFamily="34" charset="0"/>
+                <a:ea typeface="Pretendard" pitchFamily="34" charset="-122"/>
+                <a:cs typeface="Pretendard" pitchFamily="34" charset="-120"/>
               </a:rPr>
               <a:t>사업 추진 점검·전략 수정</a:t>
             </a:r>
@@ -20321,6 +21263,9 @@
                 <a:solidFill>
                   <a:srgbClr val="B85042"/>
                 </a:solidFill>
+                <a:latin typeface="Cambria" pitchFamily="34" charset="0"/>
+                <a:ea typeface="Cambria" pitchFamily="34" charset="-122"/>
+                <a:cs typeface="Cambria" pitchFamily="34" charset="-120"/>
               </a:rPr>
               <a:t>Phase 2</a:t>
             </a:r>
@@ -20360,6 +21305,9 @@
                 <a:solidFill>
                   <a:srgbClr val="0A0A0A"/>
                 </a:solidFill>
+                <a:latin typeface="Pretendard" pitchFamily="34" charset="0"/>
+                <a:ea typeface="Pretendard" pitchFamily="34" charset="-122"/>
+                <a:cs typeface="Pretendard" pitchFamily="34" charset="-120"/>
               </a:rPr>
               <a:t>의료·법무 자문</a:t>
             </a:r>
@@ -20422,6 +21370,9 @@
                 <a:solidFill>
                   <a:srgbClr val="525252"/>
                 </a:solidFill>
+                <a:latin typeface="Pretendard" pitchFamily="34" charset="0"/>
+                <a:ea typeface="Pretendard" pitchFamily="34" charset="-122"/>
+                <a:cs typeface="Pretendard" pitchFamily="34" charset="-120"/>
               </a:rPr>
               <a:t>자문단 의료법·개인정보</a:t>
             </a:r>
@@ -20439,6 +21390,9 @@
                 <a:solidFill>
                   <a:srgbClr val="525252"/>
                 </a:solidFill>
+                <a:latin typeface="Pretendard" pitchFamily="34" charset="0"/>
+                <a:ea typeface="Pretendard" pitchFamily="34" charset="-122"/>
+                <a:cs typeface="Pretendard" pitchFamily="34" charset="-120"/>
               </a:rPr>
               <a:t>ISMS-P 인증 컨설팅</a:t>
             </a:r>
@@ -20500,6 +21454,9 @@
                 <a:solidFill>
                   <a:srgbClr val="B85042"/>
                 </a:solidFill>
+                <a:latin typeface="Cambria" pitchFamily="34" charset="0"/>
+                <a:ea typeface="Cambria" pitchFamily="34" charset="-122"/>
+                <a:cs typeface="Cambria" pitchFamily="34" charset="-120"/>
               </a:rPr>
               <a:t>Phase 3</a:t>
             </a:r>
@@ -20539,6 +21496,9 @@
                 <a:solidFill>
                   <a:srgbClr val="0A0A0A"/>
                 </a:solidFill>
+                <a:latin typeface="Pretendard" pitchFamily="34" charset="0"/>
+                <a:ea typeface="Pretendard" pitchFamily="34" charset="-122"/>
+                <a:cs typeface="Pretendard" pitchFamily="34" charset="-120"/>
               </a:rPr>
               <a:t>마케팅·고객 자문</a:t>
             </a:r>
@@ -20601,6 +21561,9 @@
                 <a:solidFill>
                   <a:srgbClr val="525252"/>
                 </a:solidFill>
+                <a:latin typeface="Pretendard" pitchFamily="34" charset="0"/>
+                <a:ea typeface="Pretendard" pitchFamily="34" charset="-122"/>
+                <a:cs typeface="Pretendard" pitchFamily="34" charset="-120"/>
               </a:rPr>
               <a:t>자녀 타겟 카톡 광고</a:t>
             </a:r>
@@ -20618,6 +21581,9 @@
                 <a:solidFill>
                   <a:srgbClr val="525252"/>
                 </a:solidFill>
+                <a:latin typeface="Pretendard" pitchFamily="34" charset="0"/>
+                <a:ea typeface="Pretendard" pitchFamily="34" charset="-122"/>
+                <a:cs typeface="Pretendard" pitchFamily="34" charset="-120"/>
               </a:rPr>
               <a:t>인플루언서 협업</a:t>
             </a:r>
@@ -20654,6 +21620,9 @@
                 <a:solidFill>
                   <a:srgbClr val="0A0A0A"/>
                 </a:solidFill>
+                <a:latin typeface="Cambria" pitchFamily="34" charset="0"/>
+                <a:ea typeface="Cambria" pitchFamily="34" charset="-122"/>
+                <a:cs typeface="Cambria" pitchFamily="34" charset="-120"/>
               </a:rPr>
               <a:t>p. 24 / 30</a:t>
             </a:r>
@@ -20747,6 +21716,9 @@
                 <a:solidFill>
                   <a:srgbClr val="FAFAF9"/>
                 </a:solidFill>
+                <a:latin typeface="Cambria" pitchFamily="34" charset="0"/>
+                <a:ea typeface="Cambria" pitchFamily="34" charset="-122"/>
+                <a:cs typeface="Cambria" pitchFamily="34" charset="-120"/>
               </a:rPr>
               <a:t>예비창업패키지 2026 · 신청서 · + · 위험 관리</a:t>
             </a:r>
@@ -20808,6 +21780,9 @@
                 <a:solidFill>
                   <a:srgbClr val="B85042"/>
                 </a:solidFill>
+                <a:latin typeface="Pretendard" pitchFamily="34" charset="0"/>
+                <a:ea typeface="Pretendard" pitchFamily="34" charset="-122"/>
+                <a:cs typeface="Pretendard" pitchFamily="34" charset="-120"/>
               </a:rPr>
               <a:t>RISK MANAGEMENT (필수)</a:t>
             </a:r>
@@ -20844,6 +21819,9 @@
                 <a:solidFill>
                   <a:srgbClr val="0A0A0A"/>
                 </a:solidFill>
+                <a:latin typeface="Pretendard" pitchFamily="34" charset="0"/>
+                <a:ea typeface="Pretendard" pitchFamily="34" charset="-122"/>
+                <a:cs typeface="Pretendard" pitchFamily="34" charset="-120"/>
               </a:rPr>
               <a:t>5대 위험 요인·대응 방안.</a:t>
             </a:r>
@@ -20928,6 +21906,9 @@
                 <a:solidFill>
                   <a:srgbClr val="FAFAF9"/>
                 </a:solidFill>
+                <a:latin typeface="Pretendard" pitchFamily="34" charset="0"/>
+                <a:ea typeface="Pretendard" pitchFamily="34" charset="-122"/>
+                <a:cs typeface="Pretendard" pitchFamily="34" charset="-120"/>
               </a:rPr>
               <a:t>위험 요인</a:t>
             </a:r>
@@ -20989,6 +21970,9 @@
                 <a:solidFill>
                   <a:srgbClr val="FAFAF9"/>
                 </a:solidFill>
+                <a:latin typeface="Pretendard" pitchFamily="34" charset="0"/>
+                <a:ea typeface="Pretendard" pitchFamily="34" charset="-122"/>
+                <a:cs typeface="Pretendard" pitchFamily="34" charset="-120"/>
               </a:rPr>
               <a:t>발생 가능성</a:t>
             </a:r>
@@ -21050,6 +22034,9 @@
                 <a:solidFill>
                   <a:srgbClr val="FAFAF9"/>
                 </a:solidFill>
+                <a:latin typeface="Pretendard" pitchFamily="34" charset="0"/>
+                <a:ea typeface="Pretendard" pitchFamily="34" charset="-122"/>
+                <a:cs typeface="Pretendard" pitchFamily="34" charset="-120"/>
               </a:rPr>
               <a:t>영향도</a:t>
             </a:r>
@@ -21111,6 +22098,9 @@
                 <a:solidFill>
                   <a:srgbClr val="FAFAF9"/>
                 </a:solidFill>
+                <a:latin typeface="Pretendard" pitchFamily="34" charset="0"/>
+                <a:ea typeface="Pretendard" pitchFamily="34" charset="-122"/>
+                <a:cs typeface="Pretendard" pitchFamily="34" charset="-120"/>
               </a:rPr>
               <a:t>대응 방안</a:t>
             </a:r>
@@ -21172,6 +22162,9 @@
                 <a:solidFill>
                   <a:srgbClr val="0A0A0A"/>
                 </a:solidFill>
+                <a:latin typeface="Pretendard" pitchFamily="34" charset="0"/>
+                <a:ea typeface="Pretendard" pitchFamily="34" charset="-122"/>
+                <a:cs typeface="Pretendard" pitchFamily="34" charset="-120"/>
               </a:rPr>
               <a:t>의료법·개인정보법 변경</a:t>
             </a:r>
@@ -21233,6 +22226,9 @@
                 <a:solidFill>
                   <a:srgbClr val="C8A047"/>
                 </a:solidFill>
+                <a:latin typeface="Cambria" pitchFamily="34" charset="0"/>
+                <a:ea typeface="Cambria" pitchFamily="34" charset="-122"/>
+                <a:cs typeface="Cambria" pitchFamily="34" charset="-120"/>
               </a:rPr>
               <a:t>中</a:t>
             </a:r>
@@ -21294,6 +22290,9 @@
                 <a:solidFill>
                   <a:srgbClr val="B85042"/>
                 </a:solidFill>
+                <a:latin typeface="Cambria" pitchFamily="34" charset="0"/>
+                <a:ea typeface="Cambria" pitchFamily="34" charset="-122"/>
+                <a:cs typeface="Cambria" pitchFamily="34" charset="-120"/>
               </a:rPr>
               <a:t>高</a:t>
             </a:r>
@@ -21355,6 +22354,9 @@
                 <a:solidFill>
                   <a:srgbClr val="0A0A0A"/>
                 </a:solidFill>
+                <a:latin typeface="Pretendard" pitchFamily="34" charset="0"/>
+                <a:ea typeface="Pretendard" pitchFamily="34" charset="-122"/>
+                <a:cs typeface="Pretendard" pitchFamily="34" charset="-120"/>
               </a:rPr>
               <a:t>자문단 + ISMS-P 사전 대응</a:t>
             </a:r>
@@ -21416,6 +22418,9 @@
                 <a:solidFill>
                   <a:srgbClr val="0A0A0A"/>
                 </a:solidFill>
+                <a:latin typeface="Pretendard" pitchFamily="34" charset="0"/>
+                <a:ea typeface="Pretendard" pitchFamily="34" charset="-122"/>
+                <a:cs typeface="Pretendard" pitchFamily="34" charset="-120"/>
               </a:rPr>
               <a:t>시니어 디지털 격차</a:t>
             </a:r>
@@ -21477,6 +22482,9 @@
                 <a:solidFill>
                   <a:srgbClr val="B85042"/>
                 </a:solidFill>
+                <a:latin typeface="Cambria" pitchFamily="34" charset="0"/>
+                <a:ea typeface="Cambria" pitchFamily="34" charset="-122"/>
+                <a:cs typeface="Cambria" pitchFamily="34" charset="-120"/>
               </a:rPr>
               <a:t>高</a:t>
             </a:r>
@@ -21538,6 +22546,9 @@
                 <a:solidFill>
                   <a:srgbClr val="C8A047"/>
                 </a:solidFill>
+                <a:latin typeface="Cambria" pitchFamily="34" charset="0"/>
+                <a:ea typeface="Cambria" pitchFamily="34" charset="-122"/>
+                <a:cs typeface="Cambria" pitchFamily="34" charset="-120"/>
               </a:rPr>
               <a:t>中</a:t>
             </a:r>
@@ -21599,6 +22610,9 @@
                 <a:solidFill>
                   <a:srgbClr val="0A0A0A"/>
                 </a:solidFill>
+                <a:latin typeface="Pretendard" pitchFamily="34" charset="0"/>
+                <a:ea typeface="Pretendard" pitchFamily="34" charset="-122"/>
+                <a:cs typeface="Pretendard" pitchFamily="34" charset="-120"/>
               </a:rPr>
               <a:t>자녀 등록 구조 + 보건소 대면 교육</a:t>
             </a:r>
@@ -21660,6 +22674,9 @@
                 <a:solidFill>
                   <a:srgbClr val="0A0A0A"/>
                 </a:solidFill>
+                <a:latin typeface="Pretendard" pitchFamily="34" charset="0"/>
+                <a:ea typeface="Pretendard" pitchFamily="34" charset="-122"/>
+                <a:cs typeface="Pretendard" pitchFamily="34" charset="-120"/>
               </a:rPr>
               <a:t>대형 IT 기업 진입</a:t>
             </a:r>
@@ -21721,6 +22738,9 @@
                 <a:solidFill>
                   <a:srgbClr val="C8A047"/>
                 </a:solidFill>
+                <a:latin typeface="Cambria" pitchFamily="34" charset="0"/>
+                <a:ea typeface="Cambria" pitchFamily="34" charset="-122"/>
+                <a:cs typeface="Cambria" pitchFamily="34" charset="-120"/>
               </a:rPr>
               <a:t>中</a:t>
             </a:r>
@@ -21782,6 +22802,9 @@
                 <a:solidFill>
                   <a:srgbClr val="B85042"/>
                 </a:solidFill>
+                <a:latin typeface="Cambria" pitchFamily="34" charset="0"/>
+                <a:ea typeface="Cambria" pitchFamily="34" charset="-122"/>
+                <a:cs typeface="Cambria" pitchFamily="34" charset="-120"/>
               </a:rPr>
               <a:t>高</a:t>
             </a:r>
@@ -21843,6 +22866,9 @@
                 <a:solidFill>
                   <a:srgbClr val="0A0A0A"/>
                 </a:solidFill>
+                <a:latin typeface="Pretendard" pitchFamily="34" charset="0"/>
+                <a:ea typeface="Pretendard" pitchFamily="34" charset="-122"/>
+                <a:cs typeface="Pretendard" pitchFamily="34" charset="-120"/>
               </a:rPr>
               <a:t>시설 네트워크·의료 신뢰 선점</a:t>
             </a:r>
@@ -21904,6 +22930,9 @@
                 <a:solidFill>
                   <a:srgbClr val="0A0A0A"/>
                 </a:solidFill>
+                <a:latin typeface="Pretendard" pitchFamily="34" charset="0"/>
+                <a:ea typeface="Pretendard" pitchFamily="34" charset="-122"/>
+                <a:cs typeface="Pretendard" pitchFamily="34" charset="-120"/>
               </a:rPr>
               <a:t>AI 오작동·오신고</a:t>
             </a:r>
@@ -21965,6 +22994,9 @@
                 <a:solidFill>
                   <a:srgbClr val="044E29"/>
                 </a:solidFill>
+                <a:latin typeface="Cambria" pitchFamily="34" charset="0"/>
+                <a:ea typeface="Cambria" pitchFamily="34" charset="-122"/>
+                <a:cs typeface="Cambria" pitchFamily="34" charset="-120"/>
               </a:rPr>
               <a:t>低</a:t>
             </a:r>
@@ -22026,6 +23058,9 @@
                 <a:solidFill>
                   <a:srgbClr val="B85042"/>
                 </a:solidFill>
+                <a:latin typeface="Cambria" pitchFamily="34" charset="0"/>
+                <a:ea typeface="Cambria" pitchFamily="34" charset="-122"/>
+                <a:cs typeface="Cambria" pitchFamily="34" charset="-120"/>
               </a:rPr>
               <a:t>高</a:t>
             </a:r>
@@ -22087,6 +23122,9 @@
                 <a:solidFill>
                   <a:srgbClr val="0A0A0A"/>
                 </a:solidFill>
+                <a:latin typeface="Pretendard" pitchFamily="34" charset="0"/>
+                <a:ea typeface="Pretendard" pitchFamily="34" charset="-122"/>
+                <a:cs typeface="Pretendard" pitchFamily="34" charset="-120"/>
               </a:rPr>
               <a:t>24/7 콜센터 검증 + 페널티 시스템</a:t>
             </a:r>
@@ -22148,6 +23186,9 @@
                 <a:solidFill>
                   <a:srgbClr val="0A0A0A"/>
                 </a:solidFill>
+                <a:latin typeface="Pretendard" pitchFamily="34" charset="0"/>
+                <a:ea typeface="Pretendard" pitchFamily="34" charset="-122"/>
+                <a:cs typeface="Pretendard" pitchFamily="34" charset="-120"/>
               </a:rPr>
               <a:t>운영비 초과</a:t>
             </a:r>
@@ -22209,6 +23250,9 @@
                 <a:solidFill>
                   <a:srgbClr val="C8A047"/>
                 </a:solidFill>
+                <a:latin typeface="Cambria" pitchFamily="34" charset="0"/>
+                <a:ea typeface="Cambria" pitchFamily="34" charset="-122"/>
+                <a:cs typeface="Cambria" pitchFamily="34" charset="-120"/>
               </a:rPr>
               <a:t>中</a:t>
             </a:r>
@@ -22270,6 +23314,9 @@
                 <a:solidFill>
                   <a:srgbClr val="C8A047"/>
                 </a:solidFill>
+                <a:latin typeface="Cambria" pitchFamily="34" charset="0"/>
+                <a:ea typeface="Cambria" pitchFamily="34" charset="-122"/>
+                <a:cs typeface="Cambria" pitchFamily="34" charset="-120"/>
               </a:rPr>
               <a:t>中</a:t>
             </a:r>
@@ -22331,6 +23378,9 @@
                 <a:solidFill>
                   <a:srgbClr val="0A0A0A"/>
                 </a:solidFill>
+                <a:latin typeface="Pretendard" pitchFamily="34" charset="0"/>
+                <a:ea typeface="Pretendard" pitchFamily="34" charset="-122"/>
+                <a:cs typeface="Pretendard" pitchFamily="34" charset="-120"/>
               </a:rPr>
               <a:t>외주 25% 제한 + 분기별 검토</a:t>
             </a:r>
@@ -22367,6 +23417,9 @@
                 <a:solidFill>
                   <a:srgbClr val="0A0A0A"/>
                 </a:solidFill>
+                <a:latin typeface="Cambria" pitchFamily="34" charset="0"/>
+                <a:ea typeface="Cambria" pitchFamily="34" charset="-122"/>
+                <a:cs typeface="Cambria" pitchFamily="34" charset="-120"/>
               </a:rPr>
               <a:t>p. 25 / 30</a:t>
             </a:r>
@@ -22460,6 +23513,9 @@
                 <a:solidFill>
                   <a:srgbClr val="FAFAF9"/>
                 </a:solidFill>
+                <a:latin typeface="Cambria" pitchFamily="34" charset="0"/>
+                <a:ea typeface="Cambria" pitchFamily="34" charset="-122"/>
+                <a:cs typeface="Cambria" pitchFamily="34" charset="-120"/>
               </a:rPr>
               <a:t>예비창업패키지 2026 · 신청서 · + · 지속가능성</a:t>
             </a:r>
@@ -22521,6 +23577,9 @@
                 <a:solidFill>
                   <a:srgbClr val="B85042"/>
                 </a:solidFill>
+                <a:latin typeface="Pretendard" pitchFamily="34" charset="0"/>
+                <a:ea typeface="Pretendard" pitchFamily="34" charset="-122"/>
+                <a:cs typeface="Pretendard" pitchFamily="34" charset="-120"/>
               </a:rPr>
               <a:t>SUSTAINABILITY · 자립 가능성</a:t>
             </a:r>
@@ -22557,6 +23616,9 @@
                 <a:solidFill>
                   <a:srgbClr val="0A0A0A"/>
                 </a:solidFill>
+                <a:latin typeface="Pretendard" pitchFamily="34" charset="0"/>
+                <a:ea typeface="Pretendard" pitchFamily="34" charset="-122"/>
+                <a:cs typeface="Pretendard" pitchFamily="34" charset="-120"/>
               </a:rPr>
               <a:t>손익분기 1년 9개월.</a:t>
             </a:r>
@@ -22593,6 +23655,9 @@
                 <a:solidFill>
                   <a:srgbClr val="B85042"/>
                 </a:solidFill>
+                <a:latin typeface="Pretendard" pitchFamily="34" charset="0"/>
+                <a:ea typeface="Pretendard" pitchFamily="34" charset="-122"/>
+                <a:cs typeface="Pretendard" pitchFamily="34" charset="-120"/>
               </a:rPr>
               <a:t>지원 종료 후 자립 가능. 시리즈 시드 라운드도 동시 준비.</a:t>
             </a:r>
@@ -22668,6 +23733,9 @@
                 <a:solidFill>
                   <a:srgbClr val="B85042"/>
                 </a:solidFill>
+                <a:latin typeface="Pretendard" pitchFamily="34" charset="0"/>
+                <a:ea typeface="Pretendard" pitchFamily="34" charset="-122"/>
+                <a:cs typeface="Pretendard" pitchFamily="34" charset="-120"/>
               </a:rPr>
               <a:t>✦ 21개월 시점 손익분기 도달 / 24개월 누적 9천만원 흑자</a:t>
             </a:r>
@@ -22704,6 +23772,9 @@
                 <a:solidFill>
                   <a:srgbClr val="0A0A0A"/>
                 </a:solidFill>
+                <a:latin typeface="Cambria" pitchFamily="34" charset="0"/>
+                <a:ea typeface="Cambria" pitchFamily="34" charset="-122"/>
+                <a:cs typeface="Cambria" pitchFamily="34" charset="-120"/>
               </a:rPr>
               <a:t>p. 26 / 30</a:t>
             </a:r>
@@ -22797,6 +23868,9 @@
                 <a:solidFill>
                   <a:srgbClr val="FAFAF9"/>
                 </a:solidFill>
+                <a:latin typeface="Cambria" pitchFamily="34" charset="0"/>
+                <a:ea typeface="Cambria" pitchFamily="34" charset="-122"/>
+                <a:cs typeface="Cambria" pitchFamily="34" charset="-120"/>
               </a:rPr>
               <a:t>예비창업패키지 2026 · 신청서 · + · 기대 효과</a:t>
             </a:r>
@@ -22858,6 +23932,9 @@
                 <a:solidFill>
                   <a:srgbClr val="B85042"/>
                 </a:solidFill>
+                <a:latin typeface="Pretendard" pitchFamily="34" charset="0"/>
+                <a:ea typeface="Pretendard" pitchFamily="34" charset="-122"/>
+                <a:cs typeface="Pretendard" pitchFamily="34" charset="-120"/>
               </a:rPr>
               <a:t>EXPECTED IMPACT (정량+정성)</a:t>
             </a:r>
@@ -22894,6 +23971,9 @@
                 <a:solidFill>
                   <a:srgbClr val="0A0A0A"/>
                 </a:solidFill>
+                <a:latin typeface="Pretendard" pitchFamily="34" charset="0"/>
+                <a:ea typeface="Pretendard" pitchFamily="34" charset="-122"/>
+                <a:cs typeface="Pretendard" pitchFamily="34" charset="-120"/>
               </a:rPr>
               <a:t>정량 + 정성 통합 효과.</a:t>
             </a:r>
@@ -22953,6 +24033,9 @@
                 <a:solidFill>
                   <a:srgbClr val="B85042"/>
                 </a:solidFill>
+                <a:latin typeface="Cambria" pitchFamily="34" charset="0"/>
+                <a:ea typeface="Cambria" pitchFamily="34" charset="-122"/>
+                <a:cs typeface="Cambria" pitchFamily="34" charset="-120"/>
               </a:rPr>
               <a:t>QUANTITATIVE</a:t>
             </a:r>
@@ -23012,6 +24095,9 @@
                 <a:solidFill>
                   <a:srgbClr val="044E29"/>
                 </a:solidFill>
+                <a:latin typeface="Cambria" pitchFamily="34" charset="0"/>
+                <a:ea typeface="Cambria" pitchFamily="34" charset="-122"/>
+                <a:cs typeface="Cambria" pitchFamily="34" charset="-120"/>
               </a:rPr>
               <a:t>+₩35억</a:t>
             </a:r>
@@ -23048,6 +24134,9 @@
                 <a:solidFill>
                   <a:srgbClr val="525252"/>
                 </a:solidFill>
+                <a:latin typeface="Pretendard" pitchFamily="34" charset="0"/>
+                <a:ea typeface="Pretendard" pitchFamily="34" charset="-122"/>
+                <a:cs typeface="Pretendard" pitchFamily="34" charset="-120"/>
               </a:rPr>
               <a:t>3년 매출</a:t>
             </a:r>
@@ -23084,6 +24173,9 @@
                 <a:solidFill>
                   <a:srgbClr val="044E29"/>
                 </a:solidFill>
+                <a:latin typeface="Cambria" pitchFamily="34" charset="0"/>
+                <a:ea typeface="Cambria" pitchFamily="34" charset="-122"/>
+                <a:cs typeface="Cambria" pitchFamily="34" charset="-120"/>
               </a:rPr>
               <a:t>+20명</a:t>
             </a:r>
@@ -23120,6 +24212,9 @@
                 <a:solidFill>
                   <a:srgbClr val="525252"/>
                 </a:solidFill>
+                <a:latin typeface="Pretendard" pitchFamily="34" charset="0"/>
+                <a:ea typeface="Pretendard" pitchFamily="34" charset="-122"/>
+                <a:cs typeface="Pretendard" pitchFamily="34" charset="-120"/>
               </a:rPr>
               <a:t>신규 일자리</a:t>
             </a:r>
@@ -23156,6 +24251,9 @@
                 <a:solidFill>
                   <a:srgbClr val="044E29"/>
                 </a:solidFill>
+                <a:latin typeface="Cambria" pitchFamily="34" charset="0"/>
+                <a:ea typeface="Cambria" pitchFamily="34" charset="-122"/>
+                <a:cs typeface="Cambria" pitchFamily="34" charset="-120"/>
               </a:rPr>
               <a:t>+10만 명</a:t>
             </a:r>
@@ -23192,6 +24290,9 @@
                 <a:solidFill>
                   <a:srgbClr val="525252"/>
                 </a:solidFill>
+                <a:latin typeface="Pretendard" pitchFamily="34" charset="0"/>
+                <a:ea typeface="Pretendard" pitchFamily="34" charset="-122"/>
+                <a:cs typeface="Pretendard" pitchFamily="34" charset="-120"/>
               </a:rPr>
               <a:t>수혜 보호자</a:t>
             </a:r>
@@ -23228,6 +24329,9 @@
                 <a:solidFill>
                   <a:srgbClr val="044E29"/>
                 </a:solidFill>
+                <a:latin typeface="Cambria" pitchFamily="34" charset="0"/>
+                <a:ea typeface="Cambria" pitchFamily="34" charset="-122"/>
+                <a:cs typeface="Cambria" pitchFamily="34" charset="-120"/>
               </a:rPr>
               <a:t>+₩300억</a:t>
             </a:r>
@@ -23264,6 +24368,9 @@
                 <a:solidFill>
                   <a:srgbClr val="525252"/>
                 </a:solidFill>
+                <a:latin typeface="Pretendard" pitchFamily="34" charset="0"/>
+                <a:ea typeface="Pretendard" pitchFamily="34" charset="-122"/>
+                <a:cs typeface="Pretendard" pitchFamily="34" charset="-120"/>
               </a:rPr>
               <a:t>사회적 의료비 절감</a:t>
             </a:r>
@@ -23300,6 +24407,9 @@
                 <a:solidFill>
                   <a:srgbClr val="B85042"/>
                 </a:solidFill>
+                <a:latin typeface="Cambria" pitchFamily="34" charset="0"/>
+                <a:ea typeface="Cambria" pitchFamily="34" charset="-122"/>
+                <a:cs typeface="Cambria" pitchFamily="34" charset="-120"/>
               </a:rPr>
               <a:t>QUALITATIVE</a:t>
             </a:r>
@@ -23359,6 +24469,9 @@
                 <a:solidFill>
                   <a:srgbClr val="B85042"/>
                 </a:solidFill>
+                <a:latin typeface="Pretendard" pitchFamily="34" charset="0"/>
+                <a:ea typeface="Pretendard" pitchFamily="34" charset="-122"/>
+                <a:cs typeface="Pretendard" pitchFamily="34" charset="-120"/>
               </a:rPr>
               <a:t>✦</a:t>
             </a:r>
@@ -23395,6 +24508,9 @@
                 <a:solidFill>
                   <a:srgbClr val="0A0A0A"/>
                 </a:solidFill>
+                <a:latin typeface="Pretendard" pitchFamily="34" charset="0"/>
+                <a:ea typeface="Pretendard" pitchFamily="34" charset="-122"/>
+                <a:cs typeface="Pretendard" pitchFamily="34" charset="-120"/>
               </a:rPr>
               <a:t>독거 노인 안전망 확장</a:t>
             </a:r>
@@ -23431,6 +24547,9 @@
                 <a:solidFill>
                   <a:srgbClr val="B85042"/>
                 </a:solidFill>
+                <a:latin typeface="Pretendard" pitchFamily="34" charset="0"/>
+                <a:ea typeface="Pretendard" pitchFamily="34" charset="-122"/>
+                <a:cs typeface="Pretendard" pitchFamily="34" charset="-120"/>
               </a:rPr>
               <a:t>✦</a:t>
             </a:r>
@@ -23467,6 +24586,9 @@
                 <a:solidFill>
                   <a:srgbClr val="0A0A0A"/>
                 </a:solidFill>
+                <a:latin typeface="Pretendard" pitchFamily="34" charset="0"/>
+                <a:ea typeface="Pretendard" pitchFamily="34" charset="-122"/>
+                <a:cs typeface="Pretendard" pitchFamily="34" charset="-120"/>
               </a:rPr>
               <a:t>자녀 세대 정신적 부담 완화</a:t>
             </a:r>
@@ -23503,6 +24625,9 @@
                 <a:solidFill>
                   <a:srgbClr val="B85042"/>
                 </a:solidFill>
+                <a:latin typeface="Pretendard" pitchFamily="34" charset="0"/>
+                <a:ea typeface="Pretendard" pitchFamily="34" charset="-122"/>
+                <a:cs typeface="Pretendard" pitchFamily="34" charset="-120"/>
               </a:rPr>
               <a:t>✦</a:t>
             </a:r>
@@ -23539,6 +24664,9 @@
                 <a:solidFill>
                   <a:srgbClr val="0A0A0A"/>
                 </a:solidFill>
+                <a:latin typeface="Pretendard" pitchFamily="34" charset="0"/>
+                <a:ea typeface="Pretendard" pitchFamily="34" charset="-122"/>
+                <a:cs typeface="Pretendard" pitchFamily="34" charset="-120"/>
               </a:rPr>
               <a:t>지역 의료·요양 인프라 디지털화</a:t>
             </a:r>
@@ -23575,6 +24703,9 @@
                 <a:solidFill>
                   <a:srgbClr val="B85042"/>
                 </a:solidFill>
+                <a:latin typeface="Pretendard" pitchFamily="34" charset="0"/>
+                <a:ea typeface="Pretendard" pitchFamily="34" charset="-122"/>
+                <a:cs typeface="Pretendard" pitchFamily="34" charset="-120"/>
               </a:rPr>
               <a:t>✦</a:t>
             </a:r>
@@ -23611,6 +24742,9 @@
                 <a:solidFill>
                   <a:srgbClr val="0A0A0A"/>
                 </a:solidFill>
+                <a:latin typeface="Pretendard" pitchFamily="34" charset="0"/>
+                <a:ea typeface="Pretendard" pitchFamily="34" charset="-122"/>
+                <a:cs typeface="Pretendard" pitchFamily="34" charset="-120"/>
               </a:rPr>
               <a:t>고령친화산업 모델 정립</a:t>
             </a:r>
@@ -23647,6 +24781,9 @@
                 <a:solidFill>
                   <a:srgbClr val="0A0A0A"/>
                 </a:solidFill>
+                <a:latin typeface="Cambria" pitchFamily="34" charset="0"/>
+                <a:ea typeface="Cambria" pitchFamily="34" charset="-122"/>
+                <a:cs typeface="Cambria" pitchFamily="34" charset="-120"/>
               </a:rPr>
               <a:t>p. 27 / 30</a:t>
             </a:r>
@@ -23740,6 +24877,9 @@
                 <a:solidFill>
                   <a:srgbClr val="FAFAF9"/>
                 </a:solidFill>
+                <a:latin typeface="Cambria" pitchFamily="34" charset="0"/>
+                <a:ea typeface="Cambria" pitchFamily="34" charset="-122"/>
+                <a:cs typeface="Cambria" pitchFamily="34" charset="-120"/>
               </a:rPr>
               <a:t>예비창업패키지 2026 · 신청서 · + · 향후 로드맵</a:t>
             </a:r>
@@ -23801,6 +24941,9 @@
                 <a:solidFill>
                   <a:srgbClr val="B85042"/>
                 </a:solidFill>
+                <a:latin typeface="Pretendard" pitchFamily="34" charset="0"/>
+                <a:ea typeface="Pretendard" pitchFamily="34" charset="-122"/>
+                <a:cs typeface="Pretendard" pitchFamily="34" charset="-120"/>
               </a:rPr>
               <a:t>ROADMAP · 1년 → 3년 → 5년</a:t>
             </a:r>
@@ -23837,6 +24980,9 @@
                 <a:solidFill>
                   <a:srgbClr val="0A0A0A"/>
                 </a:solidFill>
+                <a:latin typeface="Cambria" pitchFamily="34" charset="0"/>
+                <a:ea typeface="Cambria" pitchFamily="34" charset="-122"/>
+                <a:cs typeface="Cambria" pitchFamily="34" charset="-120"/>
               </a:rPr>
               <a:t>Roadmap.</a:t>
             </a:r>
@@ -23896,6 +25042,9 @@
                 <a:solidFill>
                   <a:srgbClr val="B85042"/>
                 </a:solidFill>
+                <a:latin typeface="Cambria" pitchFamily="34" charset="0"/>
+                <a:ea typeface="Cambria" pitchFamily="34" charset="-122"/>
+                <a:cs typeface="Cambria" pitchFamily="34" charset="-120"/>
               </a:rPr>
               <a:t>1년 (2026)</a:t>
             </a:r>
@@ -23932,6 +25081,9 @@
                 <a:solidFill>
                   <a:srgbClr val="044E29"/>
                 </a:solidFill>
+                <a:latin typeface="Cambria" pitchFamily="34" charset="0"/>
+                <a:ea typeface="Cambria" pitchFamily="34" charset="-122"/>
+                <a:cs typeface="Cambria" pitchFamily="34" charset="-120"/>
               </a:rPr>
               <a:t>예비창업패키지</a:t>
             </a:r>
@@ -23968,6 +25120,9 @@
                 <a:solidFill>
                   <a:srgbClr val="0A0A0A"/>
                 </a:solidFill>
+                <a:latin typeface="Pretendard" pitchFamily="34" charset="0"/>
+                <a:ea typeface="Pretendard" pitchFamily="34" charset="-122"/>
+                <a:cs typeface="Pretendard" pitchFamily="34" charset="-120"/>
               </a:rPr>
               <a:t>베타 1만 + 시범 5곳 + 매출 1.5억</a:t>
             </a:r>
@@ -24027,6 +25182,9 @@
                 <a:solidFill>
                   <a:srgbClr val="B85042"/>
                 </a:solidFill>
+                <a:latin typeface="Cambria" pitchFamily="34" charset="0"/>
+                <a:ea typeface="Cambria" pitchFamily="34" charset="-122"/>
+                <a:cs typeface="Cambria" pitchFamily="34" charset="-120"/>
               </a:rPr>
               <a:t>3년 (2028)</a:t>
             </a:r>
@@ -24063,6 +25221,9 @@
                 <a:solidFill>
                   <a:srgbClr val="044E29"/>
                 </a:solidFill>
+                <a:latin typeface="Cambria" pitchFamily="34" charset="0"/>
+                <a:ea typeface="Cambria" pitchFamily="34" charset="-122"/>
+                <a:cs typeface="Cambria" pitchFamily="34" charset="-120"/>
               </a:rPr>
               <a:t>TIPS·시리즈 A</a:t>
             </a:r>
@@ -24099,6 +25260,9 @@
                 <a:solidFill>
                   <a:srgbClr val="0A0A0A"/>
                 </a:solidFill>
+                <a:latin typeface="Pretendard" pitchFamily="34" charset="0"/>
+                <a:ea typeface="Pretendard" pitchFamily="34" charset="-122"/>
+                <a:cs typeface="Pretendard" pitchFamily="34" charset="-120"/>
               </a:rPr>
               <a:t>MAU 50만 + B2B 100곳 + 매출 35억</a:t>
             </a:r>
@@ -24158,6 +25322,9 @@
                 <a:solidFill>
                   <a:srgbClr val="B85042"/>
                 </a:solidFill>
+                <a:latin typeface="Cambria" pitchFamily="34" charset="0"/>
+                <a:ea typeface="Cambria" pitchFamily="34" charset="-122"/>
+                <a:cs typeface="Cambria" pitchFamily="34" charset="-120"/>
               </a:rPr>
               <a:t>5년 (2030)</a:t>
             </a:r>
@@ -24194,6 +25361,9 @@
                 <a:solidFill>
                   <a:srgbClr val="044E29"/>
                 </a:solidFill>
+                <a:latin typeface="Cambria" pitchFamily="34" charset="0"/>
+                <a:ea typeface="Cambria" pitchFamily="34" charset="-122"/>
+                <a:cs typeface="Cambria" pitchFamily="34" charset="-120"/>
               </a:rPr>
               <a:t>글로벌·시리즈 B</a:t>
             </a:r>
@@ -24230,6 +25400,9 @@
                 <a:solidFill>
                   <a:srgbClr val="0A0A0A"/>
                 </a:solidFill>
+                <a:latin typeface="Pretendard" pitchFamily="34" charset="0"/>
+                <a:ea typeface="Pretendard" pitchFamily="34" charset="-122"/>
+                <a:cs typeface="Pretendard" pitchFamily="34" charset="-120"/>
               </a:rPr>
               <a:t>한·일·동남아 + MAU 200만 + IPO 검토</a:t>
             </a:r>
@@ -24289,6 +25462,9 @@
                 <a:solidFill>
                   <a:srgbClr val="0A0A0A"/>
                 </a:solidFill>
+                <a:latin typeface="Cambria" pitchFamily="34" charset="0"/>
+                <a:ea typeface="Cambria" pitchFamily="34" charset="-122"/>
+                <a:cs typeface="Cambria" pitchFamily="34" charset="-120"/>
               </a:rPr>
               <a:t>p. 28 / 30</a:t>
             </a:r>
@@ -24382,6 +25558,9 @@
                 <a:solidFill>
                   <a:srgbClr val="FAFAF9"/>
                 </a:solidFill>
+                <a:latin typeface="Cambria" pitchFamily="34" charset="0"/>
+                <a:ea typeface="Cambria" pitchFamily="34" charset="-122"/>
+                <a:cs typeface="Cambria" pitchFamily="34" charset="-120"/>
               </a:rPr>
               <a:t>예비창업패키지 2026 · 신청서 · + · Q&amp;A 준비 자료</a:t>
             </a:r>
@@ -24443,6 +25622,9 @@
                 <a:solidFill>
                   <a:srgbClr val="B85042"/>
                 </a:solidFill>
+                <a:latin typeface="Pretendard" pitchFamily="34" charset="0"/>
+                <a:ea typeface="Pretendard" pitchFamily="34" charset="-122"/>
+                <a:cs typeface="Pretendard" pitchFamily="34" charset="-120"/>
               </a:rPr>
               <a:t>EXPECTED Q&amp;A · 빈출 5문제</a:t>
             </a:r>
@@ -24479,6 +25661,9 @@
                 <a:solidFill>
                   <a:srgbClr val="0A0A0A"/>
                 </a:solidFill>
+                <a:latin typeface="Cambria" pitchFamily="34" charset="0"/>
+                <a:ea typeface="Cambria" pitchFamily="34" charset="-122"/>
+                <a:cs typeface="Cambria" pitchFamily="34" charset="-120"/>
               </a:rPr>
               <a:t>Anticipated Q&amp;A.</a:t>
             </a:r>
@@ -24538,6 +25723,9 @@
                 <a:solidFill>
                   <a:srgbClr val="B85042"/>
                 </a:solidFill>
+                <a:latin typeface="Cambria" pitchFamily="34" charset="0"/>
+                <a:ea typeface="Cambria" pitchFamily="34" charset="-122"/>
+                <a:cs typeface="Cambria" pitchFamily="34" charset="-120"/>
               </a:rPr>
               <a:t>Q1</a:t>
             </a:r>
@@ -24574,6 +25762,9 @@
                 <a:solidFill>
                   <a:srgbClr val="0A0A0A"/>
                 </a:solidFill>
+                <a:latin typeface="Pretendard" pitchFamily="34" charset="0"/>
+                <a:ea typeface="Pretendard" pitchFamily="34" charset="-122"/>
+                <a:cs typeface="Pretendard" pitchFamily="34" charset="-120"/>
               </a:rPr>
               <a:t>1억으로 1년 안에 정말 가능한가요?</a:t>
             </a:r>
@@ -24610,6 +25801,9 @@
                 <a:solidFill>
                   <a:srgbClr val="B85042"/>
                 </a:solidFill>
+                <a:latin typeface="Cambria" pitchFamily="34" charset="0"/>
+                <a:ea typeface="Cambria" pitchFamily="34" charset="-122"/>
+                <a:cs typeface="Cambria" pitchFamily="34" charset="-120"/>
               </a:rPr>
               <a:t>→</a:t>
             </a:r>
@@ -24646,6 +25840,9 @@
                 <a:solidFill>
                   <a:srgbClr val="525252"/>
                 </a:solidFill>
+                <a:latin typeface="Pretendard" pitchFamily="34" charset="0"/>
+                <a:ea typeface="Pretendard" pitchFamily="34" charset="-122"/>
+                <a:cs typeface="Pretendard" pitchFamily="34" charset="-120"/>
               </a:rPr>
               <a:t>인건비 50% + 외주 25% / 시범 5곳까지 일정 확보</a:t>
             </a:r>
@@ -24705,6 +25902,9 @@
                 <a:solidFill>
                   <a:srgbClr val="B85042"/>
                 </a:solidFill>
+                <a:latin typeface="Cambria" pitchFamily="34" charset="0"/>
+                <a:ea typeface="Cambria" pitchFamily="34" charset="-122"/>
+                <a:cs typeface="Cambria" pitchFamily="34" charset="-120"/>
               </a:rPr>
               <a:t>Q2</a:t>
             </a:r>
@@ -24741,6 +25941,9 @@
                 <a:solidFill>
                   <a:srgbClr val="0A0A0A"/>
                 </a:solidFill>
+                <a:latin typeface="Pretendard" pitchFamily="34" charset="0"/>
+                <a:ea typeface="Pretendard" pitchFamily="34" charset="-122"/>
+                <a:cs typeface="Pretendard" pitchFamily="34" charset="-120"/>
               </a:rPr>
               <a:t>AI 96.4% 정확도 검증 근거는?</a:t>
             </a:r>
@@ -24777,6 +25980,9 @@
                 <a:solidFill>
                   <a:srgbClr val="B85042"/>
                 </a:solidFill>
+                <a:latin typeface="Cambria" pitchFamily="34" charset="0"/>
+                <a:ea typeface="Cambria" pitchFamily="34" charset="-122"/>
+                <a:cs typeface="Cambria" pitchFamily="34" charset="-120"/>
               </a:rPr>
               <a:t>→</a:t>
             </a:r>
@@ -24813,6 +26019,9 @@
                 <a:solidFill>
                   <a:srgbClr val="525252"/>
                 </a:solidFill>
+                <a:latin typeface="Pretendard" pitchFamily="34" charset="0"/>
+                <a:ea typeface="Pretendard" pitchFamily="34" charset="-122"/>
+                <a:cs typeface="Pretendard" pitchFamily="34" charset="-120"/>
               </a:rPr>
               <a:t>12,000건 시뮬레이션 + 시범 50명 실측 + 외부 의료진 자문</a:t>
             </a:r>
@@ -24872,6 +26081,9 @@
                 <a:solidFill>
                   <a:srgbClr val="B85042"/>
                 </a:solidFill>
+                <a:latin typeface="Cambria" pitchFamily="34" charset="0"/>
+                <a:ea typeface="Cambria" pitchFamily="34" charset="-122"/>
+                <a:cs typeface="Cambria" pitchFamily="34" charset="-120"/>
               </a:rPr>
               <a:t>Q3</a:t>
             </a:r>
@@ -24908,6 +26120,9 @@
                 <a:solidFill>
                   <a:srgbClr val="0A0A0A"/>
                 </a:solidFill>
+                <a:latin typeface="Pretendard" pitchFamily="34" charset="0"/>
+                <a:ea typeface="Pretendard" pitchFamily="34" charset="-122"/>
+                <a:cs typeface="Pretendard" pitchFamily="34" charset="-120"/>
               </a:rPr>
               <a:t>80대 시니어도 사용 가능?</a:t>
             </a:r>
@@ -24944,6 +26159,9 @@
                 <a:solidFill>
                   <a:srgbClr val="B85042"/>
                 </a:solidFill>
+                <a:latin typeface="Cambria" pitchFamily="34" charset="0"/>
+                <a:ea typeface="Cambria" pitchFamily="34" charset="-122"/>
+                <a:cs typeface="Cambria" pitchFamily="34" charset="-120"/>
               </a:rPr>
               <a:t>→</a:t>
             </a:r>
@@ -24980,6 +26198,9 @@
                 <a:solidFill>
                   <a:srgbClr val="525252"/>
                 </a:solidFill>
+                <a:latin typeface="Pretendard" pitchFamily="34" charset="0"/>
+                <a:ea typeface="Pretendard" pitchFamily="34" charset="-122"/>
+                <a:cs typeface="Pretendard" pitchFamily="34" charset="-120"/>
               </a:rPr>
               <a:t>워치 착용만 필요 · 자녀 등록 구조 · 보건소 대면 교육</a:t>
             </a:r>
@@ -25039,6 +26260,9 @@
                 <a:solidFill>
                   <a:srgbClr val="B85042"/>
                 </a:solidFill>
+                <a:latin typeface="Cambria" pitchFamily="34" charset="0"/>
+                <a:ea typeface="Cambria" pitchFamily="34" charset="-122"/>
+                <a:cs typeface="Cambria" pitchFamily="34" charset="-120"/>
               </a:rPr>
               <a:t>Q4</a:t>
             </a:r>
@@ -25075,6 +26299,9 @@
                 <a:solidFill>
                   <a:srgbClr val="0A0A0A"/>
                 </a:solidFill>
+                <a:latin typeface="Pretendard" pitchFamily="34" charset="0"/>
+                <a:ea typeface="Pretendard" pitchFamily="34" charset="-122"/>
+                <a:cs typeface="Pretendard" pitchFamily="34" charset="-120"/>
               </a:rPr>
               <a:t>의료법·개인정보 규제 대응은?</a:t>
             </a:r>
@@ -25111,6 +26338,9 @@
                 <a:solidFill>
                   <a:srgbClr val="B85042"/>
                 </a:solidFill>
+                <a:latin typeface="Cambria" pitchFamily="34" charset="0"/>
+                <a:ea typeface="Cambria" pitchFamily="34" charset="-122"/>
+                <a:cs typeface="Cambria" pitchFamily="34" charset="-120"/>
               </a:rPr>
               <a:t>→</a:t>
             </a:r>
@@ -25147,6 +26377,9 @@
                 <a:solidFill>
                   <a:srgbClr val="525252"/>
                 </a:solidFill>
+                <a:latin typeface="Pretendard" pitchFamily="34" charset="0"/>
+                <a:ea typeface="Pretendard" pitchFamily="34" charset="-122"/>
+                <a:cs typeface="Pretendard" pitchFamily="34" charset="-120"/>
               </a:rPr>
               <a:t>ISMS-P 진행 중 · 의료정보 보조 분류 · 前 차관 자문</a:t>
             </a:r>
@@ -25206,6 +26439,9 @@
                 <a:solidFill>
                   <a:srgbClr val="B85042"/>
                 </a:solidFill>
+                <a:latin typeface="Cambria" pitchFamily="34" charset="0"/>
+                <a:ea typeface="Cambria" pitchFamily="34" charset="-122"/>
+                <a:cs typeface="Cambria" pitchFamily="34" charset="-120"/>
               </a:rPr>
               <a:t>Q5</a:t>
             </a:r>
@@ -25242,6 +26478,9 @@
                 <a:solidFill>
                   <a:srgbClr val="0A0A0A"/>
                 </a:solidFill>
+                <a:latin typeface="Pretendard" pitchFamily="34" charset="0"/>
+                <a:ea typeface="Pretendard" pitchFamily="34" charset="-122"/>
+                <a:cs typeface="Pretendard" pitchFamily="34" charset="-120"/>
               </a:rPr>
               <a:t>지원 종료 후 자립 가능?</a:t>
             </a:r>
@@ -25278,6 +26517,9 @@
                 <a:solidFill>
                   <a:srgbClr val="B85042"/>
                 </a:solidFill>
+                <a:latin typeface="Cambria" pitchFamily="34" charset="0"/>
+                <a:ea typeface="Cambria" pitchFamily="34" charset="-122"/>
+                <a:cs typeface="Cambria" pitchFamily="34" charset="-120"/>
               </a:rPr>
               <a:t>→</a:t>
             </a:r>
@@ -25314,6 +26556,9 @@
                 <a:solidFill>
                   <a:srgbClr val="525252"/>
                 </a:solidFill>
+                <a:latin typeface="Pretendard" pitchFamily="34" charset="0"/>
+                <a:ea typeface="Pretendard" pitchFamily="34" charset="-122"/>
+                <a:cs typeface="Pretendard" pitchFamily="34" charset="-120"/>
               </a:rPr>
               <a:t>손익분기 21개월 · 시리즈 시드 3억 동시 준비</a:t>
             </a:r>
@@ -25373,6 +26618,9 @@
                 <a:solidFill>
                   <a:srgbClr val="0A0A0A"/>
                 </a:solidFill>
+                <a:latin typeface="Cambria" pitchFamily="34" charset="0"/>
+                <a:ea typeface="Cambria" pitchFamily="34" charset="-122"/>
+                <a:cs typeface="Cambria" pitchFamily="34" charset="-120"/>
               </a:rPr>
               <a:t>p. 29 / 30</a:t>
             </a:r>
@@ -25466,6 +26714,9 @@
                 <a:solidFill>
                   <a:srgbClr val="FAFAF9"/>
                 </a:solidFill>
+                <a:latin typeface="Cambria" pitchFamily="34" charset="0"/>
+                <a:ea typeface="Cambria" pitchFamily="34" charset="-122"/>
+                <a:cs typeface="Cambria" pitchFamily="34" charset="-120"/>
               </a:rPr>
               <a:t>예비창업패키지 2026 · 신청서 · AGENDA · PSST 4단 구조</a:t>
             </a:r>
@@ -25502,6 +26753,9 @@
                 <a:solidFill>
                   <a:srgbClr val="0A0A0A"/>
                 </a:solidFill>
+                <a:latin typeface="Cambria" pitchFamily="34" charset="0"/>
+                <a:ea typeface="Cambria" pitchFamily="34" charset="-122"/>
+                <a:cs typeface="Cambria" pitchFamily="34" charset="-120"/>
               </a:rPr>
               <a:t>Index.</a:t>
             </a:r>
@@ -25538,6 +26792,9 @@
                 <a:solidFill>
                   <a:srgbClr val="525252"/>
                 </a:solidFill>
+                <a:latin typeface="Pretendard" pitchFamily="34" charset="0"/>
+                <a:ea typeface="Pretendard" pitchFamily="34" charset="-122"/>
+                <a:cs typeface="Pretendard" pitchFamily="34" charset="-120"/>
               </a:rPr>
               <a:t>K-Startup 표준 PSST 구조에 따라 4개 섹션으로 구성됩니다.</a:t>
             </a:r>
@@ -25597,6 +26854,9 @@
                 <a:solidFill>
                   <a:srgbClr val="B85042"/>
                 </a:solidFill>
+                <a:latin typeface="Cambria" pitchFamily="34" charset="0"/>
+                <a:ea typeface="Cambria" pitchFamily="34" charset="-122"/>
+                <a:cs typeface="Cambria" pitchFamily="34" charset="-120"/>
               </a:rPr>
               <a:t>P</a:t>
             </a:r>
@@ -25633,6 +26893,9 @@
                 <a:solidFill>
                   <a:srgbClr val="0A0A0A"/>
                 </a:solidFill>
+                <a:latin typeface="Pretendard" pitchFamily="34" charset="0"/>
+                <a:ea typeface="Pretendard" pitchFamily="34" charset="-122"/>
+                <a:cs typeface="Pretendard" pitchFamily="34" charset="-120"/>
               </a:rPr>
               <a:t>PROBLEM 문제 인식</a:t>
             </a:r>
@@ -25669,6 +26932,9 @@
                 <a:solidFill>
                   <a:srgbClr val="525252"/>
                 </a:solidFill>
+                <a:latin typeface="Pretendard" pitchFamily="34" charset="0"/>
+                <a:ea typeface="Pretendard" pitchFamily="34" charset="-122"/>
+                <a:cs typeface="Pretendard" pitchFamily="34" charset="-120"/>
               </a:rPr>
               <a:t>창업 배경 / 시장 문제 / 정책 부합성</a:t>
             </a:r>
@@ -25705,6 +26971,9 @@
                 <a:solidFill>
                   <a:srgbClr val="B85042"/>
                 </a:solidFill>
+                <a:latin typeface="Cambria" pitchFamily="34" charset="0"/>
+                <a:ea typeface="Cambria" pitchFamily="34" charset="-122"/>
+                <a:cs typeface="Cambria" pitchFamily="34" charset="-120"/>
               </a:rPr>
               <a:t>p. 04 - 07</a:t>
             </a:r>
@@ -25764,6 +27033,9 @@
                 <a:solidFill>
                   <a:srgbClr val="B85042"/>
                 </a:solidFill>
+                <a:latin typeface="Cambria" pitchFamily="34" charset="0"/>
+                <a:ea typeface="Cambria" pitchFamily="34" charset="-122"/>
+                <a:cs typeface="Cambria" pitchFamily="34" charset="-120"/>
               </a:rPr>
               <a:t>S</a:t>
             </a:r>
@@ -25800,6 +27072,9 @@
                 <a:solidFill>
                   <a:srgbClr val="0A0A0A"/>
                 </a:solidFill>
+                <a:latin typeface="Pretendard" pitchFamily="34" charset="0"/>
+                <a:ea typeface="Pretendard" pitchFamily="34" charset="-122"/>
+                <a:cs typeface="Pretendard" pitchFamily="34" charset="-120"/>
               </a:rPr>
               <a:t>SOLUTION 실현 가능성</a:t>
             </a:r>
@@ -25836,6 +27111,9 @@
                 <a:solidFill>
                   <a:srgbClr val="525252"/>
                 </a:solidFill>
+                <a:latin typeface="Pretendard" pitchFamily="34" charset="0"/>
+                <a:ea typeface="Pretendard" pitchFamily="34" charset="-122"/>
+                <a:cs typeface="Pretendard" pitchFamily="34" charset="-120"/>
               </a:rPr>
               <a:t>솔루션 / 기술 / 추진 일정 / 자금 운용</a:t>
             </a:r>
@@ -25872,6 +27150,9 @@
                 <a:solidFill>
                   <a:srgbClr val="B85042"/>
                 </a:solidFill>
+                <a:latin typeface="Cambria" pitchFamily="34" charset="0"/>
+                <a:ea typeface="Cambria" pitchFamily="34" charset="-122"/>
+                <a:cs typeface="Cambria" pitchFamily="34" charset="-120"/>
               </a:rPr>
               <a:t>p. 08 - 13</a:t>
             </a:r>
@@ -25931,6 +27212,9 @@
                 <a:solidFill>
                   <a:srgbClr val="B85042"/>
                 </a:solidFill>
+                <a:latin typeface="Cambria" pitchFamily="34" charset="0"/>
+                <a:ea typeface="Cambria" pitchFamily="34" charset="-122"/>
+                <a:cs typeface="Cambria" pitchFamily="34" charset="-120"/>
               </a:rPr>
               <a:t>S</a:t>
             </a:r>
@@ -25967,6 +27251,9 @@
                 <a:solidFill>
                   <a:srgbClr val="0A0A0A"/>
                 </a:solidFill>
+                <a:latin typeface="Pretendard" pitchFamily="34" charset="0"/>
+                <a:ea typeface="Pretendard" pitchFamily="34" charset="-122"/>
+                <a:cs typeface="Pretendard" pitchFamily="34" charset="-120"/>
               </a:rPr>
               <a:t>SCALE-UP 성장 전략</a:t>
             </a:r>
@@ -26003,6 +27290,9 @@
                 <a:solidFill>
                   <a:srgbClr val="525252"/>
                 </a:solidFill>
+                <a:latin typeface="Pretendard" pitchFamily="34" charset="0"/>
+                <a:ea typeface="Pretendard" pitchFamily="34" charset="-122"/>
+                <a:cs typeface="Pretendard" pitchFamily="34" charset="-120"/>
               </a:rPr>
               <a:t>BM / 매출 추정 / 일자리 / 사회적 가치</a:t>
             </a:r>
@@ -26039,6 +27329,9 @@
                 <a:solidFill>
                   <a:srgbClr val="B85042"/>
                 </a:solidFill>
+                <a:latin typeface="Cambria" pitchFamily="34" charset="0"/>
+                <a:ea typeface="Cambria" pitchFamily="34" charset="-122"/>
+                <a:cs typeface="Cambria" pitchFamily="34" charset="-120"/>
               </a:rPr>
               <a:t>p. 14 - 19</a:t>
             </a:r>
@@ -26098,6 +27391,9 @@
                 <a:solidFill>
                   <a:srgbClr val="B85042"/>
                 </a:solidFill>
+                <a:latin typeface="Cambria" pitchFamily="34" charset="0"/>
+                <a:ea typeface="Cambria" pitchFamily="34" charset="-122"/>
+                <a:cs typeface="Cambria" pitchFamily="34" charset="-120"/>
               </a:rPr>
               <a:t>T</a:t>
             </a:r>
@@ -26134,6 +27430,9 @@
                 <a:solidFill>
                   <a:srgbClr val="0A0A0A"/>
                 </a:solidFill>
+                <a:latin typeface="Pretendard" pitchFamily="34" charset="0"/>
+                <a:ea typeface="Pretendard" pitchFamily="34" charset="-122"/>
+                <a:cs typeface="Pretendard" pitchFamily="34" charset="-120"/>
               </a:rPr>
               <a:t>TEAM 팀 구성</a:t>
             </a:r>
@@ -26170,6 +27469,9 @@
                 <a:solidFill>
                   <a:srgbClr val="525252"/>
                 </a:solidFill>
+                <a:latin typeface="Pretendard" pitchFamily="34" charset="0"/>
+                <a:ea typeface="Pretendard" pitchFamily="34" charset="-122"/>
+                <a:cs typeface="Pretendard" pitchFamily="34" charset="-120"/>
               </a:rPr>
               <a:t>대표 / 핵심 인력 / 자문 / 협력 네트워크</a:t>
             </a:r>
@@ -26206,6 +27508,9 @@
                 <a:solidFill>
                   <a:srgbClr val="B85042"/>
                 </a:solidFill>
+                <a:latin typeface="Cambria" pitchFamily="34" charset="0"/>
+                <a:ea typeface="Cambria" pitchFamily="34" charset="-122"/>
+                <a:cs typeface="Cambria" pitchFamily="34" charset="-120"/>
               </a:rPr>
               <a:t>p. 20 - 24</a:t>
             </a:r>
@@ -26265,6 +27570,9 @@
                 <a:solidFill>
                   <a:srgbClr val="B85042"/>
                 </a:solidFill>
+                <a:latin typeface="Cambria" pitchFamily="34" charset="0"/>
+                <a:ea typeface="Cambria" pitchFamily="34" charset="-122"/>
+                <a:cs typeface="Cambria" pitchFamily="34" charset="-120"/>
               </a:rPr>
               <a:t>+</a:t>
             </a:r>
@@ -26301,6 +27609,9 @@
                 <a:solidFill>
                   <a:srgbClr val="0A0A0A"/>
                 </a:solidFill>
+                <a:latin typeface="Pretendard" pitchFamily="34" charset="0"/>
+                <a:ea typeface="Pretendard" pitchFamily="34" charset="-122"/>
+                <a:cs typeface="Pretendard" pitchFamily="34" charset="-120"/>
               </a:rPr>
               <a:t>위험·지속·기대 효과</a:t>
             </a:r>
@@ -26337,6 +27648,9 @@
                 <a:solidFill>
                   <a:srgbClr val="525252"/>
                 </a:solidFill>
+                <a:latin typeface="Pretendard" pitchFamily="34" charset="0"/>
+                <a:ea typeface="Pretendard" pitchFamily="34" charset="-122"/>
+                <a:cs typeface="Pretendard" pitchFamily="34" charset="-120"/>
               </a:rPr>
               <a:t>필수 보강 슬라이드</a:t>
             </a:r>
@@ -26373,6 +27687,9 @@
                 <a:solidFill>
                   <a:srgbClr val="B85042"/>
                 </a:solidFill>
+                <a:latin typeface="Cambria" pitchFamily="34" charset="0"/>
+                <a:ea typeface="Cambria" pitchFamily="34" charset="-122"/>
+                <a:cs typeface="Cambria" pitchFamily="34" charset="-120"/>
               </a:rPr>
               <a:t>p. 25 - 27</a:t>
             </a:r>
@@ -26432,6 +27749,9 @@
                 <a:solidFill>
                   <a:srgbClr val="B85042"/>
                 </a:solidFill>
+                <a:latin typeface="Cambria" pitchFamily="34" charset="0"/>
+                <a:ea typeface="Cambria" pitchFamily="34" charset="-122"/>
+                <a:cs typeface="Cambria" pitchFamily="34" charset="-120"/>
               </a:rPr>
               <a:t>+</a:t>
             </a:r>
@@ -26468,6 +27788,9 @@
                 <a:solidFill>
                   <a:srgbClr val="0A0A0A"/>
                 </a:solidFill>
+                <a:latin typeface="Pretendard" pitchFamily="34" charset="0"/>
+                <a:ea typeface="Pretendard" pitchFamily="34" charset="-122"/>
+                <a:cs typeface="Pretendard" pitchFamily="34" charset="-120"/>
               </a:rPr>
               <a:t>로드맵 · Q&amp;A · 마무리</a:t>
             </a:r>
@@ -26504,6 +27827,9 @@
                 <a:solidFill>
                   <a:srgbClr val="525252"/>
                 </a:solidFill>
+                <a:latin typeface="Pretendard" pitchFamily="34" charset="0"/>
+                <a:ea typeface="Pretendard" pitchFamily="34" charset="-122"/>
+                <a:cs typeface="Pretendard" pitchFamily="34" charset="-120"/>
               </a:rPr>
               <a:t>마무리</a:t>
             </a:r>
@@ -26540,6 +27866,9 @@
                 <a:solidFill>
                   <a:srgbClr val="B85042"/>
                 </a:solidFill>
+                <a:latin typeface="Cambria" pitchFamily="34" charset="0"/>
+                <a:ea typeface="Cambria" pitchFamily="34" charset="-122"/>
+                <a:cs typeface="Cambria" pitchFamily="34" charset="-120"/>
               </a:rPr>
               <a:t>p. 28 - 30</a:t>
             </a:r>
@@ -26599,6 +27928,9 @@
                 <a:solidFill>
                   <a:srgbClr val="0A0A0A"/>
                 </a:solidFill>
+                <a:latin typeface="Cambria" pitchFamily="34" charset="0"/>
+                <a:ea typeface="Cambria" pitchFamily="34" charset="-122"/>
+                <a:cs typeface="Cambria" pitchFamily="34" charset="-120"/>
               </a:rPr>
               <a:t>p. 03 / 30</a:t>
             </a:r>
@@ -26692,6 +28024,9 @@
                 <a:solidFill>
                   <a:srgbClr val="FAFAF9"/>
                 </a:solidFill>
+                <a:latin typeface="Cambria" pitchFamily="34" charset="0"/>
+                <a:ea typeface="Cambria" pitchFamily="34" charset="-122"/>
+                <a:cs typeface="Cambria" pitchFamily="34" charset="-120"/>
               </a:rPr>
               <a:t>Thank You.</a:t>
             </a:r>
@@ -26751,6 +28086,9 @@
                 <a:solidFill>
                   <a:srgbClr val="E7B5A8"/>
                 </a:solidFill>
+                <a:latin typeface="Pretendard" pitchFamily="34" charset="0"/>
+                <a:ea typeface="Pretendard" pitchFamily="34" charset="-122"/>
+                <a:cs typeface="Pretendard" pitchFamily="34" charset="-120"/>
               </a:rPr>
               <a:t>부모님의 안부를 기술이 챙기는 시대,</a:t>
             </a:r>
@@ -26787,6 +28125,9 @@
                 <a:solidFill>
                   <a:srgbClr val="FAFAF9"/>
                 </a:solidFill>
+                <a:latin typeface="Pretendard" pitchFamily="34" charset="0"/>
+                <a:ea typeface="Pretendard" pitchFamily="34" charset="-122"/>
+                <a:cs typeface="Pretendard" pitchFamily="34" charset="-120"/>
               </a:rPr>
               <a:t>그 첫 발걸음에 함께해 주세요.</a:t>
             </a:r>
@@ -26823,6 +28164,9 @@
                 <a:solidFill>
                   <a:srgbClr val="E7B5A8"/>
                 </a:solidFill>
+                <a:latin typeface="Cambria" pitchFamily="34" charset="0"/>
+                <a:ea typeface="Cambria" pitchFamily="34" charset="-122"/>
+                <a:cs typeface="Cambria" pitchFamily="34" charset="-120"/>
               </a:rPr>
               <a:t>CONTACT</a:t>
             </a:r>
@@ -26882,6 +28226,9 @@
                 <a:solidFill>
                   <a:srgbClr val="FAFAF9"/>
                 </a:solidFill>
+                <a:latin typeface="Pretendard" pitchFamily="34" charset="0"/>
+                <a:ea typeface="Pretendard" pitchFamily="34" charset="-122"/>
+                <a:cs typeface="Pretendard" pitchFamily="34" charset="-120"/>
               </a:rPr>
               <a:t>이수진 · CEO &amp; Founder</a:t>
             </a:r>
@@ -26918,6 +28265,9 @@
                 <a:solidFill>
                   <a:srgbClr val="FAFAF9"/>
                 </a:solidFill>
+                <a:latin typeface="Pretendard" pitchFamily="34" charset="0"/>
+                <a:ea typeface="Pretendard" pitchFamily="34" charset="-122"/>
+                <a:cs typeface="Pretendard" pitchFamily="34" charset="-120"/>
               </a:rPr>
               <a:t>ir@silvercarelab.kr</a:t>
             </a:r>
@@ -26954,6 +28304,9 @@
                 <a:solidFill>
                   <a:srgbClr val="FAFAF9"/>
                 </a:solidFill>
+                <a:latin typeface="Pretendard" pitchFamily="34" charset="0"/>
+                <a:ea typeface="Pretendard" pitchFamily="34" charset="-122"/>
+                <a:cs typeface="Pretendard" pitchFamily="34" charset="-120"/>
               </a:rPr>
               <a:t>+82-2-1234-5678</a:t>
             </a:r>
@@ -26990,6 +28343,9 @@
                 <a:solidFill>
                   <a:srgbClr val="FAFAF9"/>
                 </a:solidFill>
+                <a:latin typeface="Pretendard" pitchFamily="34" charset="0"/>
+                <a:ea typeface="Pretendard" pitchFamily="34" charset="-122"/>
+                <a:cs typeface="Pretendard" pitchFamily="34" charset="-120"/>
               </a:rPr>
               <a:t>서울 종로구 광화문로 1</a:t>
             </a:r>
@@ -27026,6 +28382,9 @@
                 <a:solidFill>
                   <a:srgbClr val="E7B5A8"/>
                 </a:solidFill>
+                <a:latin typeface="Cambria" pitchFamily="34" charset="0"/>
+                <a:ea typeface="Cambria" pitchFamily="34" charset="-122"/>
+                <a:cs typeface="Cambria" pitchFamily="34" charset="-120"/>
               </a:rPr>
               <a:t>㈜실버케어랩 (SilverCareLab Co., Ltd.) · 2026</a:t>
             </a:r>
@@ -27119,6 +28478,9 @@
                 <a:solidFill>
                   <a:srgbClr val="FAFAF9"/>
                 </a:solidFill>
+                <a:latin typeface="Cambria" pitchFamily="34" charset="0"/>
+                <a:ea typeface="Cambria" pitchFamily="34" charset="-122"/>
+                <a:cs typeface="Cambria" pitchFamily="34" charset="-120"/>
               </a:rPr>
               <a:t>예비창업패키지 2026 · 신청서 · P · 문제 인식 — 창업 아이템 배경</a:t>
             </a:r>
@@ -27180,6 +28542,9 @@
                 <a:solidFill>
                   <a:srgbClr val="B85042"/>
                 </a:solidFill>
+                <a:latin typeface="Pretendard" pitchFamily="34" charset="0"/>
+                <a:ea typeface="Pretendard" pitchFamily="34" charset="-122"/>
+                <a:cs typeface="Pretendard" pitchFamily="34" charset="-120"/>
               </a:rPr>
               <a:t>P-01 / 창업 아이템 배경</a:t>
             </a:r>
@@ -27216,6 +28581,9 @@
                 <a:solidFill>
                   <a:srgbClr val="0A0A0A"/>
                 </a:solidFill>
+                <a:latin typeface="Pretendard" pitchFamily="34" charset="0"/>
+                <a:ea typeface="Pretendard" pitchFamily="34" charset="-122"/>
+                <a:cs typeface="Pretendard" pitchFamily="34" charset="-120"/>
               </a:rPr>
               <a:t>1,500만 시니어가</a:t>
             </a:r>
@@ -27252,6 +28620,9 @@
                 <a:solidFill>
                   <a:srgbClr val="B85042"/>
                 </a:solidFill>
+                <a:latin typeface="Pretendard" pitchFamily="34" charset="0"/>
+                <a:ea typeface="Pretendard" pitchFamily="34" charset="-122"/>
+                <a:cs typeface="Pretendard" pitchFamily="34" charset="-120"/>
               </a:rPr>
               <a:t>안부를 혼자 챙깁니다.</a:t>
             </a:r>
@@ -27311,6 +28682,9 @@
                 <a:solidFill>
                   <a:srgbClr val="0A0A0A"/>
                 </a:solidFill>
+                <a:latin typeface="Cambria" pitchFamily="34" charset="0"/>
+                <a:ea typeface="Cambria" pitchFamily="34" charset="-122"/>
+                <a:cs typeface="Cambria" pitchFamily="34" charset="-120"/>
               </a:rPr>
               <a:t>1,028만</a:t>
             </a:r>
@@ -27370,6 +28744,9 @@
                 <a:solidFill>
                   <a:srgbClr val="044E29"/>
                 </a:solidFill>
+                <a:latin typeface="Pretendard" pitchFamily="34" charset="0"/>
+                <a:ea typeface="Pretendard" pitchFamily="34" charset="-122"/>
+                <a:cs typeface="Pretendard" pitchFamily="34" charset="-120"/>
               </a:rPr>
               <a:t>65세+ 인구 (2025)</a:t>
             </a:r>
@@ -27406,6 +28783,9 @@
                 <a:solidFill>
                   <a:srgbClr val="525252"/>
                 </a:solidFill>
+                <a:latin typeface="Pretendard" pitchFamily="34" charset="0"/>
+                <a:ea typeface="Pretendard" pitchFamily="34" charset="-122"/>
+                <a:cs typeface="Pretendard" pitchFamily="34" charset="-120"/>
               </a:rPr>
               <a:t>통계청 2025</a:t>
             </a:r>
@@ -27442,6 +28822,9 @@
                 <a:solidFill>
                   <a:srgbClr val="0A0A0A"/>
                 </a:solidFill>
+                <a:latin typeface="Cambria" pitchFamily="34" charset="0"/>
+                <a:ea typeface="Cambria" pitchFamily="34" charset="-122"/>
+                <a:cs typeface="Cambria" pitchFamily="34" charset="-120"/>
               </a:rPr>
               <a:t>250만</a:t>
             </a:r>
@@ -27501,6 +28884,9 @@
                 <a:solidFill>
                   <a:srgbClr val="044E29"/>
                 </a:solidFill>
+                <a:latin typeface="Pretendard" pitchFamily="34" charset="0"/>
+                <a:ea typeface="Pretendard" pitchFamily="34" charset="-122"/>
+                <a:cs typeface="Pretendard" pitchFamily="34" charset="-120"/>
               </a:rPr>
               <a:t>독거 노인 1인 가구</a:t>
             </a:r>
@@ -27537,6 +28923,9 @@
                 <a:solidFill>
                   <a:srgbClr val="525252"/>
                 </a:solidFill>
+                <a:latin typeface="Pretendard" pitchFamily="34" charset="0"/>
+                <a:ea typeface="Pretendard" pitchFamily="34" charset="-122"/>
+                <a:cs typeface="Pretendard" pitchFamily="34" charset="-120"/>
               </a:rPr>
               <a:t>통계청 2025 / +38% YoY</a:t>
             </a:r>
@@ -27573,6 +28962,9 @@
                 <a:solidFill>
                   <a:srgbClr val="0A0A0A"/>
                 </a:solidFill>
+                <a:latin typeface="Cambria" pitchFamily="34" charset="0"/>
+                <a:ea typeface="Cambria" pitchFamily="34" charset="-122"/>
+                <a:cs typeface="Cambria" pitchFamily="34" charset="-120"/>
               </a:rPr>
               <a:t>1,800만</a:t>
             </a:r>
@@ -27632,6 +29024,9 @@
                 <a:solidFill>
                   <a:srgbClr val="044E29"/>
                 </a:solidFill>
+                <a:latin typeface="Pretendard" pitchFamily="34" charset="0"/>
+                <a:ea typeface="Pretendard" pitchFamily="34" charset="-122"/>
+                <a:cs typeface="Pretendard" pitchFamily="34" charset="-120"/>
               </a:rPr>
               <a:t>65세+ 인구 (2030E)</a:t>
             </a:r>
@@ -27668,6 +29063,9 @@
                 <a:solidFill>
                   <a:srgbClr val="525252"/>
                 </a:solidFill>
+                <a:latin typeface="Pretendard" pitchFamily="34" charset="0"/>
+                <a:ea typeface="Pretendard" pitchFamily="34" charset="-122"/>
+                <a:cs typeface="Pretendard" pitchFamily="34" charset="-120"/>
               </a:rPr>
               <a:t>장래인구추계</a:t>
             </a:r>
@@ -27704,6 +29102,9 @@
                 <a:solidFill>
                   <a:srgbClr val="525252"/>
                 </a:solidFill>
+                <a:latin typeface="Pretendard" pitchFamily="34" charset="0"/>
+                <a:ea typeface="Pretendard" pitchFamily="34" charset="-122"/>
+                <a:cs typeface="Pretendard" pitchFamily="34" charset="-120"/>
               </a:rPr>
               <a:t>출처: 통계청 「2025 인구주택총조사」 / 통계청 장래인구추계</a:t>
             </a:r>
@@ -27740,6 +29141,9 @@
                 <a:solidFill>
                   <a:srgbClr val="0A0A0A"/>
                 </a:solidFill>
+                <a:latin typeface="Cambria" pitchFamily="34" charset="0"/>
+                <a:ea typeface="Cambria" pitchFamily="34" charset="-122"/>
+                <a:cs typeface="Cambria" pitchFamily="34" charset="-120"/>
               </a:rPr>
               <a:t>p. 04 / 30</a:t>
             </a:r>
@@ -27833,6 +29237,9 @@
                 <a:solidFill>
                   <a:srgbClr val="FAFAF9"/>
                 </a:solidFill>
+                <a:latin typeface="Cambria" pitchFamily="34" charset="0"/>
+                <a:ea typeface="Cambria" pitchFamily="34" charset="-122"/>
+                <a:cs typeface="Cambria" pitchFamily="34" charset="-120"/>
               </a:rPr>
               <a:t>예비창업패키지 2026 · 신청서 · P · 문제 인식 — 시장 문제</a:t>
             </a:r>
@@ -27894,6 +29301,9 @@
                 <a:solidFill>
                   <a:srgbClr val="B85042"/>
                 </a:solidFill>
+                <a:latin typeface="Pretendard" pitchFamily="34" charset="0"/>
+                <a:ea typeface="Pretendard" pitchFamily="34" charset="-122"/>
+                <a:cs typeface="Pretendard" pitchFamily="34" charset="-120"/>
               </a:rPr>
               <a:t>P-02 / 시장 문제</a:t>
             </a:r>
@@ -27930,6 +29340,9 @@
                 <a:solidFill>
                   <a:srgbClr val="0A0A0A"/>
                 </a:solidFill>
+                <a:latin typeface="Pretendard" pitchFamily="34" charset="0"/>
+                <a:ea typeface="Pretendard" pitchFamily="34" charset="-122"/>
+                <a:cs typeface="Pretendard" pitchFamily="34" charset="-120"/>
               </a:rPr>
               <a:t>독거 노인 80%가</a:t>
             </a:r>
@@ -27966,6 +29379,9 @@
                 <a:solidFill>
                   <a:srgbClr val="B85042"/>
                 </a:solidFill>
+                <a:latin typeface="Pretendard" pitchFamily="34" charset="0"/>
+                <a:ea typeface="Pretendard" pitchFamily="34" charset="-122"/>
+                <a:cs typeface="Pretendard" pitchFamily="34" charset="-120"/>
               </a:rPr>
               <a:t>약·식사·낙상을 혼자 관리.</a:t>
             </a:r>
@@ -28025,6 +29441,9 @@
                 <a:solidFill>
                   <a:srgbClr val="525252"/>
                 </a:solidFill>
+                <a:latin typeface="Pretendard" pitchFamily="34" charset="0"/>
+                <a:ea typeface="Pretendard" pitchFamily="34" charset="-122"/>
+                <a:cs typeface="Pretendard" pitchFamily="34" charset="-120"/>
               </a:rPr>
               <a:t>자녀는 매일 7번 묻지만, 멀리 있어 답을 받지 못합니다.</a:t>
             </a:r>
@@ -28109,6 +29528,9 @@
                 <a:solidFill>
                   <a:srgbClr val="B85042"/>
                 </a:solidFill>
+                <a:latin typeface="Cambria" pitchFamily="34" charset="0"/>
+                <a:ea typeface="Cambria" pitchFamily="34" charset="-122"/>
+                <a:cs typeface="Cambria" pitchFamily="34" charset="-120"/>
               </a:rPr>
               <a:t>01</a:t>
             </a:r>
@@ -28145,6 +29567,9 @@
                 <a:solidFill>
                   <a:srgbClr val="0A0A0A"/>
                 </a:solidFill>
+                <a:latin typeface="Pretendard" pitchFamily="34" charset="0"/>
+                <a:ea typeface="Pretendard" pitchFamily="34" charset="-122"/>
+                <a:cs typeface="Pretendard" pitchFamily="34" charset="-120"/>
               </a:rPr>
               <a:t>약 복약 누락</a:t>
             </a:r>
@@ -28184,6 +29609,9 @@
                 <a:solidFill>
                   <a:srgbClr val="525252"/>
                 </a:solidFill>
+                <a:latin typeface="Pretendard" pitchFamily="34" charset="0"/>
+                <a:ea typeface="Pretendard" pitchFamily="34" charset="-122"/>
+                <a:cs typeface="Pretendard" pitchFamily="34" charset="-120"/>
               </a:rPr>
               <a:t>복약률 67% 수준 — 약 의존성 노인 30% 입원 원인 1위</a:t>
             </a:r>
@@ -28220,6 +29648,9 @@
                 <a:solidFill>
                   <a:srgbClr val="044E29"/>
                 </a:solidFill>
+                <a:latin typeface="Pretendard" pitchFamily="34" charset="0"/>
+                <a:ea typeface="Pretendard" pitchFamily="34" charset="-122"/>
+                <a:cs typeface="Pretendard" pitchFamily="34" charset="-120"/>
               </a:rPr>
               <a:t>보건복지부 실태조사</a:t>
             </a:r>
@@ -28304,6 +29735,9 @@
                 <a:solidFill>
                   <a:srgbClr val="B85042"/>
                 </a:solidFill>
+                <a:latin typeface="Cambria" pitchFamily="34" charset="0"/>
+                <a:ea typeface="Cambria" pitchFamily="34" charset="-122"/>
+                <a:cs typeface="Cambria" pitchFamily="34" charset="-120"/>
               </a:rPr>
               <a:t>02</a:t>
             </a:r>
@@ -28340,6 +29774,9 @@
                 <a:solidFill>
                   <a:srgbClr val="0A0A0A"/>
                 </a:solidFill>
+                <a:latin typeface="Pretendard" pitchFamily="34" charset="0"/>
+                <a:ea typeface="Pretendard" pitchFamily="34" charset="-122"/>
+                <a:cs typeface="Pretendard" pitchFamily="34" charset="-120"/>
               </a:rPr>
               <a:t>낙상 사고</a:t>
             </a:r>
@@ -28379,6 +29816,9 @@
                 <a:solidFill>
                   <a:srgbClr val="525252"/>
                 </a:solidFill>
+                <a:latin typeface="Pretendard" pitchFamily="34" charset="0"/>
+                <a:ea typeface="Pretendard" pitchFamily="34" charset="-122"/>
+                <a:cs typeface="Pretendard" pitchFamily="34" charset="-120"/>
               </a:rPr>
               <a:t>65세+ 낙상 사망률 인구 10만명당 32명 — 교통사고 4배</a:t>
             </a:r>
@@ -28415,6 +29855,9 @@
                 <a:solidFill>
                   <a:srgbClr val="044E29"/>
                 </a:solidFill>
+                <a:latin typeface="Pretendard" pitchFamily="34" charset="0"/>
+                <a:ea typeface="Pretendard" pitchFamily="34" charset="-122"/>
+                <a:cs typeface="Pretendard" pitchFamily="34" charset="-120"/>
               </a:rPr>
               <a:t>통계청 사망원인</a:t>
             </a:r>
@@ -28499,6 +29942,9 @@
                 <a:solidFill>
                   <a:srgbClr val="B85042"/>
                 </a:solidFill>
+                <a:latin typeface="Cambria" pitchFamily="34" charset="0"/>
+                <a:ea typeface="Cambria" pitchFamily="34" charset="-122"/>
+                <a:cs typeface="Cambria" pitchFamily="34" charset="-120"/>
               </a:rPr>
               <a:t>03</a:t>
             </a:r>
@@ -28535,6 +29981,9 @@
                 <a:solidFill>
                   <a:srgbClr val="0A0A0A"/>
                 </a:solidFill>
+                <a:latin typeface="Pretendard" pitchFamily="34" charset="0"/>
+                <a:ea typeface="Pretendard" pitchFamily="34" charset="-122"/>
+                <a:cs typeface="Pretendard" pitchFamily="34" charset="-120"/>
               </a:rPr>
               <a:t>사회적 고립</a:t>
             </a:r>
@@ -28574,6 +30023,9 @@
                 <a:solidFill>
                   <a:srgbClr val="525252"/>
                 </a:solidFill>
+                <a:latin typeface="Pretendard" pitchFamily="34" charset="0"/>
+                <a:ea typeface="Pretendard" pitchFamily="34" charset="-122"/>
+                <a:cs typeface="Pretendard" pitchFamily="34" charset="-120"/>
               </a:rPr>
               <a:t>독거 노인 우울 유병률 28% — 비독거 대비 2.4배</a:t>
             </a:r>
@@ -28610,6 +30062,9 @@
                 <a:solidFill>
                   <a:srgbClr val="044E29"/>
                 </a:solidFill>
+                <a:latin typeface="Pretendard" pitchFamily="34" charset="0"/>
+                <a:ea typeface="Pretendard" pitchFamily="34" charset="-122"/>
+                <a:cs typeface="Pretendard" pitchFamily="34" charset="-120"/>
               </a:rPr>
               <a:t>보건복지부 정신건강조사</a:t>
             </a:r>
@@ -28646,6 +30101,9 @@
                 <a:solidFill>
                   <a:srgbClr val="0A0A0A"/>
                 </a:solidFill>
+                <a:latin typeface="Cambria" pitchFamily="34" charset="0"/>
+                <a:ea typeface="Cambria" pitchFamily="34" charset="-122"/>
+                <a:cs typeface="Cambria" pitchFamily="34" charset="-120"/>
               </a:rPr>
               <a:t>p. 05 / 30</a:t>
             </a:r>
@@ -28739,6 +30197,9 @@
                 <a:solidFill>
                   <a:srgbClr val="FAFAF9"/>
                 </a:solidFill>
+                <a:latin typeface="Cambria" pitchFamily="34" charset="0"/>
+                <a:ea typeface="Cambria" pitchFamily="34" charset="-122"/>
+                <a:cs typeface="Cambria" pitchFamily="34" charset="-120"/>
               </a:rPr>
               <a:t>예비창업패키지 2026 · 신청서 · P · 문제 인식 — 정책 부합성</a:t>
             </a:r>
@@ -28800,6 +30261,9 @@
                 <a:solidFill>
                   <a:srgbClr val="B85042"/>
                 </a:solidFill>
+                <a:latin typeface="Pretendard" pitchFamily="34" charset="0"/>
+                <a:ea typeface="Pretendard" pitchFamily="34" charset="-122"/>
+                <a:cs typeface="Pretendard" pitchFamily="34" charset="-120"/>
               </a:rPr>
               <a:t>P-03 / 정책 부합성</a:t>
             </a:r>
@@ -28836,6 +30300,9 @@
                 <a:solidFill>
                   <a:srgbClr val="0A0A0A"/>
                 </a:solidFill>
+                <a:latin typeface="Pretendard" pitchFamily="34" charset="0"/>
+                <a:ea typeface="Pretendard" pitchFamily="34" charset="-122"/>
+                <a:cs typeface="Pretendard" pitchFamily="34" charset="-120"/>
               </a:rPr>
               <a:t>정부의 5대 정책과</a:t>
             </a:r>
@@ -28872,6 +30339,9 @@
                 <a:solidFill>
                   <a:srgbClr val="044E29"/>
                 </a:solidFill>
+                <a:latin typeface="Pretendard" pitchFamily="34" charset="0"/>
+                <a:ea typeface="Pretendard" pitchFamily="34" charset="-122"/>
+                <a:cs typeface="Pretendard" pitchFamily="34" charset="-120"/>
               </a:rPr>
               <a:t>정확히 맞물립니다.</a:t>
             </a:r>
@@ -28931,6 +30401,9 @@
                 <a:solidFill>
                   <a:srgbClr val="B85042"/>
                 </a:solidFill>
+                <a:latin typeface="Pretendard" pitchFamily="34" charset="0"/>
+                <a:ea typeface="Pretendard" pitchFamily="34" charset="-122"/>
+                <a:cs typeface="Pretendard" pitchFamily="34" charset="-120"/>
               </a:rPr>
               <a:t>✓</a:t>
             </a:r>
@@ -28967,6 +30440,9 @@
                 <a:solidFill>
                   <a:srgbClr val="0A0A0A"/>
                 </a:solidFill>
+                <a:latin typeface="Pretendard" pitchFamily="34" charset="0"/>
+                <a:ea typeface="Pretendard" pitchFamily="34" charset="-122"/>
+                <a:cs typeface="Pretendard" pitchFamily="34" charset="-120"/>
               </a:rPr>
               <a:t>초고령사회 대응 종합계획 (2025)</a:t>
             </a:r>
@@ -29003,6 +30479,9 @@
                 <a:solidFill>
                   <a:srgbClr val="525252"/>
                 </a:solidFill>
+                <a:latin typeface="Pretendard" pitchFamily="34" charset="0"/>
+                <a:ea typeface="Pretendard" pitchFamily="34" charset="-122"/>
+                <a:cs typeface="Pretendard" pitchFamily="34" charset="-120"/>
               </a:rPr>
               <a:t>디지털 시니어 케어 우선 과제 매칭</a:t>
             </a:r>
@@ -29062,6 +30541,9 @@
                 <a:solidFill>
                   <a:srgbClr val="B85042"/>
                 </a:solidFill>
+                <a:latin typeface="Pretendard" pitchFamily="34" charset="0"/>
+                <a:ea typeface="Pretendard" pitchFamily="34" charset="-122"/>
+                <a:cs typeface="Pretendard" pitchFamily="34" charset="-120"/>
               </a:rPr>
               <a:t>✓</a:t>
             </a:r>
@@ -29098,6 +30580,9 @@
                 <a:solidFill>
                   <a:srgbClr val="0A0A0A"/>
                 </a:solidFill>
+                <a:latin typeface="Pretendard" pitchFamily="34" charset="0"/>
+                <a:ea typeface="Pretendard" pitchFamily="34" charset="-122"/>
+                <a:cs typeface="Pretendard" pitchFamily="34" charset="-120"/>
               </a:rPr>
               <a:t>디지털 헬스케어 5조 예산 (2026)</a:t>
             </a:r>
@@ -29134,6 +30619,9 @@
                 <a:solidFill>
                   <a:srgbClr val="525252"/>
                 </a:solidFill>
+                <a:latin typeface="Pretendard" pitchFamily="34" charset="0"/>
+                <a:ea typeface="Pretendard" pitchFamily="34" charset="-122"/>
+                <a:cs typeface="Pretendard" pitchFamily="34" charset="-120"/>
               </a:rPr>
               <a:t>AI·IoT 기반 의료 보조 서비스 핵심 영역</a:t>
             </a:r>
@@ -29193,6 +30681,9 @@
                 <a:solidFill>
                   <a:srgbClr val="B85042"/>
                 </a:solidFill>
+                <a:latin typeface="Pretendard" pitchFamily="34" charset="0"/>
+                <a:ea typeface="Pretendard" pitchFamily="34" charset="-122"/>
+                <a:cs typeface="Pretendard" pitchFamily="34" charset="-120"/>
               </a:rPr>
               <a:t>✓</a:t>
             </a:r>
@@ -29229,6 +30720,9 @@
                 <a:solidFill>
                   <a:srgbClr val="0A0A0A"/>
                 </a:solidFill>
+                <a:latin typeface="Pretendard" pitchFamily="34" charset="0"/>
+                <a:ea typeface="Pretendard" pitchFamily="34" charset="-122"/>
+                <a:cs typeface="Pretendard" pitchFamily="34" charset="-120"/>
               </a:rPr>
               <a:t>고령친화산업 진흥 기본계획</a:t>
             </a:r>
@@ -29265,6 +30759,9 @@
                 <a:solidFill>
                   <a:srgbClr val="525252"/>
                 </a:solidFill>
+                <a:latin typeface="Pretendard" pitchFamily="34" charset="0"/>
+                <a:ea typeface="Pretendard" pitchFamily="34" charset="-122"/>
+                <a:cs typeface="Pretendard" pitchFamily="34" charset="-120"/>
               </a:rPr>
               <a:t>보건복지부 산업 육성 카테고리 정확히 일치</a:t>
             </a:r>
@@ -29324,6 +30821,9 @@
                 <a:solidFill>
                   <a:srgbClr val="B85042"/>
                 </a:solidFill>
+                <a:latin typeface="Pretendard" pitchFamily="34" charset="0"/>
+                <a:ea typeface="Pretendard" pitchFamily="34" charset="-122"/>
+                <a:cs typeface="Pretendard" pitchFamily="34" charset="-120"/>
               </a:rPr>
               <a:t>✓</a:t>
             </a:r>
@@ -29360,6 +30860,9 @@
                 <a:solidFill>
                   <a:srgbClr val="0A0A0A"/>
                 </a:solidFill>
+                <a:latin typeface="Pretendard" pitchFamily="34" charset="0"/>
+                <a:ea typeface="Pretendard" pitchFamily="34" charset="-122"/>
+                <a:cs typeface="Pretendard" pitchFamily="34" charset="-120"/>
               </a:rPr>
               <a:t>청년 일자리 창출 기본계획</a:t>
             </a:r>
@@ -29396,6 +30899,9 @@
                 <a:solidFill>
                   <a:srgbClr val="525252"/>
                 </a:solidFill>
+                <a:latin typeface="Pretendard" pitchFamily="34" charset="0"/>
+                <a:ea typeface="Pretendard" pitchFamily="34" charset="-122"/>
+                <a:cs typeface="Pretendard" pitchFamily="34" charset="-120"/>
               </a:rPr>
               <a:t>1년 5명 → 3년 20명 신규 채용 계획</a:t>
             </a:r>
@@ -29455,6 +30961,9 @@
                 <a:solidFill>
                   <a:srgbClr val="B85042"/>
                 </a:solidFill>
+                <a:latin typeface="Pretendard" pitchFamily="34" charset="0"/>
+                <a:ea typeface="Pretendard" pitchFamily="34" charset="-122"/>
+                <a:cs typeface="Pretendard" pitchFamily="34" charset="-120"/>
               </a:rPr>
               <a:t>✓</a:t>
             </a:r>
@@ -29491,6 +31000,9 @@
                 <a:solidFill>
                   <a:srgbClr val="0A0A0A"/>
                 </a:solidFill>
+                <a:latin typeface="Pretendard" pitchFamily="34" charset="0"/>
+                <a:ea typeface="Pretendard" pitchFamily="34" charset="-122"/>
+                <a:cs typeface="Pretendard" pitchFamily="34" charset="-120"/>
               </a:rPr>
               <a:t>디지털 뉴딜 2.0</a:t>
             </a:r>
@@ -29527,6 +31039,9 @@
                 <a:solidFill>
                   <a:srgbClr val="525252"/>
                 </a:solidFill>
+                <a:latin typeface="Pretendard" pitchFamily="34" charset="0"/>
+                <a:ea typeface="Pretendard" pitchFamily="34" charset="-122"/>
+                <a:cs typeface="Pretendard" pitchFamily="34" charset="-120"/>
               </a:rPr>
               <a:t>데이터·AI 기반 신산업 육성</a:t>
             </a:r>
@@ -29586,6 +31101,9 @@
                 <a:solidFill>
                   <a:srgbClr val="525252"/>
                 </a:solidFill>
+                <a:latin typeface="Pretendard" pitchFamily="34" charset="0"/>
+                <a:ea typeface="Pretendard" pitchFamily="34" charset="-122"/>
+                <a:cs typeface="Pretendard" pitchFamily="34" charset="-120"/>
               </a:rPr>
               <a:t>출처: 보건복지부 「2026 고령화 정책」 / 과기부 「디지털 뉴딜 2.0」</a:t>
             </a:r>
@@ -29622,6 +31140,9 @@
                 <a:solidFill>
                   <a:srgbClr val="0A0A0A"/>
                 </a:solidFill>
+                <a:latin typeface="Cambria" pitchFamily="34" charset="0"/>
+                <a:ea typeface="Cambria" pitchFamily="34" charset="-122"/>
+                <a:cs typeface="Cambria" pitchFamily="34" charset="-120"/>
               </a:rPr>
               <a:t>p. 06 / 30</a:t>
             </a:r>
@@ -29715,6 +31236,9 @@
                 <a:solidFill>
                   <a:srgbClr val="FAFAF9"/>
                 </a:solidFill>
+                <a:latin typeface="Cambria" pitchFamily="34" charset="0"/>
+                <a:ea typeface="Cambria" pitchFamily="34" charset="-122"/>
+                <a:cs typeface="Cambria" pitchFamily="34" charset="-120"/>
               </a:rPr>
               <a:t>예비창업패키지 2026 · 신청서 · P · 문제 인식 — 목표 고객</a:t>
             </a:r>
@@ -29776,6 +31300,9 @@
                 <a:solidFill>
                   <a:srgbClr val="B85042"/>
                 </a:solidFill>
+                <a:latin typeface="Pretendard" pitchFamily="34" charset="0"/>
+                <a:ea typeface="Pretendard" pitchFamily="34" charset="-122"/>
+                <a:cs typeface="Pretendard" pitchFamily="34" charset="-120"/>
               </a:rPr>
               <a:t>P-04 / 목표 고객 (양면 시장)</a:t>
             </a:r>
@@ -29812,6 +31339,9 @@
                 <a:solidFill>
                   <a:srgbClr val="0A0A0A"/>
                 </a:solidFill>
+                <a:latin typeface="Pretendard" pitchFamily="34" charset="0"/>
+                <a:ea typeface="Pretendard" pitchFamily="34" charset="-122"/>
+                <a:cs typeface="Pretendard" pitchFamily="34" charset="-120"/>
               </a:rPr>
               <a:t>65세 시니어 +</a:t>
             </a:r>
@@ -29848,6 +31378,9 @@
                 <a:solidFill>
                   <a:srgbClr val="B85042"/>
                 </a:solidFill>
+                <a:latin typeface="Pretendard" pitchFamily="34" charset="0"/>
+                <a:ea typeface="Pretendard" pitchFamily="34" charset="-122"/>
+                <a:cs typeface="Pretendard" pitchFamily="34" charset="-120"/>
               </a:rPr>
               <a:t>자녀(40-55세) 양면 시장.</a:t>
             </a:r>
@@ -29955,6 +31488,9 @@
                 <a:solidFill>
                   <a:srgbClr val="B85042"/>
                 </a:solidFill>
+                <a:latin typeface="Cambria" pitchFamily="34" charset="0"/>
+                <a:ea typeface="Cambria" pitchFamily="34" charset="-122"/>
+                <a:cs typeface="Cambria" pitchFamily="34" charset="-120"/>
               </a:rPr>
               <a:t>PERSONA 1</a:t>
             </a:r>
@@ -29991,6 +31527,9 @@
                 <a:solidFill>
                   <a:srgbClr val="0A0A0A"/>
                 </a:solidFill>
+                <a:latin typeface="Pretendard" pitchFamily="34" charset="0"/>
+                <a:ea typeface="Pretendard" pitchFamily="34" charset="-122"/>
+                <a:cs typeface="Pretendard" pitchFamily="34" charset="-120"/>
               </a:rPr>
               <a:t>시니어 (1차 사용자)</a:t>
             </a:r>
@@ -30027,6 +31566,9 @@
                 <a:solidFill>
                   <a:srgbClr val="044E29"/>
                 </a:solidFill>
+                <a:latin typeface="Pretendard" pitchFamily="34" charset="0"/>
+                <a:ea typeface="Pretendard" pitchFamily="34" charset="-122"/>
+                <a:cs typeface="Pretendard" pitchFamily="34" charset="-120"/>
               </a:rPr>
               <a:t>65~80세 / 독거 또는 부부</a:t>
             </a:r>
@@ -30066,6 +31608,9 @@
                 <a:solidFill>
                   <a:srgbClr val="0A0A0A"/>
                 </a:solidFill>
+                <a:latin typeface="Pretendard" pitchFamily="34" charset="0"/>
+                <a:ea typeface="Pretendard" pitchFamily="34" charset="-122"/>
+                <a:cs typeface="Pretendard" pitchFamily="34" charset="-120"/>
               </a:rPr>
               <a:t>"손주랑 영상통화는 하지만, 약은 자주 빠뜨려요."</a:t>
             </a:r>
@@ -30102,6 +31647,9 @@
                 <a:solidFill>
                   <a:srgbClr val="525252"/>
                 </a:solidFill>
+                <a:latin typeface="Pretendard" pitchFamily="34" charset="0"/>
+                <a:ea typeface="Pretendard" pitchFamily="34" charset="-122"/>
+                <a:cs typeface="Pretendard" pitchFamily="34" charset="-120"/>
               </a:rPr>
               <a:t>· 기술: 카톡·유튜브 정도</a:t>
             </a:r>
@@ -30138,6 +31686,9 @@
                 <a:solidFill>
                   <a:srgbClr val="525252"/>
                 </a:solidFill>
+                <a:latin typeface="Pretendard" pitchFamily="34" charset="0"/>
+                <a:ea typeface="Pretendard" pitchFamily="34" charset="-122"/>
+                <a:cs typeface="Pretendard" pitchFamily="34" charset="-120"/>
               </a:rPr>
               <a:t>· 건강: 만성질환 1-2개</a:t>
             </a:r>
@@ -30174,6 +31725,9 @@
                 <a:solidFill>
                   <a:srgbClr val="525252"/>
                 </a:solidFill>
+                <a:latin typeface="Pretendard" pitchFamily="34" charset="0"/>
+                <a:ea typeface="Pretendard" pitchFamily="34" charset="-122"/>
+                <a:cs typeface="Pretendard" pitchFamily="34" charset="-120"/>
               </a:rPr>
               <a:t>· 월 가용 비용: ₩20-30만</a:t>
             </a:r>
@@ -30258,6 +31812,9 @@
                 <a:solidFill>
                   <a:srgbClr val="B85042"/>
                 </a:solidFill>
+                <a:latin typeface="Cambria" pitchFamily="34" charset="0"/>
+                <a:ea typeface="Cambria" pitchFamily="34" charset="-122"/>
+                <a:cs typeface="Cambria" pitchFamily="34" charset="-120"/>
               </a:rPr>
               <a:t>PERSONA 2</a:t>
             </a:r>
@@ -30294,6 +31851,9 @@
                 <a:solidFill>
                   <a:srgbClr val="0A0A0A"/>
                 </a:solidFill>
+                <a:latin typeface="Pretendard" pitchFamily="34" charset="0"/>
+                <a:ea typeface="Pretendard" pitchFamily="34" charset="-122"/>
+                <a:cs typeface="Pretendard" pitchFamily="34" charset="-120"/>
               </a:rPr>
               <a:t>자녀 (구매·결제자)</a:t>
             </a:r>
@@ -30330,6 +31890,9 @@
                 <a:solidFill>
                   <a:srgbClr val="044E29"/>
                 </a:solidFill>
+                <a:latin typeface="Pretendard" pitchFamily="34" charset="0"/>
+                <a:ea typeface="Pretendard" pitchFamily="34" charset="-122"/>
+                <a:cs typeface="Pretendard" pitchFamily="34" charset="-120"/>
               </a:rPr>
               <a:t>40~55세 / 직장인</a:t>
             </a:r>
@@ -30369,6 +31932,9 @@
                 <a:solidFill>
                   <a:srgbClr val="0A0A0A"/>
                 </a:solidFill>
+                <a:latin typeface="Pretendard" pitchFamily="34" charset="0"/>
+                <a:ea typeface="Pretendard" pitchFamily="34" charset="-122"/>
+                <a:cs typeface="Pretendard" pitchFamily="34" charset="-120"/>
               </a:rPr>
               <a:t>"엄마 안부를 매일 묻는데, 답이 없으면 너무 불안해요."</a:t>
             </a:r>
@@ -30405,6 +31971,9 @@
                 <a:solidFill>
                   <a:srgbClr val="525252"/>
                 </a:solidFill>
+                <a:latin typeface="Pretendard" pitchFamily="34" charset="0"/>
+                <a:ea typeface="Pretendard" pitchFamily="34" charset="-122"/>
+                <a:cs typeface="Pretendard" pitchFamily="34" charset="-120"/>
               </a:rPr>
               <a:t>· 기술: 디지털 친숙</a:t>
             </a:r>
@@ -30441,6 +32010,9 @@
                 <a:solidFill>
                   <a:srgbClr val="525252"/>
                 </a:solidFill>
+                <a:latin typeface="Pretendard" pitchFamily="34" charset="0"/>
+                <a:ea typeface="Pretendard" pitchFamily="34" charset="-122"/>
+                <a:cs typeface="Pretendard" pitchFamily="34" charset="-120"/>
               </a:rPr>
               <a:t>· 관심: 부모 안부·의료</a:t>
             </a:r>
@@ -30477,6 +32049,9 @@
                 <a:solidFill>
                   <a:srgbClr val="525252"/>
                 </a:solidFill>
+                <a:latin typeface="Pretendard" pitchFamily="34" charset="0"/>
+                <a:ea typeface="Pretendard" pitchFamily="34" charset="-122"/>
+                <a:cs typeface="Pretendard" pitchFamily="34" charset="-120"/>
               </a:rPr>
               <a:t>· 월 가용 비용: ₩30-50만 (효도)</a:t>
             </a:r>
@@ -30513,6 +32088,9 @@
                 <a:solidFill>
                   <a:srgbClr val="0A0A0A"/>
                 </a:solidFill>
+                <a:latin typeface="Cambria" pitchFamily="34" charset="0"/>
+                <a:ea typeface="Cambria" pitchFamily="34" charset="-122"/>
+                <a:cs typeface="Cambria" pitchFamily="34" charset="-120"/>
               </a:rPr>
               <a:t>p. 07 / 30</a:t>
             </a:r>
@@ -30606,6 +32184,9 @@
                 <a:solidFill>
                   <a:srgbClr val="FAFAF9"/>
                 </a:solidFill>
+                <a:latin typeface="Cambria" pitchFamily="34" charset="0"/>
+                <a:ea typeface="Cambria" pitchFamily="34" charset="-122"/>
+                <a:cs typeface="Cambria" pitchFamily="34" charset="-120"/>
               </a:rPr>
               <a:t>예비창업패키지 2026 · 신청서 · S · 실현 가능성 — 핵심 솔루션</a:t>
             </a:r>
@@ -30667,6 +32248,9 @@
                 <a:solidFill>
                   <a:srgbClr val="B85042"/>
                 </a:solidFill>
+                <a:latin typeface="Pretendard" pitchFamily="34" charset="0"/>
+                <a:ea typeface="Pretendard" pitchFamily="34" charset="-122"/>
+                <a:cs typeface="Pretendard" pitchFamily="34" charset="-120"/>
               </a:rPr>
               <a:t>S-01 / 핵심 솔루션</a:t>
             </a:r>
@@ -30703,6 +32287,9 @@
                 <a:solidFill>
                   <a:srgbClr val="0A0A0A"/>
                 </a:solidFill>
+                <a:latin typeface="Pretendard" pitchFamily="34" charset="0"/>
+                <a:ea typeface="Pretendard" pitchFamily="34" charset="-122"/>
+                <a:cs typeface="Pretendard" pitchFamily="34" charset="-120"/>
               </a:rPr>
               <a:t>4-in-1 통합 케어 솔루션.</a:t>
             </a:r>
@@ -30739,6 +32326,9 @@
                 <a:solidFill>
                   <a:srgbClr val="B85042"/>
                 </a:solidFill>
+                <a:latin typeface="Pretendard" pitchFamily="34" charset="0"/>
+                <a:ea typeface="Pretendard" pitchFamily="34" charset="-122"/>
+                <a:cs typeface="Pretendard" pitchFamily="34" charset="-120"/>
               </a:rPr>
               <a:t>"내가 못 챙기는 부모님의 하루를 기술이 챙긴다."</a:t>
             </a:r>
@@ -30823,6 +32413,9 @@
                 <a:solidFill>
                   <a:srgbClr val="B85042"/>
                 </a:solidFill>
+                <a:latin typeface="Cambria" pitchFamily="34" charset="0"/>
+                <a:ea typeface="Cambria" pitchFamily="34" charset="-122"/>
+                <a:cs typeface="Cambria" pitchFamily="34" charset="-120"/>
               </a:rPr>
               <a:t>01</a:t>
             </a:r>
@@ -30859,6 +32452,9 @@
                 <a:solidFill>
                   <a:srgbClr val="0A0A0A"/>
                 </a:solidFill>
+                <a:latin typeface="Pretendard" pitchFamily="34" charset="0"/>
+                <a:ea typeface="Pretendard" pitchFamily="34" charset="-122"/>
+                <a:cs typeface="Pretendard" pitchFamily="34" charset="-120"/>
               </a:rPr>
               <a:t>복약·식사 알림</a:t>
             </a:r>
@@ -30921,6 +32517,9 @@
                 <a:solidFill>
                   <a:srgbClr val="525252"/>
                 </a:solidFill>
+                <a:latin typeface="Pretendard" pitchFamily="34" charset="0"/>
+                <a:ea typeface="Pretendard" pitchFamily="34" charset="-122"/>
+                <a:cs typeface="Pretendard" pitchFamily="34" charset="-120"/>
               </a:rPr>
               <a:t>음성+문자+자녀 동시 알림</a:t>
             </a:r>
@@ -30938,6 +32537,9 @@
                 <a:solidFill>
                   <a:srgbClr val="525252"/>
                 </a:solidFill>
+                <a:latin typeface="Pretendard" pitchFamily="34" charset="0"/>
+                <a:ea typeface="Pretendard" pitchFamily="34" charset="-122"/>
+                <a:cs typeface="Pretendard" pitchFamily="34" charset="-120"/>
               </a:rPr>
               <a:t>복약률 67% → 94%</a:t>
             </a:r>
@@ -30999,6 +32601,9 @@
                 <a:solidFill>
                   <a:srgbClr val="B85042"/>
                 </a:solidFill>
+                <a:latin typeface="Cambria" pitchFamily="34" charset="0"/>
+                <a:ea typeface="Cambria" pitchFamily="34" charset="-122"/>
+                <a:cs typeface="Cambria" pitchFamily="34" charset="-120"/>
               </a:rPr>
               <a:t>02</a:t>
             </a:r>
@@ -31035,6 +32640,9 @@
                 <a:solidFill>
                   <a:srgbClr val="0A0A0A"/>
                 </a:solidFill>
+                <a:latin typeface="Pretendard" pitchFamily="34" charset="0"/>
+                <a:ea typeface="Pretendard" pitchFamily="34" charset="-122"/>
+                <a:cs typeface="Pretendard" pitchFamily="34" charset="-120"/>
               </a:rPr>
               <a:t>낙상·이상 감지</a:t>
             </a:r>
@@ -31097,6 +32705,9 @@
                 <a:solidFill>
                   <a:srgbClr val="525252"/>
                 </a:solidFill>
+                <a:latin typeface="Pretendard" pitchFamily="34" charset="0"/>
+                <a:ea typeface="Pretendard" pitchFamily="34" charset="-122"/>
+                <a:cs typeface="Pretendard" pitchFamily="34" charset="-120"/>
               </a:rPr>
               <a:t>스마트워치 + 가정 패드 융합</a:t>
             </a:r>
@@ -31114,6 +32725,9 @@
                 <a:solidFill>
                   <a:srgbClr val="525252"/>
                 </a:solidFill>
+                <a:latin typeface="Pretendard" pitchFamily="34" charset="0"/>
+                <a:ea typeface="Pretendard" pitchFamily="34" charset="-122"/>
+                <a:cs typeface="Pretendard" pitchFamily="34" charset="-120"/>
               </a:rPr>
               <a:t>AI 정확도 96.4%</a:t>
             </a:r>
@@ -31175,6 +32789,9 @@
                 <a:solidFill>
                   <a:srgbClr val="B85042"/>
                 </a:solidFill>
+                <a:latin typeface="Cambria" pitchFamily="34" charset="0"/>
+                <a:ea typeface="Cambria" pitchFamily="34" charset="-122"/>
+                <a:cs typeface="Cambria" pitchFamily="34" charset="-120"/>
               </a:rPr>
               <a:t>03</a:t>
             </a:r>
@@ -31211,6 +32828,9 @@
                 <a:solidFill>
                   <a:srgbClr val="0A0A0A"/>
                 </a:solidFill>
+                <a:latin typeface="Pretendard" pitchFamily="34" charset="0"/>
+                <a:ea typeface="Pretendard" pitchFamily="34" charset="-122"/>
+                <a:cs typeface="Pretendard" pitchFamily="34" charset="-120"/>
               </a:rPr>
               <a:t>가족 안부</a:t>
             </a:r>
@@ -31273,6 +32893,9 @@
                 <a:solidFill>
                   <a:srgbClr val="525252"/>
                 </a:solidFill>
+                <a:latin typeface="Pretendard" pitchFamily="34" charset="0"/>
+                <a:ea typeface="Pretendard" pitchFamily="34" charset="-122"/>
+                <a:cs typeface="Pretendard" pitchFamily="34" charset="-120"/>
               </a:rPr>
               <a:t>주간 활동 리포트 자동 발송</a:t>
             </a:r>
@@ -31290,6 +32913,9 @@
                 <a:solidFill>
                   <a:srgbClr val="525252"/>
                 </a:solidFill>
+                <a:latin typeface="Pretendard" pitchFamily="34" charset="0"/>
+                <a:ea typeface="Pretendard" pitchFamily="34" charset="-122"/>
+                <a:cs typeface="Pretendard" pitchFamily="34" charset="-120"/>
               </a:rPr>
               <a:t>자녀 화상통화 자동 예약</a:t>
             </a:r>
@@ -31351,6 +32977,9 @@
                 <a:solidFill>
                   <a:srgbClr val="B85042"/>
                 </a:solidFill>
+                <a:latin typeface="Cambria" pitchFamily="34" charset="0"/>
+                <a:ea typeface="Cambria" pitchFamily="34" charset="-122"/>
+                <a:cs typeface="Cambria" pitchFamily="34" charset="-120"/>
               </a:rPr>
               <a:t>04</a:t>
             </a:r>
@@ -31387,6 +33016,9 @@
                 <a:solidFill>
                   <a:srgbClr val="0A0A0A"/>
                 </a:solidFill>
+                <a:latin typeface="Pretendard" pitchFamily="34" charset="0"/>
+                <a:ea typeface="Pretendard" pitchFamily="34" charset="-122"/>
+                <a:cs typeface="Pretendard" pitchFamily="34" charset="-120"/>
               </a:rPr>
               <a:t>의료·돌봄 연결</a:t>
             </a:r>
@@ -31449,6 +33081,9 @@
                 <a:solidFill>
                   <a:srgbClr val="525252"/>
                 </a:solidFill>
+                <a:latin typeface="Pretendard" pitchFamily="34" charset="0"/>
+                <a:ea typeface="Pretendard" pitchFamily="34" charset="-122"/>
+                <a:cs typeface="Pretendard" pitchFamily="34" charset="-120"/>
               </a:rPr>
               <a:t>5km 내 병원·요양사 매칭</a:t>
             </a:r>
@@ -31466,6 +33101,9 @@
                 <a:solidFill>
                   <a:srgbClr val="525252"/>
                 </a:solidFill>
+                <a:latin typeface="Pretendard" pitchFamily="34" charset="0"/>
+                <a:ea typeface="Pretendard" pitchFamily="34" charset="-122"/>
+                <a:cs typeface="Pretendard" pitchFamily="34" charset="-120"/>
               </a:rPr>
               <a:t>원클릭 예약·결제</a:t>
             </a:r>
@@ -31502,6 +33140,9 @@
                 <a:solidFill>
                   <a:srgbClr val="0A0A0A"/>
                 </a:solidFill>
+                <a:latin typeface="Cambria" pitchFamily="34" charset="0"/>
+                <a:ea typeface="Cambria" pitchFamily="34" charset="-122"/>
+                <a:cs typeface="Cambria" pitchFamily="34" charset="-120"/>
               </a:rPr>
               <a:t>p. 08 / 30</a:t>
             </a:r>
@@ -31595,6 +33236,9 @@
                 <a:solidFill>
                   <a:srgbClr val="FAFAF9"/>
                 </a:solidFill>
+                <a:latin typeface="Cambria" pitchFamily="34" charset="0"/>
+                <a:ea typeface="Cambria" pitchFamily="34" charset="-122"/>
+                <a:cs typeface="Cambria" pitchFamily="34" charset="-120"/>
               </a:rPr>
               <a:t>예비창업패키지 2026 · 신청서 · S · 실현 가능성 — 기술 차별성</a:t>
             </a:r>
@@ -31656,6 +33300,9 @@
                 <a:solidFill>
                   <a:srgbClr val="B85042"/>
                 </a:solidFill>
+                <a:latin typeface="Pretendard" pitchFamily="34" charset="0"/>
+                <a:ea typeface="Pretendard" pitchFamily="34" charset="-122"/>
+                <a:cs typeface="Pretendard" pitchFamily="34" charset="-120"/>
               </a:rPr>
               <a:t>S-02 / 기술 차별성 (AI 정확도)</a:t>
             </a:r>
@@ -31692,6 +33339,9 @@
                 <a:solidFill>
                   <a:srgbClr val="525252"/>
                 </a:solidFill>
+                <a:latin typeface="Pretendard" pitchFamily="34" charset="0"/>
+                <a:ea typeface="Pretendard" pitchFamily="34" charset="-122"/>
+                <a:cs typeface="Pretendard" pitchFamily="34" charset="-120"/>
               </a:rPr>
               <a:t>AI 정확도</a:t>
             </a:r>
@@ -31728,6 +33378,9 @@
                 <a:solidFill>
                   <a:srgbClr val="0A0A0A"/>
                 </a:solidFill>
+                <a:latin typeface="Cambria" pitchFamily="34" charset="0"/>
+                <a:ea typeface="Cambria" pitchFamily="34" charset="-122"/>
+                <a:cs typeface="Cambria" pitchFamily="34" charset="-120"/>
               </a:rPr>
               <a:t>96.4%</a:t>
             </a:r>
@@ -31764,6 +33417,9 @@
                 <a:solidFill>
                   <a:srgbClr val="B85042"/>
                 </a:solidFill>
+                <a:latin typeface="Cambria" pitchFamily="34" charset="0"/>
+                <a:ea typeface="Cambria" pitchFamily="34" charset="-122"/>
+                <a:cs typeface="Cambria" pitchFamily="34" charset="-120"/>
               </a:rPr>
               <a:t>(업계 평균 84%)</a:t>
             </a:r>
@@ -31839,6 +33495,9 @@
                 <a:solidFill>
                   <a:srgbClr val="525252"/>
                 </a:solidFill>
+                <a:latin typeface="Pretendard" pitchFamily="34" charset="0"/>
+                <a:ea typeface="Pretendard" pitchFamily="34" charset="-122"/>
+                <a:cs typeface="Pretendard" pitchFamily="34" charset="-120"/>
               </a:rPr>
               <a:t>출처: 자체 시뮬레이션 12,000건 + 시범 50명 실측 / 업계 평균은 공개 논문·벤더 데이터 기반</a:t>
             </a:r>
@@ -31875,6 +33534,9 @@
                 <a:solidFill>
                   <a:srgbClr val="0A0A0A"/>
                 </a:solidFill>
+                <a:latin typeface="Cambria" pitchFamily="34" charset="0"/>
+                <a:ea typeface="Cambria" pitchFamily="34" charset="-122"/>
+                <a:cs typeface="Cambria" pitchFamily="34" charset="-120"/>
               </a:rPr>
               <a:t>p. 09 / 30</a:t>
             </a:r>
